--- a/paper/venues/iclr2027/figures/lab2sim/fig1-hero.pptx
+++ b/paper/venues/iclr2027/figures/lab2sim/fig1-hero.pptx
@@ -10,8 +10,8 @@
   <p:notesMasterIdLst>
     <p:notesMasterId r:id="rId3"/>
   </p:notesMasterIdLst>
-  <p:sldSz cx="19050000" cy="5334000"/>
-  <p:notesSz cx="5334000" cy="19050000"/>
+  <p:sldSz cx="19050000" cy="4476750"/>
+  <p:notesSz cx="4476750" cy="19050000"/>
   <p:defaultTextStyle>
     <a:lvl1pPr marL="0" algn="l" defTabSz="914400" rtl="0" eaLnBrk="1" latinLnBrk="0" hangingPunct="1">
       <a:defRPr sz="1800" kern="1200">
@@ -502,7 +502,7 @@
           <a:p>
             <a:r>
               <a:rPr lang="en-US" dirty="0"/>
-              <a:t>{"spec":"lab2sim-hero.figure-spec.json","mode":"inspired","canonical":"SVG","provenance":[{"id":"prov-reference-decisions","source":"fig1-reference-audit.md","section":"Reference-led decisions","claim":"Inspired editorial hierarchy and output-gallery allocation","applies_to":["rule-input","rule-agent","rule-results","result-region"],"status":"verified"},{"id":"prov-pipeline","source":"../../../../../docs/design/agent-driven-asset-generation-pipeline.md","section":"Five-stage pipeline","claim":"Evidence retrieval, spec freeze, generation, and ConvertAsset admission","applies_to":["stage-retrieve","stage-spec","stage-build","stage-admit"],"status":"verified"},{"id":"prov-oven-spec","source":"../../../../../docs/design/asset-specs/ika-oven-125.md","section":"Frozen manufacturer fields","claim":"OVEN 125 identity, door articulation, and shelf count","applies_to":["spec-body"],"status":"verified"},{"id":"prov-input-photo","source":"../../../../../external_artifacts/asset_evidence/ika-oven-125/image1.png","section":"Multimodal image request","claim":"Manufacturer photograph of IKA OVEN 125","applies_to":["input-catalog-photo"],"status":"user-provided"},{"id":"prov-fehling-r10","source":"../../../../../outputs/lab2sim_fig1_retake_20260917/fehling_r10/t30_hero_tabletop.png","section":"Figure 1 current-delivery scenes","claim":"Camera-only render of the Fehling r10 retained t30 scene state","applies_to":["scene-fehling"],"status":"verified"},{"id":"prov-powder-r4","source":"../../../../../outputs/task09_powder_bottle_r4_20260911/video/close_0960.png","section":"Figure 1 current-delivery scenes","claim":"Powder r4 observed-state replay with the HUD removed by a documented crop","applies_to":["scene-powder"],"status":"verified"},{"id":"prov-titration-r17","source":"../../../../../outputs/scientific_workbench_traditional_acid_base_titration_vr_r1_7_20260908/handoff/scientific_workbench_traditional_acid_base_titration_vr_r1_7/evidence/initial_scene/after_end_scale_scene_overview.png","section":"Figure 1 current-delivery scenes","claim":"Titration r1.7 endpoint scene overview","applies_to":["scene-titration"],"status":"verified"},{"id":"prov-oven-r2","source":"../../../../../outputs/scientific_workbench_task12_oven_unload_dual_glassware_vr_r2_20260904/handoff/scientific_workbench_task12_oven_unload_dual_glassware_vr_r2/evidence/initial_scene/open_oven_station.png","section":"Figure 1 current-delivery scenes","claim":"OVEN r2 open-door station with dual glassware","applies_to":["scene-oven"],"status":"verified"}],"limitations":"PptxGenJS uses editable native panels, text, and segmented connectors; rounded SVG connector geometry may differ from the canonical SVG."}</a:t>
+              <a:t>{"spec":"lab2sim-hero.figure-spec.json","mode":"inspired","canonical":"SVG","provenance":[{"id":"prov-reference-decisions","source":"fig1-reference-audit.md","section":"Reference-led decisions","claim":"Inspired editorial hierarchy and output-gallery allocation","applies_to":["rule-headers","result-region"],"status":"verified"},{"id":"prov-pipeline","source":"../../../../../docs/design/agent-driven-asset-generation-pipeline.md","section":"Five-stage pipeline","claim":"Evidence retrieval, spec freeze, generation, and ConvertAsset admission","applies_to":["stage-retrieve","stage-spec","stage-build","stage-admit"],"status":"verified"},{"id":"prov-oven-spec","source":"../../../../../docs/design/asset-specs/ika-oven-125.md","section":"Frozen manufacturer fields","claim":"OVEN 125 identity, door articulation, and shelf count","applies_to":["spec-body"],"status":"verified"},{"id":"prov-input-photo","source":"../../../../../external_artifacts/asset_evidence/ika-oven-125/image1.png","section":"Multimodal image request","claim":"Manufacturer photograph of IKA OVEN 125","applies_to":["input-catalog-photo"],"status":"user-provided"},{"id":"prov-fehling-r10","source":"../../../../../outputs/lab2sim_fig1_retake_20260917/fehling_r10/t30_hero_tabletop.png","section":"Figure 1 current-delivery scenes","claim":"Camera-only render of the Fehling r10 retained t30 scene state","applies_to":["scene-fehling"],"status":"verified"},{"id":"prov-powder-r4","source":"../../../../../outputs/task09_powder_bottle_r4_20260911/video/close_0960.png","section":"Figure 1 current-delivery scenes","claim":"Powder r4 observed-state replay with the HUD removed by a documented crop","applies_to":["scene-powder"],"status":"verified"},{"id":"prov-titration-r17","source":"../../../../../outputs/scientific_workbench_traditional_acid_base_titration_vr_r1_7_20260908/handoff/scientific_workbench_traditional_acid_base_titration_vr_r1_7/evidence/initial_scene/after_end_scale_scene_overview.png","section":"Figure 1 current-delivery scenes","claim":"Titration r1.7 endpoint scene overview","applies_to":["scene-titration"],"status":"verified"},{"id":"prov-oven-r2","source":"../../../../../outputs/scientific_workbench_task12_oven_unload_dual_glassware_vr_r2_20260904/handoff/scientific_workbench_task12_oven_unload_dual_glassware_vr_r2/evidence/initial_scene/open_oven_station.png","section":"Figure 1 current-delivery scenes","claim":"OVEN r2 open-door station with dual glassware","applies_to":["scene-oven"],"status":"verified"}],"limitations":"PptxGenJS uses editable native panels, text, and segmented connectors; rounded SVG connector geometry may differ from the canonical SVG."}</a:t>
             </a:r>
             <a:endParaRPr lang="en-US" dirty="0"/>
           </a:p>
@@ -857,7 +857,7 @@
     <p:bg>
       <p:bgPr>
         <a:solidFill>
-          <a:srgbClr val="FAFBFD"/>
+          <a:srgbClr val="FFFFFF"/>
         </a:solidFill>
       </p:bgPr>
     </p:bg>
@@ -884,7 +884,7 @@
         <p:spPr>
           <a:xfrm>
             <a:off x="2476500" y="3048000"/>
-            <a:ext cx="238125" cy="0"/>
+            <a:ext cx="142875" cy="0"/>
           </a:xfrm>
           <a:prstGeom prst="line">
             <a:avLst/>
@@ -892,32 +892,7 @@
           <a:noFill/>
           <a:ln w="38100">
             <a:solidFill>
-              <a:srgbClr val="D97706"/>
-            </a:solidFill>
-            <a:prstDash val="dash"/>
-            <a:headEnd type="none"/>
-            <a:tailEnd type="triangle"/>
-          </a:ln>
-        </p:spPr>
-      </p:sp>
-      <p:sp>
-        <p:nvSpPr>
-          <p:cNvPr id="3" name="retrieve-to-spec-segment-1"/>
-          <p:cNvSpPr/>
-          <p:nvPr/>
-        </p:nvSpPr>
-        <p:spPr>
-          <a:xfrm>
-            <a:off x="3905250" y="3048000"/>
-            <a:ext cx="95250" cy="0"/>
-          </a:xfrm>
-          <a:prstGeom prst="line">
-            <a:avLst/>
-          </a:prstGeom>
-          <a:noFill/>
-          <a:ln w="38100">
-            <a:solidFill>
-              <a:srgbClr val="2D6AA3"/>
+              <a:srgbClr val="3F4855"/>
             </a:solidFill>
             <a:prstDash val="solid"/>
             <a:headEnd type="none"/>
@@ -927,14 +902,14 @@
       </p:sp>
       <p:sp>
         <p:nvSpPr>
-          <p:cNvPr id="4" name="spec-to-build-segment-1"/>
-          <p:cNvSpPr/>
-          <p:nvPr/>
-        </p:nvSpPr>
-        <p:spPr>
-          <a:xfrm>
-            <a:off x="5762625" y="3048000"/>
-            <a:ext cx="95250" cy="0"/>
+          <p:cNvPr id="3" name="retrieve-to-spec-segment-1"/>
+          <p:cNvSpPr/>
+          <p:nvPr/>
+        </p:nvSpPr>
+        <p:spPr>
+          <a:xfrm>
+            <a:off x="4095750" y="3048000"/>
+            <a:ext cx="190500" cy="0"/>
           </a:xfrm>
           <a:prstGeom prst="line">
             <a:avLst/>
@@ -942,7 +917,7 @@
           <a:noFill/>
           <a:ln w="38100">
             <a:solidFill>
-              <a:srgbClr val="2D6AA3"/>
+              <a:srgbClr val="3F4855"/>
             </a:solidFill>
             <a:prstDash val="solid"/>
             <a:headEnd type="none"/>
@@ -952,14 +927,14 @@
       </p:sp>
       <p:sp>
         <p:nvSpPr>
-          <p:cNvPr id="5" name="build-to-admit-segment-1"/>
-          <p:cNvSpPr/>
-          <p:nvPr/>
-        </p:nvSpPr>
-        <p:spPr>
-          <a:xfrm>
-            <a:off x="7000875" y="3048000"/>
-            <a:ext cx="95250" cy="0"/>
+          <p:cNvPr id="4" name="spec-to-build-segment-1"/>
+          <p:cNvSpPr/>
+          <p:nvPr/>
+        </p:nvSpPr>
+        <p:spPr>
+          <a:xfrm>
+            <a:off x="6096000" y="3048000"/>
+            <a:ext cx="190500" cy="0"/>
           </a:xfrm>
           <a:prstGeom prst="line">
             <a:avLst/>
@@ -967,7 +942,7 @@
           <a:noFill/>
           <a:ln w="38100">
             <a:solidFill>
-              <a:srgbClr val="2D6AA3"/>
+              <a:srgbClr val="3F4855"/>
             </a:solidFill>
             <a:prstDash val="solid"/>
             <a:headEnd type="none"/>
@@ -977,13 +952,13 @@
       </p:sp>
       <p:sp>
         <p:nvSpPr>
-          <p:cNvPr id="6" name="admit-to-results-segment-1"/>
-          <p:cNvSpPr/>
-          <p:nvPr/>
-        </p:nvSpPr>
-        <p:spPr>
-          <a:xfrm>
-            <a:off x="8763000" y="3048000"/>
+          <p:cNvPr id="5" name="build-to-admit-segment-1"/>
+          <p:cNvSpPr/>
+          <p:nvPr/>
+        </p:nvSpPr>
+        <p:spPr>
+          <a:xfrm>
+            <a:off x="7381875" y="3048000"/>
             <a:ext cx="190500" cy="0"/>
           </a:xfrm>
           <a:prstGeom prst="line">
@@ -992,7 +967,7 @@
           <a:noFill/>
           <a:ln w="38100">
             <a:solidFill>
-              <a:srgbClr val="0F8B7A"/>
+              <a:srgbClr val="3F4855"/>
             </a:solidFill>
             <a:prstDash val="solid"/>
             <a:headEnd type="none"/>
@@ -1002,24 +977,49 @@
       </p:sp>
       <p:sp>
         <p:nvSpPr>
-          <p:cNvPr id="7" name="rule-input"/>
-          <p:cNvSpPr/>
-          <p:nvPr/>
-        </p:nvSpPr>
-        <p:spPr>
-          <a:xfrm>
-            <a:off x="238125" y="781050"/>
-            <a:ext cx="2238375" cy="38100"/>
+          <p:cNvPr id="6" name="admit-to-results-segment-1"/>
+          <p:cNvSpPr/>
+          <p:nvPr/>
+        </p:nvSpPr>
+        <p:spPr>
+          <a:xfrm>
+            <a:off x="8953500" y="3048000"/>
+            <a:ext cx="190500" cy="0"/>
+          </a:xfrm>
+          <a:prstGeom prst="line">
+            <a:avLst/>
+          </a:prstGeom>
+          <a:noFill/>
+          <a:ln w="38100">
+            <a:solidFill>
+              <a:srgbClr val="3F4855"/>
+            </a:solidFill>
+            <a:prstDash val="solid"/>
+            <a:headEnd type="none"/>
+            <a:tailEnd type="triangle"/>
+          </a:ln>
+        </p:spPr>
+      </p:sp>
+      <p:sp>
+        <p:nvSpPr>
+          <p:cNvPr id="7" name="rule-headers"/>
+          <p:cNvSpPr/>
+          <p:nvPr/>
+        </p:nvSpPr>
+        <p:spPr>
+          <a:xfrm>
+            <a:off x="238125" y="800100"/>
+            <a:ext cx="18573750" cy="28575"/>
           </a:xfrm>
           <a:prstGeom prst="roundRect">
             <a:avLst/>
           </a:prstGeom>
           <a:solidFill>
-            <a:srgbClr val="5A8FC4"/>
-          </a:solidFill>
-          <a:ln w="19050">
+            <a:srgbClr val="C5CFDA"/>
+          </a:solidFill>
+          <a:ln w="28575">
             <a:solidFill>
-              <a:srgbClr val="5A8FC4"/>
+              <a:srgbClr val="C5CFDA"/>
             </a:solidFill>
             <a:prstDash val="solid"/>
           </a:ln>
@@ -1027,14 +1027,14 @@
       </p:sp>
       <p:sp>
         <p:nvSpPr>
-          <p:cNvPr id="8" name="rule-input-title"/>
-          <p:cNvSpPr/>
-          <p:nvPr/>
-        </p:nvSpPr>
-        <p:spPr>
-          <a:xfrm>
-            <a:off x="409575" y="857250"/>
-            <a:ext cx="1895475" cy="356235"/>
+          <p:cNvPr id="8" name="rule-headers-title"/>
+          <p:cNvSpPr/>
+          <p:nvPr/>
+        </p:nvSpPr>
+        <p:spPr>
+          <a:xfrm>
+            <a:off x="409575" y="876300"/>
+            <a:ext cx="18230850" cy="356235"/>
           </a:xfrm>
           <a:prstGeom prst="rect">
             <a:avLst/>
@@ -1057,24 +1057,24 @@
       </p:sp>
       <p:sp>
         <p:nvSpPr>
-          <p:cNvPr id="9" name="rule-agent"/>
-          <p:cNvSpPr/>
-          <p:nvPr/>
-        </p:nvSpPr>
-        <p:spPr>
-          <a:xfrm>
-            <a:off x="2857500" y="781050"/>
-            <a:ext cx="5857875" cy="38100"/>
+          <p:cNvPr id="9" name="input-evidence"/>
+          <p:cNvSpPr/>
+          <p:nvPr/>
+        </p:nvSpPr>
+        <p:spPr>
+          <a:xfrm>
+            <a:off x="238125" y="1619250"/>
+            <a:ext cx="2238375" cy="2476500"/>
           </a:xfrm>
           <a:prstGeom prst="roundRect">
             <a:avLst/>
           </a:prstGeom>
           <a:solidFill>
-            <a:srgbClr val="D97706"/>
-          </a:solidFill>
-          <a:ln w="19050">
+            <a:srgbClr val="FFFFFF"/>
+          </a:solidFill>
+          <a:ln w="28575">
             <a:solidFill>
-              <a:srgbClr val="D97706"/>
+              <a:srgbClr val="C5CFDA"/>
             </a:solidFill>
             <a:prstDash val="solid"/>
           </a:ln>
@@ -1082,14 +1082,14 @@
       </p:sp>
       <p:sp>
         <p:nvSpPr>
-          <p:cNvPr id="10" name="rule-agent-title"/>
-          <p:cNvSpPr/>
-          <p:nvPr/>
-        </p:nvSpPr>
-        <p:spPr>
-          <a:xfrm>
-            <a:off x="3028950" y="857250"/>
-            <a:ext cx="5514975" cy="356235"/>
+          <p:cNvPr id="10" name="input-evidence-title"/>
+          <p:cNvSpPr/>
+          <p:nvPr/>
+        </p:nvSpPr>
+        <p:spPr>
+          <a:xfrm>
+            <a:off x="409575" y="1695450"/>
+            <a:ext cx="1895475" cy="356235"/>
           </a:xfrm>
           <a:prstGeom prst="rect">
             <a:avLst/>
@@ -1112,24 +1112,24 @@
       </p:sp>
       <p:sp>
         <p:nvSpPr>
-          <p:cNvPr id="11" name="rule-results"/>
-          <p:cNvSpPr/>
-          <p:nvPr/>
-        </p:nvSpPr>
-        <p:spPr>
-          <a:xfrm>
-            <a:off x="8953500" y="781050"/>
-            <a:ext cx="9858375" cy="38100"/>
+          <p:cNvPr id="11" name="stage-retrieve"/>
+          <p:cNvSpPr/>
+          <p:nvPr/>
+        </p:nvSpPr>
+        <p:spPr>
+          <a:xfrm>
+            <a:off x="2619375" y="1619250"/>
+            <a:ext cx="1476375" cy="2476500"/>
           </a:xfrm>
           <a:prstGeom prst="roundRect">
             <a:avLst/>
           </a:prstGeom>
           <a:solidFill>
-            <a:srgbClr val="0F8B7A"/>
-          </a:solidFill>
-          <a:ln w="19050">
+            <a:srgbClr val="FFFFFF"/>
+          </a:solidFill>
+          <a:ln w="28575">
             <a:solidFill>
-              <a:srgbClr val="0F8B7A"/>
+              <a:srgbClr val="C5CFDA"/>
             </a:solidFill>
             <a:prstDash val="solid"/>
           </a:ln>
@@ -1137,14 +1137,14 @@
       </p:sp>
       <p:sp>
         <p:nvSpPr>
-          <p:cNvPr id="12" name="rule-results-title"/>
-          <p:cNvSpPr/>
-          <p:nvPr/>
-        </p:nvSpPr>
-        <p:spPr>
-          <a:xfrm>
-            <a:off x="9124950" y="857250"/>
-            <a:ext cx="9515475" cy="356235"/>
+          <p:cNvPr id="12" name="stage-retrieve-title"/>
+          <p:cNvSpPr/>
+          <p:nvPr/>
+        </p:nvSpPr>
+        <p:spPr>
+          <a:xfrm>
+            <a:off x="2790825" y="1695450"/>
+            <a:ext cx="1133475" cy="647700"/>
           </a:xfrm>
           <a:prstGeom prst="rect">
             <a:avLst/>
@@ -1161,30 +1161,30 @@
             <a:pPr indent="0" marL="0">
               <a:buNone/>
             </a:pPr>
-            <a:endParaRPr lang="en-US" sz="1650" dirty="0"/>
-          </a:p>
-        </p:txBody>
-      </p:sp>
-      <p:sp>
-        <p:nvSpPr>
-          <p:cNvPr id="13" name="input-evidence"/>
-          <p:cNvSpPr/>
-          <p:nvPr/>
-        </p:nvSpPr>
-        <p:spPr>
-          <a:xfrm>
-            <a:off x="238125" y="1066800"/>
-            <a:ext cx="2238375" cy="3981450"/>
+            <a:endParaRPr lang="en-US" sz="3000" dirty="0"/>
+          </a:p>
+        </p:txBody>
+      </p:sp>
+      <p:sp>
+        <p:nvSpPr>
+          <p:cNvPr id="13" name="stage-spec"/>
+          <p:cNvSpPr/>
+          <p:nvPr/>
+        </p:nvSpPr>
+        <p:spPr>
+          <a:xfrm>
+            <a:off x="4286250" y="1619250"/>
+            <a:ext cx="1809750" cy="2476500"/>
           </a:xfrm>
           <a:prstGeom prst="roundRect">
             <a:avLst/>
           </a:prstGeom>
           <a:solidFill>
-            <a:srgbClr val="EEF5FC"/>
-          </a:solidFill>
-          <a:ln w="19050">
+            <a:srgbClr val="FFF8EE"/>
+          </a:solidFill>
+          <a:ln w="38100">
             <a:solidFill>
-              <a:srgbClr val="7FA9D2"/>
+              <a:srgbClr val="C96A0A"/>
             </a:solidFill>
             <a:prstDash val="solid"/>
           </a:ln>
@@ -1192,14 +1192,14 @@
       </p:sp>
       <p:sp>
         <p:nvSpPr>
-          <p:cNvPr id="14" name="input-evidence-title"/>
-          <p:cNvSpPr/>
-          <p:nvPr/>
-        </p:nvSpPr>
-        <p:spPr>
-          <a:xfrm>
-            <a:off x="409575" y="1143000"/>
-            <a:ext cx="1895475" cy="356235"/>
+          <p:cNvPr id="14" name="stage-spec-title"/>
+          <p:cNvSpPr/>
+          <p:nvPr/>
+        </p:nvSpPr>
+        <p:spPr>
+          <a:xfrm>
+            <a:off x="4457700" y="1695450"/>
+            <a:ext cx="1466850" cy="647700"/>
           </a:xfrm>
           <a:prstGeom prst="rect">
             <a:avLst/>
@@ -1216,30 +1216,30 @@
             <a:pPr indent="0" marL="0">
               <a:buNone/>
             </a:pPr>
-            <a:endParaRPr lang="en-US" sz="1650" dirty="0"/>
-          </a:p>
-        </p:txBody>
-      </p:sp>
-      <p:sp>
-        <p:nvSpPr>
-          <p:cNvPr id="15" name="stage-retrieve"/>
-          <p:cNvSpPr/>
-          <p:nvPr/>
-        </p:nvSpPr>
-        <p:spPr>
-          <a:xfrm>
-            <a:off x="2714625" y="1771650"/>
-            <a:ext cx="1190625" cy="2038350"/>
+            <a:endParaRPr lang="en-US" sz="3000" dirty="0"/>
+          </a:p>
+        </p:txBody>
+      </p:sp>
+      <p:sp>
+        <p:nvSpPr>
+          <p:cNvPr id="15" name="stage-build"/>
+          <p:cNvSpPr/>
+          <p:nvPr/>
+        </p:nvSpPr>
+        <p:spPr>
+          <a:xfrm>
+            <a:off x="6286500" y="1619250"/>
+            <a:ext cx="1095375" cy="2476500"/>
           </a:xfrm>
           <a:prstGeom prst="roundRect">
             <a:avLst/>
           </a:prstGeom>
           <a:solidFill>
-            <a:srgbClr val="F4F8FC"/>
-          </a:solidFill>
-          <a:ln w="14288">
+            <a:srgbClr val="FFFFFF"/>
+          </a:solidFill>
+          <a:ln w="28575">
             <a:solidFill>
-              <a:srgbClr val="B7CAE0"/>
+              <a:srgbClr val="C5CFDA"/>
             </a:solidFill>
             <a:prstDash val="solid"/>
           </a:ln>
@@ -1247,14 +1247,14 @@
       </p:sp>
       <p:sp>
         <p:nvSpPr>
-          <p:cNvPr id="16" name="stage-retrieve-title"/>
-          <p:cNvSpPr/>
-          <p:nvPr/>
-        </p:nvSpPr>
-        <p:spPr>
-          <a:xfrm>
-            <a:off x="2886075" y="1847850"/>
-            <a:ext cx="847725" cy="518160"/>
+          <p:cNvPr id="16" name="stage-build-title"/>
+          <p:cNvSpPr/>
+          <p:nvPr/>
+        </p:nvSpPr>
+        <p:spPr>
+          <a:xfrm>
+            <a:off x="6457950" y="1695450"/>
+            <a:ext cx="752475" cy="647700"/>
           </a:xfrm>
           <a:prstGeom prst="rect">
             <a:avLst/>
@@ -1271,30 +1271,30 @@
             <a:pPr indent="0" marL="0">
               <a:buNone/>
             </a:pPr>
-            <a:endParaRPr lang="en-US" sz="2400" dirty="0"/>
-          </a:p>
-        </p:txBody>
-      </p:sp>
-      <p:sp>
-        <p:nvSpPr>
-          <p:cNvPr id="17" name="stage-spec"/>
-          <p:cNvSpPr/>
-          <p:nvPr/>
-        </p:nvSpPr>
-        <p:spPr>
-          <a:xfrm>
-            <a:off x="4000500" y="1390650"/>
-            <a:ext cx="1762125" cy="2705100"/>
+            <a:endParaRPr lang="en-US" sz="3000" dirty="0"/>
+          </a:p>
+        </p:txBody>
+      </p:sp>
+      <p:sp>
+        <p:nvSpPr>
+          <p:cNvPr id="17" name="stage-admit"/>
+          <p:cNvSpPr/>
+          <p:nvPr/>
+        </p:nvSpPr>
+        <p:spPr>
+          <a:xfrm>
+            <a:off x="7572375" y="1619250"/>
+            <a:ext cx="1381125" cy="2476500"/>
           </a:xfrm>
           <a:prstGeom prst="roundRect">
             <a:avLst/>
           </a:prstGeom>
           <a:solidFill>
-            <a:srgbClr val="FFF9F0"/>
-          </a:solidFill>
-          <a:ln w="19050">
+            <a:srgbClr val="FFFFFF"/>
+          </a:solidFill>
+          <a:ln w="28575">
             <a:solidFill>
-              <a:srgbClr val="D9A45B"/>
+              <a:srgbClr val="C5CFDA"/>
             </a:solidFill>
             <a:prstDash val="solid"/>
           </a:ln>
@@ -1302,26 +1302,54 @@
       </p:sp>
       <p:sp>
         <p:nvSpPr>
-          <p:cNvPr id="18" name="stage-spec-header"/>
-          <p:cNvSpPr/>
-          <p:nvPr/>
-        </p:nvSpPr>
-        <p:spPr>
-          <a:xfrm>
-            <a:off x="4014788" y="1404938"/>
-            <a:ext cx="1733550" cy="481012"/>
+          <p:cNvPr id="18" name="stage-admit-title"/>
+          <p:cNvSpPr/>
+          <p:nvPr/>
+        </p:nvSpPr>
+        <p:spPr>
+          <a:xfrm>
+            <a:off x="7743825" y="1695450"/>
+            <a:ext cx="1038225" cy="647700"/>
+          </a:xfrm>
+          <a:prstGeom prst="rect">
+            <a:avLst/>
+          </a:prstGeom>
+          <a:noFill/>
+          <a:ln/>
+        </p:spPr>
+        <p:txBody>
+          <a:bodyPr wrap="square" lIns="0" tIns="0" rIns="0" bIns="0" rtlCol="0" anchor="ctr">
+            <a:normAutofit/>
+          </a:bodyPr>
+          <a:lstStyle/>
+          <a:p>
+            <a:pPr indent="0" marL="0">
+              <a:buNone/>
+            </a:pPr>
+            <a:endParaRPr lang="en-US" sz="3000" dirty="0"/>
+          </a:p>
+        </p:txBody>
+      </p:sp>
+      <p:sp>
+        <p:nvSpPr>
+          <p:cNvPr id="19" name="admit-pass-badge"/>
+          <p:cNvSpPr/>
+          <p:nvPr/>
+        </p:nvSpPr>
+        <p:spPr>
+          <a:xfrm>
+            <a:off x="7734300" y="3429000"/>
+            <a:ext cx="1047750" cy="342900"/>
           </a:xfrm>
           <a:prstGeom prst="roundRect">
             <a:avLst/>
           </a:prstGeom>
           <a:solidFill>
-            <a:srgbClr val="FCE8C8"/>
-          </a:solidFill>
-          <a:ln w="12700">
+            <a:srgbClr val="FFFFFF"/>
+          </a:solidFill>
+          <a:ln w="28575">
             <a:solidFill>
-              <a:srgbClr val="FCE8C8">
-                <a:alpha val="0"/>
-              </a:srgbClr>
+              <a:srgbClr val="0E7C6B"/>
             </a:solidFill>
             <a:prstDash val="solid"/>
           </a:ln>
@@ -1329,26 +1357,54 @@
       </p:sp>
       <p:sp>
         <p:nvSpPr>
-          <p:cNvPr id="19" name="stage-spec-header-square-base"/>
-          <p:cNvSpPr/>
-          <p:nvPr/>
-        </p:nvSpPr>
-        <p:spPr>
-          <a:xfrm>
-            <a:off x="4014788" y="1578864"/>
-            <a:ext cx="1733550" cy="307086"/>
-          </a:xfrm>
-          <a:prstGeom prst="rect">
-            <a:avLst/>
-          </a:prstGeom>
-          <a:solidFill>
-            <a:srgbClr val="FCE8C8"/>
-          </a:solidFill>
-          <a:ln w="12700">
+          <p:cNvPr id="20" name="admit-pass-badge-title"/>
+          <p:cNvSpPr/>
+          <p:nvPr/>
+        </p:nvSpPr>
+        <p:spPr>
+          <a:xfrm>
+            <a:off x="7905750" y="3505200"/>
+            <a:ext cx="704850" cy="356235"/>
+          </a:xfrm>
+          <a:prstGeom prst="rect">
+            <a:avLst/>
+          </a:prstGeom>
+          <a:noFill/>
+          <a:ln/>
+        </p:spPr>
+        <p:txBody>
+          <a:bodyPr wrap="square" lIns="0" tIns="0" rIns="0" bIns="0" rtlCol="0" anchor="ctr">
+            <a:normAutofit/>
+          </a:bodyPr>
+          <a:lstStyle/>
+          <a:p>
+            <a:pPr indent="0" marL="0">
+              <a:buNone/>
+            </a:pPr>
+            <a:endParaRPr lang="en-US" sz="1650" dirty="0"/>
+          </a:p>
+        </p:txBody>
+      </p:sp>
+      <p:sp>
+        <p:nvSpPr>
+          <p:cNvPr id="21" name="result-region"/>
+          <p:cNvSpPr/>
+          <p:nvPr/>
+        </p:nvSpPr>
+        <p:spPr>
+          <a:xfrm>
+            <a:off x="9172575" y="990600"/>
+            <a:ext cx="9658350" cy="3200400"/>
+          </a:xfrm>
+          <a:prstGeom prst="roundRect">
+            <a:avLst/>
+          </a:prstGeom>
+          <a:solidFill>
+            <a:srgbClr val="FFFFFF"/>
+          </a:solidFill>
+          <a:ln w="28575">
             <a:solidFill>
-              <a:srgbClr val="FCE8C8">
-                <a:alpha val="0"/>
-              </a:srgbClr>
+              <a:srgbClr val="FFFFFF"/>
             </a:solidFill>
             <a:prstDash val="solid"/>
           </a:ln>
@@ -1356,14 +1412,14 @@
       </p:sp>
       <p:sp>
         <p:nvSpPr>
-          <p:cNvPr id="20" name="stage-spec-title"/>
-          <p:cNvSpPr/>
-          <p:nvPr/>
-        </p:nvSpPr>
-        <p:spPr>
-          <a:xfrm>
-            <a:off x="4171950" y="1409700"/>
-            <a:ext cx="1419225" cy="495300"/>
+          <p:cNvPr id="22" name="result-region-title"/>
+          <p:cNvSpPr/>
+          <p:nvPr/>
+        </p:nvSpPr>
+        <p:spPr>
+          <a:xfrm>
+            <a:off x="9344025" y="1066800"/>
+            <a:ext cx="9315450" cy="356235"/>
           </a:xfrm>
           <a:prstGeom prst="rect">
             <a:avLst/>
@@ -1380,30 +1436,30 @@
             <a:pPr indent="0" marL="0">
               <a:buNone/>
             </a:pPr>
-            <a:endParaRPr lang="en-US" sz="2400" dirty="0"/>
-          </a:p>
-        </p:txBody>
-      </p:sp>
-      <p:sp>
-        <p:nvSpPr>
-          <p:cNvPr id="21" name="stage-build"/>
-          <p:cNvSpPr/>
-          <p:nvPr/>
-        </p:nvSpPr>
-        <p:spPr>
-          <a:xfrm>
-            <a:off x="5857875" y="1771650"/>
-            <a:ext cx="1143000" cy="2038350"/>
+            <a:endParaRPr lang="en-US" sz="1650" dirty="0"/>
+          </a:p>
+        </p:txBody>
+      </p:sp>
+      <p:sp>
+        <p:nvSpPr>
+          <p:cNvPr id="23" name="result-fehling"/>
+          <p:cNvSpPr/>
+          <p:nvPr/>
+        </p:nvSpPr>
+        <p:spPr>
+          <a:xfrm>
+            <a:off x="9191625" y="1619250"/>
+            <a:ext cx="2266950" cy="2476500"/>
           </a:xfrm>
           <a:prstGeom prst="roundRect">
             <a:avLst/>
           </a:prstGeom>
           <a:solidFill>
-            <a:srgbClr val="F4F8FC"/>
-          </a:solidFill>
-          <a:ln w="14288">
+            <a:srgbClr val="FFFFFF"/>
+          </a:solidFill>
+          <a:ln w="28575">
             <a:solidFill>
-              <a:srgbClr val="B7CAE0"/>
+              <a:srgbClr val="C5CFDA"/>
             </a:solidFill>
             <a:prstDash val="solid"/>
           </a:ln>
@@ -1411,14 +1467,14 @@
       </p:sp>
       <p:sp>
         <p:nvSpPr>
-          <p:cNvPr id="22" name="stage-build-title"/>
-          <p:cNvSpPr/>
-          <p:nvPr/>
-        </p:nvSpPr>
-        <p:spPr>
-          <a:xfrm>
-            <a:off x="6029325" y="1847850"/>
-            <a:ext cx="800100" cy="518160"/>
+          <p:cNvPr id="24" name="result-fehling-title"/>
+          <p:cNvSpPr/>
+          <p:nvPr/>
+        </p:nvSpPr>
+        <p:spPr>
+          <a:xfrm>
+            <a:off x="9363075" y="1695450"/>
+            <a:ext cx="1924050" cy="356235"/>
           </a:xfrm>
           <a:prstGeom prst="rect">
             <a:avLst/>
@@ -1435,30 +1491,30 @@
             <a:pPr indent="0" marL="0">
               <a:buNone/>
             </a:pPr>
-            <a:endParaRPr lang="en-US" sz="2400" dirty="0"/>
-          </a:p>
-        </p:txBody>
-      </p:sp>
-      <p:sp>
-        <p:nvSpPr>
-          <p:cNvPr id="23" name="stage-admit"/>
-          <p:cNvSpPr/>
-          <p:nvPr/>
-        </p:nvSpPr>
-        <p:spPr>
-          <a:xfrm>
-            <a:off x="7096125" y="1581150"/>
-            <a:ext cx="1619250" cy="2324100"/>
+            <a:endParaRPr lang="en-US" sz="1650" dirty="0"/>
+          </a:p>
+        </p:txBody>
+      </p:sp>
+      <p:sp>
+        <p:nvSpPr>
+          <p:cNvPr id="25" name="result-powder"/>
+          <p:cNvSpPr/>
+          <p:nvPr/>
+        </p:nvSpPr>
+        <p:spPr>
+          <a:xfrm>
+            <a:off x="11649075" y="1619250"/>
+            <a:ext cx="2266950" cy="2476500"/>
           </a:xfrm>
           <a:prstGeom prst="roundRect">
             <a:avLst/>
           </a:prstGeom>
           <a:solidFill>
-            <a:srgbClr val="ECF8F5"/>
-          </a:solidFill>
-          <a:ln w="19050">
+            <a:srgbClr val="FFFFFF"/>
+          </a:solidFill>
+          <a:ln w="28575">
             <a:solidFill>
-              <a:srgbClr val="42A28F"/>
+              <a:srgbClr val="C5CFDA"/>
             </a:solidFill>
             <a:prstDash val="solid"/>
           </a:ln>
@@ -1466,26 +1522,54 @@
       </p:sp>
       <p:sp>
         <p:nvSpPr>
-          <p:cNvPr id="24" name="stage-admit-header"/>
-          <p:cNvSpPr/>
-          <p:nvPr/>
-        </p:nvSpPr>
-        <p:spPr>
-          <a:xfrm>
-            <a:off x="7110413" y="1595438"/>
-            <a:ext cx="1590675" cy="481012"/>
+          <p:cNvPr id="26" name="result-powder-title"/>
+          <p:cNvSpPr/>
+          <p:nvPr/>
+        </p:nvSpPr>
+        <p:spPr>
+          <a:xfrm>
+            <a:off x="11820525" y="1695450"/>
+            <a:ext cx="1924050" cy="356235"/>
+          </a:xfrm>
+          <a:prstGeom prst="rect">
+            <a:avLst/>
+          </a:prstGeom>
+          <a:noFill/>
+          <a:ln/>
+        </p:spPr>
+        <p:txBody>
+          <a:bodyPr wrap="square" lIns="0" tIns="0" rIns="0" bIns="0" rtlCol="0" anchor="ctr">
+            <a:normAutofit/>
+          </a:bodyPr>
+          <a:lstStyle/>
+          <a:p>
+            <a:pPr indent="0" marL="0">
+              <a:buNone/>
+            </a:pPr>
+            <a:endParaRPr lang="en-US" sz="1650" dirty="0"/>
+          </a:p>
+        </p:txBody>
+      </p:sp>
+      <p:sp>
+        <p:nvSpPr>
+          <p:cNvPr id="27" name="result-titration"/>
+          <p:cNvSpPr/>
+          <p:nvPr/>
+        </p:nvSpPr>
+        <p:spPr>
+          <a:xfrm>
+            <a:off x="14106525" y="1619250"/>
+            <a:ext cx="2266950" cy="2476500"/>
           </a:xfrm>
           <a:prstGeom prst="roundRect">
             <a:avLst/>
           </a:prstGeom>
           <a:solidFill>
-            <a:srgbClr val="D5F0E9"/>
-          </a:solidFill>
-          <a:ln w="12700">
+            <a:srgbClr val="FFFFFF"/>
+          </a:solidFill>
+          <a:ln w="28575">
             <a:solidFill>
-              <a:srgbClr val="D5F0E9">
-                <a:alpha val="0"/>
-              </a:srgbClr>
+              <a:srgbClr val="C5CFDA"/>
             </a:solidFill>
             <a:prstDash val="solid"/>
           </a:ln>
@@ -1493,26 +1577,54 @@
       </p:sp>
       <p:sp>
         <p:nvSpPr>
-          <p:cNvPr id="25" name="stage-admit-header-square-base"/>
-          <p:cNvSpPr/>
-          <p:nvPr/>
-        </p:nvSpPr>
-        <p:spPr>
-          <a:xfrm>
-            <a:off x="7110413" y="1769364"/>
-            <a:ext cx="1590675" cy="307086"/>
-          </a:xfrm>
-          <a:prstGeom prst="rect">
-            <a:avLst/>
-          </a:prstGeom>
-          <a:solidFill>
-            <a:srgbClr val="D5F0E9"/>
-          </a:solidFill>
-          <a:ln w="12700">
+          <p:cNvPr id="28" name="result-titration-title"/>
+          <p:cNvSpPr/>
+          <p:nvPr/>
+        </p:nvSpPr>
+        <p:spPr>
+          <a:xfrm>
+            <a:off x="14277975" y="1695450"/>
+            <a:ext cx="1924050" cy="356235"/>
+          </a:xfrm>
+          <a:prstGeom prst="rect">
+            <a:avLst/>
+          </a:prstGeom>
+          <a:noFill/>
+          <a:ln/>
+        </p:spPr>
+        <p:txBody>
+          <a:bodyPr wrap="square" lIns="0" tIns="0" rIns="0" bIns="0" rtlCol="0" anchor="ctr">
+            <a:normAutofit/>
+          </a:bodyPr>
+          <a:lstStyle/>
+          <a:p>
+            <a:pPr indent="0" marL="0">
+              <a:buNone/>
+            </a:pPr>
+            <a:endParaRPr lang="en-US" sz="1650" dirty="0"/>
+          </a:p>
+        </p:txBody>
+      </p:sp>
+      <p:sp>
+        <p:nvSpPr>
+          <p:cNvPr id="29" name="result-oven"/>
+          <p:cNvSpPr/>
+          <p:nvPr/>
+        </p:nvSpPr>
+        <p:spPr>
+          <a:xfrm>
+            <a:off x="16563975" y="1619250"/>
+            <a:ext cx="2266950" cy="2476500"/>
+          </a:xfrm>
+          <a:prstGeom prst="roundRect">
+            <a:avLst/>
+          </a:prstGeom>
+          <a:solidFill>
+            <a:srgbClr val="FFFFFF"/>
+          </a:solidFill>
+          <a:ln w="28575">
             <a:solidFill>
-              <a:srgbClr val="D5F0E9">
-                <a:alpha val="0"/>
-              </a:srgbClr>
+              <a:srgbClr val="C5CFDA"/>
             </a:solidFill>
             <a:prstDash val="solid"/>
           </a:ln>
@@ -1520,14 +1632,14 @@
       </p:sp>
       <p:sp>
         <p:nvSpPr>
-          <p:cNvPr id="26" name="stage-admit-title"/>
-          <p:cNvSpPr/>
-          <p:nvPr/>
-        </p:nvSpPr>
-        <p:spPr>
-          <a:xfrm>
-            <a:off x="7267575" y="1600200"/>
-            <a:ext cx="1276350" cy="495300"/>
+          <p:cNvPr id="30" name="result-oven-title"/>
+          <p:cNvSpPr/>
+          <p:nvPr/>
+        </p:nvSpPr>
+        <p:spPr>
+          <a:xfrm>
+            <a:off x="16735425" y="1695450"/>
+            <a:ext cx="1924050" cy="356235"/>
           </a:xfrm>
           <a:prstGeom prst="rect">
             <a:avLst/>
@@ -1544,322 +1656,23 @@
             <a:pPr indent="0" marL="0">
               <a:buNone/>
             </a:pPr>
-            <a:endParaRPr lang="en-US" sz="2400" dirty="0"/>
-          </a:p>
-        </p:txBody>
-      </p:sp>
-      <p:sp>
-        <p:nvSpPr>
-          <p:cNvPr id="27" name="result-region"/>
-          <p:cNvSpPr/>
-          <p:nvPr/>
-        </p:nvSpPr>
-        <p:spPr>
-          <a:xfrm>
-            <a:off x="8953500" y="990600"/>
-            <a:ext cx="9858375" cy="4171950"/>
-          </a:xfrm>
-          <a:prstGeom prst="roundRect">
-            <a:avLst/>
-          </a:prstGeom>
-          <a:solidFill>
-            <a:srgbClr val="FAFBFD"/>
-          </a:solidFill>
-          <a:ln w="19050">
-            <a:solidFill>
-              <a:srgbClr val="FAFBFD"/>
-            </a:solidFill>
-            <a:prstDash val="solid"/>
-          </a:ln>
-        </p:spPr>
-      </p:sp>
-      <p:sp>
-        <p:nvSpPr>
-          <p:cNvPr id="28" name="result-region-title"/>
-          <p:cNvSpPr/>
-          <p:nvPr/>
-        </p:nvSpPr>
-        <p:spPr>
-          <a:xfrm>
-            <a:off x="9124950" y="1066800"/>
-            <a:ext cx="9515475" cy="356235"/>
-          </a:xfrm>
-          <a:prstGeom prst="rect">
-            <a:avLst/>
-          </a:prstGeom>
-          <a:noFill/>
-          <a:ln/>
-        </p:spPr>
-        <p:txBody>
-          <a:bodyPr wrap="square" lIns="0" tIns="0" rIns="0" bIns="0" rtlCol="0" anchor="ctr">
-            <a:normAutofit/>
-          </a:bodyPr>
-          <a:lstStyle/>
-          <a:p>
-            <a:pPr indent="0" marL="0">
-              <a:buNone/>
-            </a:pPr>
-            <a:endParaRPr lang="en-US" sz="1650" dirty="0"/>
-          </a:p>
-        </p:txBody>
-      </p:sp>
-      <p:sp>
-        <p:nvSpPr>
-          <p:cNvPr id="29" name="result-fehling"/>
-          <p:cNvSpPr/>
-          <p:nvPr/>
-        </p:nvSpPr>
-        <p:spPr>
-          <a:xfrm>
-            <a:off x="9144000" y="1714500"/>
-            <a:ext cx="2238375" cy="2381250"/>
-          </a:xfrm>
-          <a:prstGeom prst="roundRect">
-            <a:avLst/>
-          </a:prstGeom>
-          <a:solidFill>
-            <a:srgbClr val="FFFFFF"/>
-          </a:solidFill>
-          <a:ln w="19050">
-            <a:solidFill>
-              <a:srgbClr val="A7CFC5"/>
-            </a:solidFill>
-            <a:prstDash val="solid"/>
-          </a:ln>
-        </p:spPr>
-      </p:sp>
-      <p:sp>
-        <p:nvSpPr>
-          <p:cNvPr id="30" name="result-fehling-title"/>
-          <p:cNvSpPr/>
-          <p:nvPr/>
-        </p:nvSpPr>
-        <p:spPr>
-          <a:xfrm>
-            <a:off x="9315450" y="1790700"/>
-            <a:ext cx="1895475" cy="356235"/>
-          </a:xfrm>
-          <a:prstGeom prst="rect">
-            <a:avLst/>
-          </a:prstGeom>
-          <a:noFill/>
-          <a:ln/>
-        </p:spPr>
-        <p:txBody>
-          <a:bodyPr wrap="square" lIns="0" tIns="0" rIns="0" bIns="0" rtlCol="0" anchor="ctr">
-            <a:normAutofit/>
-          </a:bodyPr>
-          <a:lstStyle/>
-          <a:p>
-            <a:pPr indent="0" marL="0">
-              <a:buNone/>
-            </a:pPr>
-            <a:endParaRPr lang="en-US" sz="1650" dirty="0"/>
-          </a:p>
-        </p:txBody>
-      </p:sp>
-      <p:sp>
-        <p:nvSpPr>
-          <p:cNvPr id="31" name="result-powder"/>
-          <p:cNvSpPr/>
-          <p:nvPr/>
-        </p:nvSpPr>
-        <p:spPr>
-          <a:xfrm>
-            <a:off x="11525250" y="1714500"/>
-            <a:ext cx="2238375" cy="2381250"/>
-          </a:xfrm>
-          <a:prstGeom prst="roundRect">
-            <a:avLst/>
-          </a:prstGeom>
-          <a:solidFill>
-            <a:srgbClr val="FFFFFF"/>
-          </a:solidFill>
-          <a:ln w="19050">
-            <a:solidFill>
-              <a:srgbClr val="A7CFC5"/>
-            </a:solidFill>
-            <a:prstDash val="solid"/>
-          </a:ln>
-        </p:spPr>
-      </p:sp>
-      <p:sp>
-        <p:nvSpPr>
-          <p:cNvPr id="32" name="result-powder-title"/>
-          <p:cNvSpPr/>
-          <p:nvPr/>
-        </p:nvSpPr>
-        <p:spPr>
-          <a:xfrm>
-            <a:off x="11696700" y="1790700"/>
-            <a:ext cx="1895475" cy="356235"/>
-          </a:xfrm>
-          <a:prstGeom prst="rect">
-            <a:avLst/>
-          </a:prstGeom>
-          <a:noFill/>
-          <a:ln/>
-        </p:spPr>
-        <p:txBody>
-          <a:bodyPr wrap="square" lIns="0" tIns="0" rIns="0" bIns="0" rtlCol="0" anchor="ctr">
-            <a:normAutofit/>
-          </a:bodyPr>
-          <a:lstStyle/>
-          <a:p>
-            <a:pPr indent="0" marL="0">
-              <a:buNone/>
-            </a:pPr>
-            <a:endParaRPr lang="en-US" sz="1650" dirty="0"/>
-          </a:p>
-        </p:txBody>
-      </p:sp>
-      <p:sp>
-        <p:nvSpPr>
-          <p:cNvPr id="33" name="result-titration"/>
-          <p:cNvSpPr/>
-          <p:nvPr/>
-        </p:nvSpPr>
-        <p:spPr>
-          <a:xfrm>
-            <a:off x="13906500" y="1714500"/>
-            <a:ext cx="2238375" cy="2381250"/>
-          </a:xfrm>
-          <a:prstGeom prst="roundRect">
-            <a:avLst/>
-          </a:prstGeom>
-          <a:solidFill>
-            <a:srgbClr val="FFFFFF"/>
-          </a:solidFill>
-          <a:ln w="19050">
-            <a:solidFill>
-              <a:srgbClr val="A7CFC5"/>
-            </a:solidFill>
-            <a:prstDash val="solid"/>
-          </a:ln>
-        </p:spPr>
-      </p:sp>
-      <p:sp>
-        <p:nvSpPr>
-          <p:cNvPr id="34" name="result-titration-title"/>
-          <p:cNvSpPr/>
-          <p:nvPr/>
-        </p:nvSpPr>
-        <p:spPr>
-          <a:xfrm>
-            <a:off x="14077950" y="1790700"/>
-            <a:ext cx="1895475" cy="356235"/>
-          </a:xfrm>
-          <a:prstGeom prst="rect">
-            <a:avLst/>
-          </a:prstGeom>
-          <a:noFill/>
-          <a:ln/>
-        </p:spPr>
-        <p:txBody>
-          <a:bodyPr wrap="square" lIns="0" tIns="0" rIns="0" bIns="0" rtlCol="0" anchor="ctr">
-            <a:normAutofit/>
-          </a:bodyPr>
-          <a:lstStyle/>
-          <a:p>
-            <a:pPr indent="0" marL="0">
-              <a:buNone/>
-            </a:pPr>
-            <a:endParaRPr lang="en-US" sz="1650" dirty="0"/>
-          </a:p>
-        </p:txBody>
-      </p:sp>
-      <p:sp>
-        <p:nvSpPr>
-          <p:cNvPr id="35" name="result-oven"/>
-          <p:cNvSpPr/>
-          <p:nvPr/>
-        </p:nvSpPr>
-        <p:spPr>
-          <a:xfrm>
-            <a:off x="16287750" y="1714500"/>
-            <a:ext cx="2238375" cy="2381250"/>
-          </a:xfrm>
-          <a:prstGeom prst="roundRect">
-            <a:avLst/>
-          </a:prstGeom>
-          <a:solidFill>
-            <a:srgbClr val="FFFFFF"/>
-          </a:solidFill>
-          <a:ln w="19050">
-            <a:solidFill>
-              <a:srgbClr val="A7CFC5"/>
-            </a:solidFill>
-            <a:prstDash val="solid"/>
-          </a:ln>
-        </p:spPr>
-      </p:sp>
-      <p:sp>
-        <p:nvSpPr>
-          <p:cNvPr id="36" name="result-oven-title"/>
-          <p:cNvSpPr/>
-          <p:nvPr/>
-        </p:nvSpPr>
-        <p:spPr>
-          <a:xfrm>
-            <a:off x="16459200" y="1790700"/>
-            <a:ext cx="1895475" cy="356235"/>
-          </a:xfrm>
-          <a:prstGeom prst="rect">
-            <a:avLst/>
-          </a:prstGeom>
-          <a:noFill/>
-          <a:ln/>
-        </p:spPr>
-        <p:txBody>
-          <a:bodyPr wrap="square" lIns="0" tIns="0" rIns="0" bIns="0" rtlCol="0" anchor="ctr">
-            <a:normAutofit/>
-          </a:bodyPr>
-          <a:lstStyle/>
-          <a:p>
-            <a:pPr indent="0" marL="0">
-              <a:buNone/>
-            </a:pPr>
             <a:endParaRPr lang="en-US" sz="1650" dirty="0"/>
           </a:p>
         </p:txBody>
       </p:sp>
       <p:pic>
         <p:nvPicPr>
-          <p:cNvPr id="37" name="input-catalog-photo" descr="IKA OVEN 125 manufacturer catalog image used as an image request">    </p:cNvPr>
+          <p:cNvPr id="31" name="input-text-icon" descr="Wet-lab protocol text symbol">    </p:cNvPr>
           <p:cNvPicPr>
             <a:picLocks noChangeAspect="1"/>
           </p:cNvPicPr>
           <p:nvPr/>
         </p:nvPicPr>
         <p:blipFill>
-          <a:blip r:embed="rId1"/>
-          <a:stretch>
-            <a:fillRect/>
-          </a:stretch>
-        </p:blipFill>
-        <p:spPr>
-          <a:xfrm>
-            <a:off x="409575" y="2343150"/>
-            <a:ext cx="1895475" cy="1790700"/>
-          </a:xfrm>
-          <a:prstGeom prst="rect">
-            <a:avLst/>
-          </a:prstGeom>
-        </p:spPr>
-      </p:pic>
-      <p:pic>
-        <p:nvPicPr>
-          <p:cNvPr id="38" name="input-video-icon" descr="Wet-lab demonstration video symbol">    </p:cNvPr>
-          <p:cNvPicPr>
-            <a:picLocks noChangeAspect="1"/>
-          </p:cNvPicPr>
-          <p:nvPr/>
-        </p:nvPicPr>
-        <p:blipFill>
-          <a:blip r:embed="rId2">
+          <a:blip r:embed="rId1">
             <a:extLst>
               <a:ext uri="{96DAC541-7B7A-43D3-8B79-37D633B846F1}">
-                <asvg:svgBlip xmlns:asvg="http://schemas.microsoft.com/office/drawing/2016/SVG/main" r:embed="rId3"/>
+                <asvg:svgBlip xmlns:asvg="http://schemas.microsoft.com/office/drawing/2016/SVG/main" r:embed="rId2"/>
               </a:ext>
             </a:extLst>
           </a:blip>
@@ -1869,8 +1682,8 @@
         </p:blipFill>
         <p:spPr>
           <a:xfrm>
-            <a:off x="409575" y="4495800"/>
-            <a:ext cx="476250" cy="476250"/>
+            <a:off x="409575" y="1714500"/>
+            <a:ext cx="304800" cy="304800"/>
           </a:xfrm>
           <a:prstGeom prst="rect">
             <a:avLst/>
@@ -1879,17 +1692,17 @@
       </p:pic>
       <p:pic>
         <p:nvPicPr>
-          <p:cNvPr id="39" name="retrieve-icon" descr="Manufacturer evidence retrieval symbol">    </p:cNvPr>
+          <p:cNvPr id="32" name="input-image-icon" descr="Catalog image request symbol">    </p:cNvPr>
           <p:cNvPicPr>
             <a:picLocks noChangeAspect="1"/>
           </p:cNvPicPr>
           <p:nvPr/>
         </p:nvPicPr>
         <p:blipFill>
-          <a:blip r:embed="rId4">
+          <a:blip r:embed="rId3">
             <a:extLst>
               <a:ext uri="{96DAC541-7B7A-43D3-8B79-37D633B846F1}">
-                <asvg:svgBlip xmlns:asvg="http://schemas.microsoft.com/office/drawing/2016/SVG/main" r:embed="rId5"/>
+                <asvg:svgBlip xmlns:asvg="http://schemas.microsoft.com/office/drawing/2016/SVG/main" r:embed="rId4"/>
               </a:ext>
             </a:extLst>
           </a:blip>
@@ -1899,8 +1712,8 @@
         </p:blipFill>
         <p:spPr>
           <a:xfrm>
-            <a:off x="3076575" y="2381250"/>
-            <a:ext cx="514350" cy="514350"/>
+            <a:off x="409575" y="2114550"/>
+            <a:ext cx="304800" cy="304800"/>
           </a:xfrm>
           <a:prstGeom prst="rect">
             <a:avLst/>
@@ -1909,7 +1722,31 @@
       </p:pic>
       <p:pic>
         <p:nvPicPr>
-          <p:cNvPr id="40" name="build-icon" descr="Blender-to-USD generation symbol">    </p:cNvPr>
+          <p:cNvPr id="33" name="input-catalog-photo" descr="IKA OVEN 125 manufacturer catalog image used as an image request">    </p:cNvPr>
+          <p:cNvPicPr>
+            <a:picLocks noChangeAspect="1"/>
+          </p:cNvPicPr>
+          <p:nvPr/>
+        </p:nvPicPr>
+        <p:blipFill>
+          <a:blip r:embed="rId5"/>
+          <a:stretch>
+            <a:fillRect/>
+          </a:stretch>
+        </p:blipFill>
+        <p:spPr>
+          <a:xfrm>
+            <a:off x="409575" y="2933700"/>
+            <a:ext cx="1895475" cy="1104900"/>
+          </a:xfrm>
+          <a:prstGeom prst="rect">
+            <a:avLst/>
+          </a:prstGeom>
+        </p:spPr>
+      </p:pic>
+      <p:pic>
+        <p:nvPicPr>
+          <p:cNvPr id="34" name="input-video-icon" descr="Wet-lab demonstration video symbol">    </p:cNvPr>
           <p:cNvPicPr>
             <a:picLocks noChangeAspect="1"/>
           </p:cNvPicPr>
@@ -1929,8 +1766,8 @@
         </p:blipFill>
         <p:spPr>
           <a:xfrm>
-            <a:off x="6248400" y="2362200"/>
-            <a:ext cx="514350" cy="419100"/>
+            <a:off x="409575" y="2514600"/>
+            <a:ext cx="304800" cy="304800"/>
           </a:xfrm>
           <a:prstGeom prst="rect">
             <a:avLst/>
@@ -1939,22 +1776,28 @@
       </p:pic>
       <p:pic>
         <p:nvPicPr>
-          <p:cNvPr id="41" name="scene-fehling" descr="Fehling r10 current-delivery Isaac scene with bath and tube rack">    </p:cNvPr>
+          <p:cNvPr id="35" name="retrieve-icon" descr="Manufacturer evidence retrieval symbol">    </p:cNvPr>
           <p:cNvPicPr>
             <a:picLocks noChangeAspect="1"/>
           </p:cNvPicPr>
           <p:nvPr/>
         </p:nvPicPr>
         <p:blipFill>
-          <a:blip r:embed="rId8"/>
+          <a:blip r:embed="rId8">
+            <a:extLst>
+              <a:ext uri="{96DAC541-7B7A-43D3-8B79-37D633B846F1}">
+                <asvg:svgBlip xmlns:asvg="http://schemas.microsoft.com/office/drawing/2016/SVG/main" r:embed="rId9"/>
+              </a:ext>
+            </a:extLst>
+          </a:blip>
           <a:stretch>
             <a:fillRect/>
           </a:stretch>
         </p:blipFill>
         <p:spPr>
           <a:xfrm>
-            <a:off x="9144000" y="1714500"/>
-            <a:ext cx="2238375" cy="1809750"/>
+            <a:off x="3124200" y="2343150"/>
+            <a:ext cx="457200" cy="457200"/>
           </a:xfrm>
           <a:prstGeom prst="rect">
             <a:avLst/>
@@ -1963,22 +1806,28 @@
       </p:pic>
       <p:pic>
         <p:nvPicPr>
-          <p:cNvPr id="42" name="scene-powder" descr="Powder r4 current-delivery Isaac scene with scoop over bottle">    </p:cNvPr>
+          <p:cNvPr id="36" name="build-icon" descr="Blender-to-USD generation symbol">    </p:cNvPr>
           <p:cNvPicPr>
             <a:picLocks noChangeAspect="1"/>
           </p:cNvPicPr>
           <p:nvPr/>
         </p:nvPicPr>
         <p:blipFill>
-          <a:blip r:embed="rId9"/>
+          <a:blip r:embed="rId10">
+            <a:extLst>
+              <a:ext uri="{96DAC541-7B7A-43D3-8B79-37D633B846F1}">
+                <asvg:svgBlip xmlns:asvg="http://schemas.microsoft.com/office/drawing/2016/SVG/main" r:embed="rId11"/>
+              </a:ext>
+            </a:extLst>
+          </a:blip>
           <a:stretch>
             <a:fillRect/>
           </a:stretch>
         </p:blipFill>
         <p:spPr>
           <a:xfrm>
-            <a:off x="11525250" y="1714500"/>
-            <a:ext cx="2238375" cy="1809750"/>
+            <a:off x="6600825" y="2343150"/>
+            <a:ext cx="457200" cy="457200"/>
           </a:xfrm>
           <a:prstGeom prst="rect">
             <a:avLst/>
@@ -1987,22 +1836,22 @@
       </p:pic>
       <p:pic>
         <p:nvPicPr>
-          <p:cNvPr id="43" name="scene-titration" descr="Titration r1.7 current-delivery Isaac scene at endpoint">    </p:cNvPr>
+          <p:cNvPr id="37" name="scene-fehling" descr="Fehling r10 current-delivery Isaac scene with bath and tube rack">    </p:cNvPr>
           <p:cNvPicPr>
             <a:picLocks noChangeAspect="1"/>
           </p:cNvPicPr>
           <p:nvPr/>
         </p:nvPicPr>
         <p:blipFill>
-          <a:blip r:embed="rId10"/>
+          <a:blip r:embed="rId12"/>
           <a:stretch>
             <a:fillRect/>
           </a:stretch>
         </p:blipFill>
         <p:spPr>
           <a:xfrm>
-            <a:off x="13906500" y="1714500"/>
-            <a:ext cx="2238375" cy="1809750"/>
+            <a:off x="9191625" y="1619250"/>
+            <a:ext cx="2266950" cy="1828800"/>
           </a:xfrm>
           <a:prstGeom prst="rect">
             <a:avLst/>
@@ -2011,31 +1860,79 @@
       </p:pic>
       <p:pic>
         <p:nvPicPr>
-          <p:cNvPr id="44" name="scene-oven" descr="OVEN r2 current-delivery Isaac scene with open door and glassware">    </p:cNvPr>
+          <p:cNvPr id="38" name="scene-powder" descr="Powder r4 current-delivery Isaac scene with scoop over bottle">    </p:cNvPr>
           <p:cNvPicPr>
             <a:picLocks noChangeAspect="1"/>
           </p:cNvPicPr>
           <p:nvPr/>
         </p:nvPicPr>
         <p:blipFill>
-          <a:blip r:embed="rId11"/>
+          <a:blip r:embed="rId13"/>
           <a:stretch>
             <a:fillRect/>
           </a:stretch>
         </p:blipFill>
         <p:spPr>
           <a:xfrm>
-            <a:off x="16287750" y="1714500"/>
-            <a:ext cx="2238375" cy="1809750"/>
+            <a:off x="11649075" y="1619250"/>
+            <a:ext cx="2266950" cy="1828800"/>
           </a:xfrm>
           <a:prstGeom prst="rect">
             <a:avLst/>
           </a:prstGeom>
         </p:spPr>
       </p:pic>
-      <p:sp>
-        <p:nvSpPr>
-          <p:cNvPr id="45" name="heading-input"/>
+      <p:pic>
+        <p:nvPicPr>
+          <p:cNvPr id="39" name="scene-titration" descr="Titration r1.7 current-delivery Isaac scene at endpoint">    </p:cNvPr>
+          <p:cNvPicPr>
+            <a:picLocks noChangeAspect="1"/>
+          </p:cNvPicPr>
+          <p:nvPr/>
+        </p:nvPicPr>
+        <p:blipFill>
+          <a:blip r:embed="rId14"/>
+          <a:stretch>
+            <a:fillRect/>
+          </a:stretch>
+        </p:blipFill>
+        <p:spPr>
+          <a:xfrm>
+            <a:off x="14106525" y="1619250"/>
+            <a:ext cx="2266950" cy="1828800"/>
+          </a:xfrm>
+          <a:prstGeom prst="rect">
+            <a:avLst/>
+          </a:prstGeom>
+        </p:spPr>
+      </p:pic>
+      <p:pic>
+        <p:nvPicPr>
+          <p:cNvPr id="40" name="scene-oven" descr="OVEN r2 current-delivery Isaac scene with open door and glassware">    </p:cNvPr>
+          <p:cNvPicPr>
+            <a:picLocks noChangeAspect="1"/>
+          </p:cNvPicPr>
+          <p:nvPr/>
+        </p:nvPicPr>
+        <p:blipFill>
+          <a:blip r:embed="rId15"/>
+          <a:stretch>
+            <a:fillRect/>
+          </a:stretch>
+        </p:blipFill>
+        <p:spPr>
+          <a:xfrm>
+            <a:off x="16563975" y="1619250"/>
+            <a:ext cx="2266950" cy="1828800"/>
+          </a:xfrm>
+          <a:prstGeom prst="rect">
+            <a:avLst/>
+          </a:prstGeom>
+        </p:spPr>
+      </p:pic>
+      <p:sp>
+        <p:nvSpPr>
+          <p:cNvPr id="41" name="heading-input"/>
           <p:cNvSpPr/>
           <p:nvPr/>
         </p:nvSpPr>
@@ -2057,6 +1954,129 @@
           <a:lstStyle/>
           <a:p>
             <a:pPr algn="l" indent="0" marL="0">
+              <a:buNone/>
+            </a:pPr>
+            <a:r>
+              <a:rPr lang="en-US" sz="3450" b="1" dirty="0">
+                <a:solidFill>
+                  <a:srgbClr val="172033"/>
+                </a:solidFill>
+                <a:latin typeface="DejaVu Sans" pitchFamily="34" charset="0"/>
+                <a:ea typeface="DejaVu Sans" pitchFamily="34" charset="-122"/>
+                <a:cs typeface="DejaVu Sans" pitchFamily="34" charset="-120"/>
+              </a:rPr>
+              <a:t>Input</a:t>
+            </a:r>
+            <a:endParaRPr lang="en-US" sz="3450" dirty="0"/>
+          </a:p>
+        </p:txBody>
+      </p:sp>
+      <p:sp>
+        <p:nvSpPr>
+          <p:cNvPr id="42" name="heading-agent"/>
+          <p:cNvSpPr/>
+          <p:nvPr/>
+        </p:nvSpPr>
+        <p:spPr>
+          <a:xfrm>
+            <a:off x="2619375" y="228600"/>
+            <a:ext cx="5857875" cy="457200"/>
+          </a:xfrm>
+          <a:prstGeom prst="rect">
+            <a:avLst/>
+          </a:prstGeom>
+          <a:noFill/>
+          <a:ln/>
+        </p:spPr>
+        <p:txBody>
+          <a:bodyPr wrap="square" lIns="0" tIns="0" rIns="0" bIns="0" rtlCol="0" anchor="ctr">
+            <a:normAutofit/>
+          </a:bodyPr>
+          <a:lstStyle/>
+          <a:p>
+            <a:pPr algn="l" indent="0" marL="0">
+              <a:buNone/>
+            </a:pPr>
+            <a:r>
+              <a:rPr lang="en-US" sz="3450" b="1" dirty="0">
+                <a:solidFill>
+                  <a:srgbClr val="172033"/>
+                </a:solidFill>
+                <a:latin typeface="DejaVu Sans" pitchFamily="34" charset="0"/>
+                <a:ea typeface="DejaVu Sans" pitchFamily="34" charset="-122"/>
+                <a:cs typeface="DejaVu Sans" pitchFamily="34" charset="-120"/>
+              </a:rPr>
+              <a:t>Lab2Sim agent</a:t>
+            </a:r>
+            <a:endParaRPr lang="en-US" sz="3450" dirty="0"/>
+          </a:p>
+        </p:txBody>
+      </p:sp>
+      <p:sp>
+        <p:nvSpPr>
+          <p:cNvPr id="43" name="heading-results"/>
+          <p:cNvSpPr/>
+          <p:nvPr/>
+        </p:nvSpPr>
+        <p:spPr>
+          <a:xfrm>
+            <a:off x="9191625" y="228600"/>
+            <a:ext cx="9620250" cy="457200"/>
+          </a:xfrm>
+          <a:prstGeom prst="rect">
+            <a:avLst/>
+          </a:prstGeom>
+          <a:noFill/>
+          <a:ln/>
+        </p:spPr>
+        <p:txBody>
+          <a:bodyPr wrap="square" lIns="0" tIns="0" rIns="0" bIns="0" rtlCol="0" anchor="ctr">
+            <a:normAutofit/>
+          </a:bodyPr>
+          <a:lstStyle/>
+          <a:p>
+            <a:pPr algn="l" indent="0" marL="0">
+              <a:buNone/>
+            </a:pPr>
+            <a:r>
+              <a:rPr lang="en-US" sz="3450" b="1" dirty="0">
+                <a:solidFill>
+                  <a:srgbClr val="172033"/>
+                </a:solidFill>
+                <a:latin typeface="DejaVu Sans" pitchFamily="34" charset="0"/>
+                <a:ea typeface="DejaVu Sans" pitchFamily="34" charset="-122"/>
+                <a:cs typeface="DejaVu Sans" pitchFamily="34" charset="-120"/>
+              </a:rPr>
+              <a:t>Robot-ready Isaac scenes</a:t>
+            </a:r>
+            <a:endParaRPr lang="en-US" sz="3450" dirty="0"/>
+          </a:p>
+        </p:txBody>
+      </p:sp>
+      <p:sp>
+        <p:nvSpPr>
+          <p:cNvPr id="44" name="stage-title-search"/>
+          <p:cNvSpPr/>
+          <p:nvPr/>
+        </p:nvSpPr>
+        <p:spPr>
+          <a:xfrm>
+            <a:off x="2619375" y="1733550"/>
+            <a:ext cx="1476375" cy="419100"/>
+          </a:xfrm>
+          <a:prstGeom prst="rect">
+            <a:avLst/>
+          </a:prstGeom>
+          <a:noFill/>
+          <a:ln/>
+        </p:spPr>
+        <p:txBody>
+          <a:bodyPr wrap="square" lIns="0" tIns="0" rIns="0" bIns="0" rtlCol="0" anchor="ctr">
+            <a:normAutofit/>
+          </a:bodyPr>
+          <a:lstStyle/>
+          <a:p>
+            <a:pPr algn="ctr" indent="0" marL="0">
               <a:buNone/>
             </a:pPr>
             <a:r>
@@ -2064,11 +2084,11 @@
                 <a:solidFill>
                   <a:srgbClr val="172033"/>
                 </a:solidFill>
-                <a:latin typeface="Noto Sans" pitchFamily="34" charset="0"/>
-                <a:ea typeface="Noto Sans" pitchFamily="34" charset="-122"/>
-                <a:cs typeface="Noto Sans" pitchFamily="34" charset="-120"/>
+                <a:latin typeface="DejaVu Sans" pitchFamily="34" charset="0"/>
+                <a:ea typeface="DejaVu Sans" pitchFamily="34" charset="-122"/>
+                <a:cs typeface="DejaVu Sans" pitchFamily="34" charset="-120"/>
               </a:rPr>
-              <a:t>INPUT</a:t>
+              <a:t>Search</a:t>
             </a:r>
             <a:endParaRPr lang="en-US" sz="2700" dirty="0"/>
           </a:p>
@@ -2076,14 +2096,14 @@
       </p:sp>
       <p:sp>
         <p:nvSpPr>
-          <p:cNvPr id="46" name="heading-agent"/>
-          <p:cNvSpPr/>
-          <p:nvPr/>
-        </p:nvSpPr>
-        <p:spPr>
-          <a:xfrm>
-            <a:off x="2857500" y="228600"/>
-            <a:ext cx="5857875" cy="457200"/>
+          <p:cNvPr id="45" name="stage-title-spec"/>
+          <p:cNvSpPr/>
+          <p:nvPr/>
+        </p:nvSpPr>
+        <p:spPr>
+          <a:xfrm>
+            <a:off x="4286250" y="1733550"/>
+            <a:ext cx="1809750" cy="419100"/>
           </a:xfrm>
           <a:prstGeom prst="rect">
             <a:avLst/>
@@ -2097,7 +2117,7 @@
           </a:bodyPr>
           <a:lstStyle/>
           <a:p>
-            <a:pPr algn="l" indent="0" marL="0">
+            <a:pPr algn="ctr" indent="0" marL="0">
               <a:buNone/>
             </a:pPr>
             <a:r>
@@ -2105,11 +2125,11 @@
                 <a:solidFill>
                   <a:srgbClr val="172033"/>
                 </a:solidFill>
-                <a:latin typeface="Noto Sans" pitchFamily="34" charset="0"/>
-                <a:ea typeface="Noto Sans" pitchFamily="34" charset="-122"/>
-                <a:cs typeface="Noto Sans" pitchFamily="34" charset="-120"/>
+                <a:latin typeface="DejaVu Sans" pitchFamily="34" charset="0"/>
+                <a:ea typeface="DejaVu Sans" pitchFamily="34" charset="-122"/>
+                <a:cs typeface="DejaVu Sans" pitchFamily="34" charset="-120"/>
               </a:rPr>
-              <a:t>LAB2SIM AGENT</a:t>
+              <a:t>Spec</a:t>
             </a:r>
             <a:endParaRPr lang="en-US" sz="2700" dirty="0"/>
           </a:p>
@@ -2117,14 +2137,14 @@
       </p:sp>
       <p:sp>
         <p:nvSpPr>
-          <p:cNvPr id="47" name="heading-results"/>
-          <p:cNvSpPr/>
-          <p:nvPr/>
-        </p:nvSpPr>
-        <p:spPr>
-          <a:xfrm>
-            <a:off x="8953500" y="228600"/>
-            <a:ext cx="9858375" cy="457200"/>
+          <p:cNvPr id="46" name="stage-title-build"/>
+          <p:cNvSpPr/>
+          <p:nvPr/>
+        </p:nvSpPr>
+        <p:spPr>
+          <a:xfrm>
+            <a:off x="6286500" y="1733550"/>
+            <a:ext cx="1095375" cy="419100"/>
           </a:xfrm>
           <a:prstGeom prst="rect">
             <a:avLst/>
@@ -2138,7 +2158,7 @@
           </a:bodyPr>
           <a:lstStyle/>
           <a:p>
-            <a:pPr algn="l" indent="0" marL="0">
+            <a:pPr algn="ctr" indent="0" marL="0">
               <a:buNone/>
             </a:pPr>
             <a:r>
@@ -2146,11 +2166,11 @@
                 <a:solidFill>
                   <a:srgbClr val="172033"/>
                 </a:solidFill>
-                <a:latin typeface="Noto Sans" pitchFamily="34" charset="0"/>
-                <a:ea typeface="Noto Sans" pitchFamily="34" charset="-122"/>
-                <a:cs typeface="Noto Sans" pitchFamily="34" charset="-120"/>
+                <a:latin typeface="DejaVu Sans" pitchFamily="34" charset="0"/>
+                <a:ea typeface="DejaVu Sans" pitchFamily="34" charset="-122"/>
+                <a:cs typeface="DejaVu Sans" pitchFamily="34" charset="-120"/>
               </a:rPr>
-              <a:t>ROBOT-READY ISAAC SCENES</a:t>
+              <a:t>Build</a:t>
             </a:r>
             <a:endParaRPr lang="en-US" sz="2700" dirty="0"/>
           </a:p>
@@ -2158,14 +2178,14 @@
       </p:sp>
       <p:sp>
         <p:nvSpPr>
-          <p:cNvPr id="48" name="stage-title-search"/>
-          <p:cNvSpPr/>
-          <p:nvPr/>
-        </p:nvSpPr>
-        <p:spPr>
-          <a:xfrm>
-            <a:off x="2714625" y="1885950"/>
-            <a:ext cx="1190625" cy="419100"/>
+          <p:cNvPr id="47" name="stage-title-admit"/>
+          <p:cNvSpPr/>
+          <p:nvPr/>
+        </p:nvSpPr>
+        <p:spPr>
+          <a:xfrm>
+            <a:off x="7572375" y="1733550"/>
+            <a:ext cx="1381125" cy="419100"/>
           </a:xfrm>
           <a:prstGeom prst="rect">
             <a:avLst/>
@@ -2187,11 +2207,11 @@
                 <a:solidFill>
                   <a:srgbClr val="172033"/>
                 </a:solidFill>
-                <a:latin typeface="Noto Sans" pitchFamily="34" charset="0"/>
-                <a:ea typeface="Noto Sans" pitchFamily="34" charset="-122"/>
-                <a:cs typeface="Noto Sans" pitchFamily="34" charset="-120"/>
+                <a:latin typeface="DejaVu Sans" pitchFamily="34" charset="0"/>
+                <a:ea typeface="DejaVu Sans" pitchFamily="34" charset="-122"/>
+                <a:cs typeface="DejaVu Sans" pitchFamily="34" charset="-120"/>
               </a:rPr>
-              <a:t>Search</a:t>
+              <a:t>Admit</a:t>
             </a:r>
             <a:endParaRPr lang="en-US" sz="2700" dirty="0"/>
           </a:p>
@@ -2199,14 +2219,14 @@
       </p:sp>
       <p:sp>
         <p:nvSpPr>
-          <p:cNvPr id="49" name="stage-title-spec"/>
-          <p:cNvSpPr/>
-          <p:nvPr/>
-        </p:nvSpPr>
-        <p:spPr>
-          <a:xfrm>
-            <a:off x="4000500" y="1466850"/>
-            <a:ext cx="1762125" cy="419100"/>
+          <p:cNvPr id="48" name="input-modalities"/>
+          <p:cNvSpPr/>
+          <p:nvPr/>
+        </p:nvSpPr>
+        <p:spPr>
+          <a:xfrm>
+            <a:off x="828675" y="1695450"/>
+            <a:ext cx="1476375" cy="342900"/>
           </a:xfrm>
           <a:prstGeom prst="rect">
             <a:avLst/>
@@ -2220,34 +2240,34 @@
           </a:bodyPr>
           <a:lstStyle/>
           <a:p>
-            <a:pPr algn="ctr" indent="0" marL="0">
+            <a:pPr algn="l" indent="0" marL="0">
               <a:buNone/>
             </a:pPr>
             <a:r>
-              <a:rPr lang="en-US" sz="3000" b="1" dirty="0">
+              <a:rPr lang="en-US" sz="2250" dirty="0">
                 <a:solidFill>
                   <a:srgbClr val="172033"/>
                 </a:solidFill>
-                <a:latin typeface="Noto Sans" pitchFamily="34" charset="0"/>
-                <a:ea typeface="Noto Sans" pitchFamily="34" charset="-122"/>
-                <a:cs typeface="Noto Sans" pitchFamily="34" charset="-120"/>
+                <a:latin typeface="DejaVu Sans" pitchFamily="34" charset="0"/>
+                <a:ea typeface="DejaVu Sans" pitchFamily="34" charset="-122"/>
+                <a:cs typeface="DejaVu Sans" pitchFamily="34" charset="-120"/>
               </a:rPr>
-              <a:t>Spec</a:t>
+              <a:t>Text</a:t>
             </a:r>
-            <a:endParaRPr lang="en-US" sz="3000" dirty="0"/>
-          </a:p>
-        </p:txBody>
-      </p:sp>
-      <p:sp>
-        <p:nvSpPr>
-          <p:cNvPr id="50" name="stage-title-build"/>
-          <p:cNvSpPr/>
-          <p:nvPr/>
-        </p:nvSpPr>
-        <p:spPr>
-          <a:xfrm>
-            <a:off x="5857875" y="1885950"/>
-            <a:ext cx="1143000" cy="419100"/>
+            <a:endParaRPr lang="en-US" sz="2250" dirty="0"/>
+          </a:p>
+        </p:txBody>
+      </p:sp>
+      <p:sp>
+        <p:nvSpPr>
+          <p:cNvPr id="49" name="input-image-label"/>
+          <p:cNvSpPr/>
+          <p:nvPr/>
+        </p:nvSpPr>
+        <p:spPr>
+          <a:xfrm>
+            <a:off x="828675" y="2095500"/>
+            <a:ext cx="1476375" cy="342900"/>
           </a:xfrm>
           <a:prstGeom prst="rect">
             <a:avLst/>
@@ -2261,34 +2281,34 @@
           </a:bodyPr>
           <a:lstStyle/>
           <a:p>
-            <a:pPr algn="ctr" indent="0" marL="0">
+            <a:pPr algn="l" indent="0" marL="0">
               <a:buNone/>
             </a:pPr>
             <a:r>
-              <a:rPr lang="en-US" sz="3000" b="1" dirty="0">
+              <a:rPr lang="en-US" sz="2250" dirty="0">
                 <a:solidFill>
                   <a:srgbClr val="172033"/>
                 </a:solidFill>
-                <a:latin typeface="Noto Sans" pitchFamily="34" charset="0"/>
-                <a:ea typeface="Noto Sans" pitchFamily="34" charset="-122"/>
-                <a:cs typeface="Noto Sans" pitchFamily="34" charset="-120"/>
+                <a:latin typeface="DejaVu Sans" pitchFamily="34" charset="0"/>
+                <a:ea typeface="DejaVu Sans" pitchFamily="34" charset="-122"/>
+                <a:cs typeface="DejaVu Sans" pitchFamily="34" charset="-120"/>
               </a:rPr>
-              <a:t>Build</a:t>
+              <a:t>Image</a:t>
             </a:r>
-            <a:endParaRPr lang="en-US" sz="3000" dirty="0"/>
-          </a:p>
-        </p:txBody>
-      </p:sp>
-      <p:sp>
-        <p:nvSpPr>
-          <p:cNvPr id="51" name="stage-title-admit"/>
-          <p:cNvSpPr/>
-          <p:nvPr/>
-        </p:nvSpPr>
-        <p:spPr>
-          <a:xfrm>
-            <a:off x="7096125" y="1657350"/>
-            <a:ext cx="1619250" cy="419100"/>
+            <a:endParaRPr lang="en-US" sz="2250" dirty="0"/>
+          </a:p>
+        </p:txBody>
+      </p:sp>
+      <p:sp>
+        <p:nvSpPr>
+          <p:cNvPr id="50" name="input-video-label"/>
+          <p:cNvSpPr/>
+          <p:nvPr/>
+        </p:nvSpPr>
+        <p:spPr>
+          <a:xfrm>
+            <a:off x="828675" y="2495550"/>
+            <a:ext cx="1476375" cy="342900"/>
           </a:xfrm>
           <a:prstGeom prst="rect">
             <a:avLst/>
@@ -2302,34 +2322,34 @@
           </a:bodyPr>
           <a:lstStyle/>
           <a:p>
-            <a:pPr algn="ctr" indent="0" marL="0">
+            <a:pPr algn="l" indent="0" marL="0">
               <a:buNone/>
             </a:pPr>
             <a:r>
-              <a:rPr lang="en-US" sz="3000" b="1" dirty="0">
+              <a:rPr lang="en-US" sz="2250" dirty="0">
                 <a:solidFill>
                   <a:srgbClr val="172033"/>
                 </a:solidFill>
-                <a:latin typeface="Noto Sans" pitchFamily="34" charset="0"/>
-                <a:ea typeface="Noto Sans" pitchFamily="34" charset="-122"/>
-                <a:cs typeface="Noto Sans" pitchFamily="34" charset="-120"/>
+                <a:latin typeface="DejaVu Sans" pitchFamily="34" charset="0"/>
+                <a:ea typeface="DejaVu Sans" pitchFamily="34" charset="-122"/>
+                <a:cs typeface="DejaVu Sans" pitchFamily="34" charset="-120"/>
               </a:rPr>
-              <a:t>Admit</a:t>
+              <a:t>Video</a:t>
             </a:r>
-            <a:endParaRPr lang="en-US" sz="3000" dirty="0"/>
-          </a:p>
-        </p:txBody>
-      </p:sp>
-      <p:sp>
-        <p:nvSpPr>
-          <p:cNvPr id="52" name="input-modalities"/>
-          <p:cNvSpPr/>
-          <p:nvPr/>
-        </p:nvSpPr>
-        <p:spPr>
-          <a:xfrm>
-            <a:off x="409575" y="1257300"/>
-            <a:ext cx="1895475" cy="457200"/>
+            <a:endParaRPr lang="en-US" sz="2250" dirty="0"/>
+          </a:p>
+        </p:txBody>
+      </p:sp>
+      <p:sp>
+        <p:nvSpPr>
+          <p:cNvPr id="51" name="retrieve-body"/>
+          <p:cNvSpPr/>
+          <p:nvPr/>
+        </p:nvSpPr>
+        <p:spPr>
+          <a:xfrm>
+            <a:off x="2667000" y="2914650"/>
+            <a:ext cx="1381125" cy="666750"/>
           </a:xfrm>
           <a:prstGeom prst="rect">
             <a:avLst/>
@@ -2343,34 +2363,51 @@
           </a:bodyPr>
           <a:lstStyle/>
           <a:p>
-            <a:pPr algn="l" indent="0" marL="0">
+            <a:pPr algn="ctr" indent="0" marL="0">
               <a:buNone/>
             </a:pPr>
             <a:r>
-              <a:rPr lang="en-US" sz="3000" b="1" dirty="0">
+              <a:rPr lang="en-US" sz="2550" dirty="0">
                 <a:solidFill>
-                  <a:srgbClr val="2D6AA3"/>
+                  <a:srgbClr val="3F4855"/>
                 </a:solidFill>
-                <a:latin typeface="Noto Sans" pitchFamily="34" charset="0"/>
-                <a:ea typeface="Noto Sans" pitchFamily="34" charset="-122"/>
-                <a:cs typeface="Noto Sans" pitchFamily="34" charset="-120"/>
+                <a:latin typeface="DejaVu Sans" pitchFamily="34" charset="0"/>
+                <a:ea typeface="DejaVu Sans" pitchFamily="34" charset="-122"/>
+                <a:cs typeface="DejaVu Sans" pitchFamily="34" charset="-120"/>
               </a:rPr>
-              <a:t>TEXT</a:t>
+              <a:t>Web</a:t>
             </a:r>
-            <a:endParaRPr lang="en-US" sz="3000" dirty="0"/>
-          </a:p>
-        </p:txBody>
-      </p:sp>
-      <p:sp>
-        <p:nvSpPr>
-          <p:cNvPr id="53" name="input-image-label"/>
-          <p:cNvSpPr/>
-          <p:nvPr/>
-        </p:nvSpPr>
-        <p:spPr>
-          <a:xfrm>
-            <a:off x="409575" y="1809750"/>
-            <a:ext cx="1895475" cy="457200"/>
+            <a:endParaRPr lang="en-US" sz="2550" dirty="0"/>
+          </a:p>
+          <a:p>
+            <a:pPr algn="ctr" indent="0" marL="0">
+              <a:buNone/>
+            </a:pPr>
+            <a:r>
+              <a:rPr lang="en-US" sz="2550" dirty="0">
+                <a:solidFill>
+                  <a:srgbClr val="3F4855"/>
+                </a:solidFill>
+                <a:latin typeface="DejaVu Sans" pitchFamily="34" charset="0"/>
+                <a:ea typeface="DejaVu Sans" pitchFamily="34" charset="-122"/>
+                <a:cs typeface="DejaVu Sans" pitchFamily="34" charset="-120"/>
+              </a:rPr>
+              <a:t>docs</a:t>
+            </a:r>
+            <a:endParaRPr lang="en-US" sz="2550" dirty="0"/>
+          </a:p>
+        </p:txBody>
+      </p:sp>
+      <p:sp>
+        <p:nvSpPr>
+          <p:cNvPr id="52" name="spec-body"/>
+          <p:cNvSpPr/>
+          <p:nvPr/>
+        </p:nvSpPr>
+        <p:spPr>
+          <a:xfrm>
+            <a:off x="4333875" y="2343150"/>
+            <a:ext cx="1714500" cy="1428750"/>
           </a:xfrm>
           <a:prstGeom prst="rect">
             <a:avLst/>
@@ -2388,30 +2425,64 @@
               <a:buNone/>
             </a:pPr>
             <a:r>
-              <a:rPr lang="en-US" sz="3000" b="1" dirty="0">
+              <a:rPr lang="en-US" sz="2250" dirty="0">
                 <a:solidFill>
-                  <a:srgbClr val="2D6AA3"/>
+                  <a:srgbClr val="172033"/>
                 </a:solidFill>
-                <a:latin typeface="Noto Sans" pitchFamily="34" charset="0"/>
-                <a:ea typeface="Noto Sans" pitchFamily="34" charset="-122"/>
-                <a:cs typeface="Noto Sans" pitchFamily="34" charset="-120"/>
+                <a:latin typeface="DejaVu Sans" pitchFamily="34" charset="0"/>
+                <a:ea typeface="DejaVu Sans" pitchFamily="34" charset="-122"/>
+                <a:cs typeface="DejaVu Sans" pitchFamily="34" charset="-120"/>
               </a:rPr>
-              <a:t>IMAGE</a:t>
+              <a:t>OVEN 125</a:t>
             </a:r>
-            <a:endParaRPr lang="en-US" sz="3000" dirty="0"/>
-          </a:p>
-        </p:txBody>
-      </p:sp>
-      <p:sp>
-        <p:nvSpPr>
-          <p:cNvPr id="54" name="input-video-label"/>
-          <p:cNvSpPr/>
-          <p:nvPr/>
-        </p:nvSpPr>
-        <p:spPr>
-          <a:xfrm>
-            <a:off x="1000125" y="4552950"/>
-            <a:ext cx="1476375" cy="457200"/>
+            <a:endParaRPr lang="en-US" sz="2250" dirty="0"/>
+          </a:p>
+          <a:p>
+            <a:pPr algn="l" indent="0" marL="0">
+              <a:buNone/>
+            </a:pPr>
+            <a:r>
+              <a:rPr lang="en-US" sz="2250" dirty="0">
+                <a:solidFill>
+                  <a:srgbClr val="172033"/>
+                </a:solidFill>
+                <a:latin typeface="DejaVu Sans" pitchFamily="34" charset="0"/>
+                <a:ea typeface="DejaVu Sans" pitchFamily="34" charset="-122"/>
+                <a:cs typeface="DejaVu Sans" pitchFamily="34" charset="-120"/>
+              </a:rPr>
+              <a:t>DOOR 180°</a:t>
+            </a:r>
+            <a:endParaRPr lang="en-US" sz="2250" dirty="0"/>
+          </a:p>
+          <a:p>
+            <a:pPr algn="l" indent="0" marL="0">
+              <a:buNone/>
+            </a:pPr>
+            <a:r>
+              <a:rPr lang="en-US" sz="2250" dirty="0">
+                <a:solidFill>
+                  <a:srgbClr val="172033"/>
+                </a:solidFill>
+                <a:latin typeface="DejaVu Sans" pitchFamily="34" charset="0"/>
+                <a:ea typeface="DejaVu Sans" pitchFamily="34" charset="-122"/>
+                <a:cs typeface="DejaVu Sans" pitchFamily="34" charset="-120"/>
+              </a:rPr>
+              <a:t>SHELF ×6</a:t>
+            </a:r>
+            <a:endParaRPr lang="en-US" sz="2250" dirty="0"/>
+          </a:p>
+        </p:txBody>
+      </p:sp>
+      <p:sp>
+        <p:nvSpPr>
+          <p:cNvPr id="53" name="build-body"/>
+          <p:cNvSpPr/>
+          <p:nvPr/>
+        </p:nvSpPr>
+        <p:spPr>
+          <a:xfrm>
+            <a:off x="6334125" y="2914650"/>
+            <a:ext cx="1000125" cy="552450"/>
           </a:xfrm>
           <a:prstGeom prst="rect">
             <a:avLst/>
@@ -2425,34 +2496,34 @@
           </a:bodyPr>
           <a:lstStyle/>
           <a:p>
-            <a:pPr algn="l" indent="0" marL="0">
+            <a:pPr algn="ctr" indent="0" marL="0">
               <a:buNone/>
             </a:pPr>
             <a:r>
-              <a:rPr lang="en-US" sz="3000" dirty="0">
+              <a:rPr lang="en-US" sz="2550" dirty="0">
                 <a:solidFill>
-                  <a:srgbClr val="667085"/>
+                  <a:srgbClr val="3F4855"/>
                 </a:solidFill>
-                <a:latin typeface="Noto Sans" pitchFamily="34" charset="0"/>
-                <a:ea typeface="Noto Sans" pitchFamily="34" charset="-122"/>
-                <a:cs typeface="Noto Sans" pitchFamily="34" charset="-120"/>
+                <a:latin typeface="DejaVu Sans" pitchFamily="34" charset="0"/>
+                <a:ea typeface="DejaVu Sans" pitchFamily="34" charset="-122"/>
+                <a:cs typeface="DejaVu Sans" pitchFamily="34" charset="-120"/>
               </a:rPr>
-              <a:t>VIDEO</a:t>
+              <a:t>USD</a:t>
             </a:r>
-            <a:endParaRPr lang="en-US" sz="3000" dirty="0"/>
-          </a:p>
-        </p:txBody>
-      </p:sp>
-      <p:sp>
-        <p:nvSpPr>
-          <p:cNvPr id="55" name="retrieve-body"/>
-          <p:cNvSpPr/>
-          <p:nvPr/>
-        </p:nvSpPr>
-        <p:spPr>
-          <a:xfrm>
-            <a:off x="2809875" y="2914650"/>
-            <a:ext cx="1000125" cy="704850"/>
+            <a:endParaRPr lang="en-US" sz="2550" dirty="0"/>
+          </a:p>
+        </p:txBody>
+      </p:sp>
+      <p:sp>
+        <p:nvSpPr>
+          <p:cNvPr id="54" name="admit-body"/>
+          <p:cNvSpPr/>
+          <p:nvPr/>
+        </p:nvSpPr>
+        <p:spPr>
+          <a:xfrm>
+            <a:off x="7600950" y="2286000"/>
+            <a:ext cx="1323975" cy="1047750"/>
           </a:xfrm>
           <a:prstGeom prst="rect">
             <a:avLst/>
@@ -2470,187 +2541,13 @@
               <a:buNone/>
             </a:pPr>
             <a:r>
-              <a:rPr lang="en-US" sz="3000" dirty="0">
-                <a:solidFill>
-                  <a:srgbClr val="667085"/>
-                </a:solidFill>
-                <a:latin typeface="Noto Sans" pitchFamily="34" charset="0"/>
-                <a:ea typeface="Noto Sans" pitchFamily="34" charset="-122"/>
-                <a:cs typeface="Noto Sans" pitchFamily="34" charset="-120"/>
-              </a:rPr>
-              <a:t>WEB</a:t>
-            </a:r>
-            <a:endParaRPr lang="en-US" sz="3000" dirty="0"/>
-          </a:p>
-          <a:p>
-            <a:pPr algn="ctr" indent="0" marL="0">
-              <a:buNone/>
-            </a:pPr>
-            <a:r>
-              <a:rPr lang="en-US" sz="3000" dirty="0">
-                <a:solidFill>
-                  <a:srgbClr val="667085"/>
-                </a:solidFill>
-                <a:latin typeface="Noto Sans" pitchFamily="34" charset="0"/>
-                <a:ea typeface="Noto Sans" pitchFamily="34" charset="-122"/>
-                <a:cs typeface="Noto Sans" pitchFamily="34" charset="-120"/>
-              </a:rPr>
-              <a:t>DOCS</a:t>
-            </a:r>
-            <a:endParaRPr lang="en-US" sz="3000" dirty="0"/>
-          </a:p>
-        </p:txBody>
-      </p:sp>
-      <p:sp>
-        <p:nvSpPr>
-          <p:cNvPr id="56" name="spec-body"/>
-          <p:cNvSpPr/>
-          <p:nvPr/>
-        </p:nvSpPr>
-        <p:spPr>
-          <a:xfrm>
-            <a:off x="4152900" y="2171700"/>
-            <a:ext cx="1457325" cy="1390650"/>
-          </a:xfrm>
-          <a:prstGeom prst="rect">
-            <a:avLst/>
-          </a:prstGeom>
-          <a:noFill/>
-          <a:ln/>
-        </p:spPr>
-        <p:txBody>
-          <a:bodyPr wrap="square" lIns="0" tIns="0" rIns="0" bIns="0" rtlCol="0" anchor="ctr">
-            <a:normAutofit/>
-          </a:bodyPr>
-          <a:lstStyle/>
-          <a:p>
-            <a:pPr algn="l" indent="0" marL="0">
-              <a:buNone/>
-            </a:pPr>
-            <a:r>
               <a:rPr lang="en-US" sz="2550" dirty="0">
                 <a:solidFill>
-                  <a:srgbClr val="7A4C12"/>
+                  <a:srgbClr val="3F4855"/>
                 </a:solidFill>
-                <a:latin typeface="Noto Sans" pitchFamily="34" charset="0"/>
-                <a:ea typeface="Noto Sans" pitchFamily="34" charset="-122"/>
-                <a:cs typeface="Noto Sans" pitchFamily="34" charset="-120"/>
-              </a:rPr>
-              <a:t>OVEN125</a:t>
-            </a:r>
-            <a:endParaRPr lang="en-US" sz="2550" dirty="0"/>
-          </a:p>
-          <a:p>
-            <a:pPr algn="l" indent="0" marL="0">
-              <a:buNone/>
-            </a:pPr>
-            <a:r>
-              <a:rPr lang="en-US" sz="2550" dirty="0">
-                <a:solidFill>
-                  <a:srgbClr val="7A4C12"/>
-                </a:solidFill>
-                <a:latin typeface="Noto Sans" pitchFamily="34" charset="0"/>
-                <a:ea typeface="Noto Sans" pitchFamily="34" charset="-122"/>
-                <a:cs typeface="Noto Sans" pitchFamily="34" charset="-120"/>
-              </a:rPr>
-              <a:t>DOOR180°</a:t>
-            </a:r>
-            <a:endParaRPr lang="en-US" sz="2550" dirty="0"/>
-          </a:p>
-          <a:p>
-            <a:pPr algn="l" indent="0" marL="0">
-              <a:buNone/>
-            </a:pPr>
-            <a:r>
-              <a:rPr lang="en-US" sz="2550" dirty="0">
-                <a:solidFill>
-                  <a:srgbClr val="7A4C12"/>
-                </a:solidFill>
-                <a:latin typeface="Noto Sans" pitchFamily="34" charset="0"/>
-                <a:ea typeface="Noto Sans" pitchFamily="34" charset="-122"/>
-                <a:cs typeface="Noto Sans" pitchFamily="34" charset="-120"/>
-              </a:rPr>
-              <a:t>SHELF×6</a:t>
-            </a:r>
-            <a:endParaRPr lang="en-US" sz="2550" dirty="0"/>
-          </a:p>
-        </p:txBody>
-      </p:sp>
-      <p:sp>
-        <p:nvSpPr>
-          <p:cNvPr id="57" name="build-body"/>
-          <p:cNvSpPr/>
-          <p:nvPr/>
-        </p:nvSpPr>
-        <p:spPr>
-          <a:xfrm>
-            <a:off x="5953125" y="2895600"/>
-            <a:ext cx="952500" cy="552450"/>
-          </a:xfrm>
-          <a:prstGeom prst="rect">
-            <a:avLst/>
-          </a:prstGeom>
-          <a:noFill/>
-          <a:ln/>
-        </p:spPr>
-        <p:txBody>
-          <a:bodyPr wrap="square" lIns="0" tIns="0" rIns="0" bIns="0" rtlCol="0" anchor="ctr">
-            <a:normAutofit/>
-          </a:bodyPr>
-          <a:lstStyle/>
-          <a:p>
-            <a:pPr algn="ctr" indent="0" marL="0">
-              <a:buNone/>
-            </a:pPr>
-            <a:r>
-              <a:rPr lang="en-US" sz="3000" dirty="0">
-                <a:solidFill>
-                  <a:srgbClr val="172033"/>
-                </a:solidFill>
-                <a:latin typeface="Noto Sans" pitchFamily="34" charset="0"/>
-                <a:ea typeface="Noto Sans" pitchFamily="34" charset="-122"/>
-                <a:cs typeface="Noto Sans" pitchFamily="34" charset="-120"/>
-              </a:rPr>
-              <a:t>USD</a:t>
-            </a:r>
-            <a:endParaRPr lang="en-US" sz="3000" dirty="0"/>
-          </a:p>
-        </p:txBody>
-      </p:sp>
-      <p:sp>
-        <p:nvSpPr>
-          <p:cNvPr id="58" name="admit-body"/>
-          <p:cNvSpPr/>
-          <p:nvPr/>
-        </p:nvSpPr>
-        <p:spPr>
-          <a:xfrm>
-            <a:off x="7191375" y="2171700"/>
-            <a:ext cx="1428750" cy="1143000"/>
-          </a:xfrm>
-          <a:prstGeom prst="rect">
-            <a:avLst/>
-          </a:prstGeom>
-          <a:noFill/>
-          <a:ln/>
-        </p:spPr>
-        <p:txBody>
-          <a:bodyPr wrap="square" lIns="0" tIns="0" rIns="0" bIns="0" rtlCol="0" anchor="ctr">
-            <a:normAutofit/>
-          </a:bodyPr>
-          <a:lstStyle/>
-          <a:p>
-            <a:pPr algn="ctr" indent="0" marL="0">
-              <a:buNone/>
-            </a:pPr>
-            <a:r>
-              <a:rPr lang="en-US" sz="2550" dirty="0">
-                <a:solidFill>
-                  <a:srgbClr val="38665C"/>
-                </a:solidFill>
-                <a:latin typeface="Noto Sans" pitchFamily="34" charset="0"/>
-                <a:ea typeface="Noto Sans" pitchFamily="34" charset="-122"/>
-                <a:cs typeface="Noto Sans" pitchFamily="34" charset="-120"/>
+                <a:latin typeface="DejaVu Sans" pitchFamily="34" charset="0"/>
+                <a:ea typeface="DejaVu Sans" pitchFamily="34" charset="-122"/>
+                <a:cs typeface="DejaVu Sans" pitchFamily="34" charset="-120"/>
               </a:rPr>
               <a:t>Convert</a:t>
             </a:r>
@@ -2663,11 +2560,11 @@
             <a:r>
               <a:rPr lang="en-US" sz="2550" dirty="0">
                 <a:solidFill>
-                  <a:srgbClr val="38665C"/>
+                  <a:srgbClr val="3F4855"/>
                 </a:solidFill>
-                <a:latin typeface="Noto Sans" pitchFamily="34" charset="0"/>
-                <a:ea typeface="Noto Sans" pitchFamily="34" charset="-122"/>
-                <a:cs typeface="Noto Sans" pitchFamily="34" charset="-120"/>
+                <a:latin typeface="DejaVu Sans" pitchFamily="34" charset="0"/>
+                <a:ea typeface="DejaVu Sans" pitchFamily="34" charset="-122"/>
+                <a:cs typeface="DejaVu Sans" pitchFamily="34" charset="-120"/>
               </a:rPr>
               <a:t>Asset</a:t>
             </a:r>
@@ -2680,11 +2577,11 @@
             <a:r>
               <a:rPr lang="en-US" sz="2550" dirty="0">
                 <a:solidFill>
-                  <a:srgbClr val="38665C"/>
+                  <a:srgbClr val="3F4855"/>
                 </a:solidFill>
-                <a:latin typeface="Noto Sans" pitchFamily="34" charset="0"/>
-                <a:ea typeface="Noto Sans" pitchFamily="34" charset="-122"/>
-                <a:cs typeface="Noto Sans" pitchFamily="34" charset="-120"/>
+                <a:latin typeface="DejaVu Sans" pitchFamily="34" charset="0"/>
+                <a:ea typeface="DejaVu Sans" pitchFamily="34" charset="-122"/>
+                <a:cs typeface="DejaVu Sans" pitchFamily="34" charset="-120"/>
               </a:rPr>
               <a:t>PhysX</a:t>
             </a:r>
@@ -2694,14 +2591,14 @@
       </p:sp>
       <p:sp>
         <p:nvSpPr>
-          <p:cNvPr id="59" name="admit-status"/>
-          <p:cNvSpPr/>
-          <p:nvPr/>
-        </p:nvSpPr>
-        <p:spPr>
-          <a:xfrm>
-            <a:off x="7191375" y="3524250"/>
-            <a:ext cx="1428750" cy="342900"/>
+          <p:cNvPr id="55" name="admit-status"/>
+          <p:cNvSpPr/>
+          <p:nvPr/>
+        </p:nvSpPr>
+        <p:spPr>
+          <a:xfrm>
+            <a:off x="7734300" y="3429000"/>
+            <a:ext cx="1047750" cy="342900"/>
           </a:xfrm>
           <a:prstGeom prst="rect">
             <a:avLst/>
@@ -2719,30 +2616,30 @@
               <a:buNone/>
             </a:pPr>
             <a:r>
-              <a:rPr lang="en-US" sz="3000" b="1" dirty="0">
+              <a:rPr lang="en-US" sz="2250" b="1" dirty="0">
                 <a:solidFill>
-                  <a:srgbClr val="0F8B7A"/>
+                  <a:srgbClr val="0E7C6B"/>
                 </a:solidFill>
-                <a:latin typeface="Noto Sans" pitchFamily="34" charset="0"/>
-                <a:ea typeface="Noto Sans" pitchFamily="34" charset="-122"/>
-                <a:cs typeface="Noto Sans" pitchFamily="34" charset="-120"/>
+                <a:latin typeface="DejaVu Sans" pitchFamily="34" charset="0"/>
+                <a:ea typeface="DejaVu Sans" pitchFamily="34" charset="-122"/>
+                <a:cs typeface="DejaVu Sans" pitchFamily="34" charset="-120"/>
               </a:rPr>
               <a:t>PASS</a:t>
             </a:r>
-            <a:endParaRPr lang="en-US" sz="3000" dirty="0"/>
-          </a:p>
-        </p:txBody>
-      </p:sp>
-      <p:sp>
-        <p:nvSpPr>
-          <p:cNvPr id="60" name="label-fehling"/>
-          <p:cNvSpPr/>
-          <p:nvPr/>
-        </p:nvSpPr>
-        <p:spPr>
-          <a:xfrm>
-            <a:off x="9277350" y="3714750"/>
-            <a:ext cx="1971675" cy="419100"/>
+            <a:endParaRPr lang="en-US" sz="2250" dirty="0"/>
+          </a:p>
+        </p:txBody>
+      </p:sp>
+      <p:sp>
+        <p:nvSpPr>
+          <p:cNvPr id="56" name="label-fehling"/>
+          <p:cNvSpPr/>
+          <p:nvPr/>
+        </p:nvSpPr>
+        <p:spPr>
+          <a:xfrm>
+            <a:off x="9305925" y="3524250"/>
+            <a:ext cx="2038350" cy="419100"/>
           </a:xfrm>
           <a:prstGeom prst="rect">
             <a:avLst/>
@@ -2760,30 +2657,30 @@
               <a:buNone/>
             </a:pPr>
             <a:r>
-              <a:rPr lang="en-US" sz="3000" b="1" dirty="0">
+              <a:rPr lang="en-US" sz="2700" dirty="0">
                 <a:solidFill>
                   <a:srgbClr val="172033"/>
                 </a:solidFill>
-                <a:latin typeface="Noto Sans" pitchFamily="34" charset="0"/>
-                <a:ea typeface="Noto Sans" pitchFamily="34" charset="-122"/>
-                <a:cs typeface="Noto Sans" pitchFamily="34" charset="-120"/>
+                <a:latin typeface="DejaVu Sans" pitchFamily="34" charset="0"/>
+                <a:ea typeface="DejaVu Sans" pitchFamily="34" charset="-122"/>
+                <a:cs typeface="DejaVu Sans" pitchFamily="34" charset="-120"/>
               </a:rPr>
               <a:t>Fehling</a:t>
             </a:r>
-            <a:endParaRPr lang="en-US" sz="3000" dirty="0"/>
-          </a:p>
-        </p:txBody>
-      </p:sp>
-      <p:sp>
-        <p:nvSpPr>
-          <p:cNvPr id="61" name="label-powder"/>
-          <p:cNvSpPr/>
-          <p:nvPr/>
-        </p:nvSpPr>
-        <p:spPr>
-          <a:xfrm>
-            <a:off x="11658600" y="3714750"/>
-            <a:ext cx="1971675" cy="419100"/>
+            <a:endParaRPr lang="en-US" sz="2700" dirty="0"/>
+          </a:p>
+        </p:txBody>
+      </p:sp>
+      <p:sp>
+        <p:nvSpPr>
+          <p:cNvPr id="57" name="label-powder"/>
+          <p:cNvSpPr/>
+          <p:nvPr/>
+        </p:nvSpPr>
+        <p:spPr>
+          <a:xfrm>
+            <a:off x="11763375" y="3524250"/>
+            <a:ext cx="2038350" cy="419100"/>
           </a:xfrm>
           <a:prstGeom prst="rect">
             <a:avLst/>
@@ -2801,30 +2698,30 @@
               <a:buNone/>
             </a:pPr>
             <a:r>
-              <a:rPr lang="en-US" sz="3000" b="1" dirty="0">
+              <a:rPr lang="en-US" sz="2700" dirty="0">
                 <a:solidFill>
                   <a:srgbClr val="172033"/>
                 </a:solidFill>
-                <a:latin typeface="Noto Sans" pitchFamily="34" charset="0"/>
-                <a:ea typeface="Noto Sans" pitchFamily="34" charset="-122"/>
-                <a:cs typeface="Noto Sans" pitchFamily="34" charset="-120"/>
+                <a:latin typeface="DejaVu Sans" pitchFamily="34" charset="0"/>
+                <a:ea typeface="DejaVu Sans" pitchFamily="34" charset="-122"/>
+                <a:cs typeface="DejaVu Sans" pitchFamily="34" charset="-120"/>
               </a:rPr>
               <a:t>Powder</a:t>
             </a:r>
-            <a:endParaRPr lang="en-US" sz="3000" dirty="0"/>
-          </a:p>
-        </p:txBody>
-      </p:sp>
-      <p:sp>
-        <p:nvSpPr>
-          <p:cNvPr id="62" name="label-titration"/>
-          <p:cNvSpPr/>
-          <p:nvPr/>
-        </p:nvSpPr>
-        <p:spPr>
-          <a:xfrm>
-            <a:off x="14039850" y="3714750"/>
-            <a:ext cx="1971675" cy="419100"/>
+            <a:endParaRPr lang="en-US" sz="2700" dirty="0"/>
+          </a:p>
+        </p:txBody>
+      </p:sp>
+      <p:sp>
+        <p:nvSpPr>
+          <p:cNvPr id="58" name="label-titration"/>
+          <p:cNvSpPr/>
+          <p:nvPr/>
+        </p:nvSpPr>
+        <p:spPr>
+          <a:xfrm>
+            <a:off x="14220825" y="3524250"/>
+            <a:ext cx="2038350" cy="419100"/>
           </a:xfrm>
           <a:prstGeom prst="rect">
             <a:avLst/>
@@ -2842,30 +2739,30 @@
               <a:buNone/>
             </a:pPr>
             <a:r>
-              <a:rPr lang="en-US" sz="3000" b="1" dirty="0">
+              <a:rPr lang="en-US" sz="2700" dirty="0">
                 <a:solidFill>
                   <a:srgbClr val="172033"/>
                 </a:solidFill>
-                <a:latin typeface="Noto Sans" pitchFamily="34" charset="0"/>
-                <a:ea typeface="Noto Sans" pitchFamily="34" charset="-122"/>
-                <a:cs typeface="Noto Sans" pitchFamily="34" charset="-120"/>
+                <a:latin typeface="DejaVu Sans" pitchFamily="34" charset="0"/>
+                <a:ea typeface="DejaVu Sans" pitchFamily="34" charset="-122"/>
+                <a:cs typeface="DejaVu Sans" pitchFamily="34" charset="-120"/>
               </a:rPr>
               <a:t>Titration</a:t>
             </a:r>
-            <a:endParaRPr lang="en-US" sz="3000" dirty="0"/>
-          </a:p>
-        </p:txBody>
-      </p:sp>
-      <p:sp>
-        <p:nvSpPr>
-          <p:cNvPr id="63" name="label-oven"/>
-          <p:cNvSpPr/>
-          <p:nvPr/>
-        </p:nvSpPr>
-        <p:spPr>
-          <a:xfrm>
-            <a:off x="16421100" y="3714750"/>
-            <a:ext cx="1971675" cy="419100"/>
+            <a:endParaRPr lang="en-US" sz="2700" dirty="0"/>
+          </a:p>
+        </p:txBody>
+      </p:sp>
+      <p:sp>
+        <p:nvSpPr>
+          <p:cNvPr id="59" name="label-oven"/>
+          <p:cNvSpPr/>
+          <p:nvPr/>
+        </p:nvSpPr>
+        <p:spPr>
+          <a:xfrm>
+            <a:off x="16678275" y="3524250"/>
+            <a:ext cx="2038350" cy="419100"/>
           </a:xfrm>
           <a:prstGeom prst="rect">
             <a:avLst/>
@@ -2883,17 +2780,17 @@
               <a:buNone/>
             </a:pPr>
             <a:r>
-              <a:rPr lang="en-US" sz="3000" b="1" dirty="0">
+              <a:rPr lang="en-US" sz="2700" dirty="0">
                 <a:solidFill>
                   <a:srgbClr val="172033"/>
                 </a:solidFill>
-                <a:latin typeface="Noto Sans" pitchFamily="34" charset="0"/>
-                <a:ea typeface="Noto Sans" pitchFamily="34" charset="-122"/>
-                <a:cs typeface="Noto Sans" pitchFamily="34" charset="-120"/>
+                <a:latin typeface="DejaVu Sans" pitchFamily="34" charset="0"/>
+                <a:ea typeface="DejaVu Sans" pitchFamily="34" charset="-122"/>
+                <a:cs typeface="DejaVu Sans" pitchFamily="34" charset="-120"/>
               </a:rPr>
               <a:t>OVEN 125</a:t>
             </a:r>
-            <a:endParaRPr lang="en-US" sz="3000" dirty="0"/>
+            <a:endParaRPr lang="en-US" sz="2700" dirty="0"/>
           </a:p>
         </p:txBody>
       </p:sp>
@@ -2948,7 +2845,7 @@
     </a:clrScheme>
     <a:fontScheme name="Office">
       <a:majorFont>
-        <a:latin typeface="Noto Sans"/>
+        <a:latin typeface="DejaVu Sans"/>
         <a:ea typeface=""/>
         <a:cs typeface=""/>
         <a:font script="Jpan" typeface="游ゴシック Light"/>
@@ -3000,7 +2897,7 @@
         <a:font script="Tfng" typeface="Ebrima"/>
       </a:majorFont>
       <a:minorFont>
-        <a:latin typeface="Noto Sans"/>
+        <a:latin typeface="DejaVu Sans"/>
         <a:ea typeface=""/>
         <a:cs typeface=""/>
         <a:font script="Jpan" typeface="游ゴシック"/>

--- a/paper/venues/iclr2027/figures/lab2sim/fig1-hero.pptx
+++ b/paper/venues/iclr2027/figures/lab2sim/fig1-hero.pptx
@@ -10,8 +10,8 @@
   <p:notesMasterIdLst>
     <p:notesMasterId r:id="rId3"/>
   </p:notesMasterIdLst>
-  <p:sldSz cx="19050000" cy="4476750"/>
-  <p:notesSz cx="4476750" cy="19050000"/>
+  <p:sldSz cx="19050000" cy="6858000"/>
+  <p:notesSz cx="6858000" cy="19050000"/>
   <p:defaultTextStyle>
     <a:lvl1pPr marL="0" algn="l" defTabSz="914400" rtl="0" eaLnBrk="1" latinLnBrk="0" hangingPunct="1">
       <a:defRPr sz="1800" kern="1200">
@@ -502,7 +502,7 @@
           <a:p>
             <a:r>
               <a:rPr lang="en-US" dirty="0"/>
-              <a:t>{"spec":"lab2sim-hero.figure-spec.json","mode":"inspired","canonical":"SVG","provenance":[{"id":"prov-reference-decisions","source":"fig1-reference-audit.md","section":"Reference-led decisions","claim":"Inspired editorial hierarchy and output-gallery allocation","applies_to":["rule-headers","result-region"],"status":"verified"},{"id":"prov-pipeline","source":"../../../../../docs/design/agent-driven-asset-generation-pipeline.md","section":"Five-stage pipeline","claim":"Evidence retrieval, spec freeze, generation, and ConvertAsset admission","applies_to":["stage-retrieve","stage-spec","stage-build","stage-admit"],"status":"verified"},{"id":"prov-oven-spec","source":"../../../../../docs/design/asset-specs/ika-oven-125.md","section":"Frozen manufacturer fields","claim":"OVEN 125 identity, door articulation, and shelf count","applies_to":["spec-body"],"status":"verified"},{"id":"prov-input-photo","source":"../../../../../external_artifacts/asset_evidence/ika-oven-125/image1.png","section":"Multimodal image request","claim":"Manufacturer photograph of IKA OVEN 125","applies_to":["input-catalog-photo"],"status":"user-provided"},{"id":"prov-fehling-r10","source":"../../../../../outputs/lab2sim_fig1_retake_20260917/fehling_r10/t30_hero_tabletop.png","section":"Figure 1 current-delivery scenes","claim":"Camera-only render of the Fehling r10 retained t30 scene state","applies_to":["scene-fehling"],"status":"verified"},{"id":"prov-powder-r4","source":"../../../../../outputs/task09_powder_bottle_r4_20260911/video/close_0960.png","section":"Figure 1 current-delivery scenes","claim":"Powder r4 observed-state replay with the HUD removed by a documented crop","applies_to":["scene-powder"],"status":"verified"},{"id":"prov-titration-r17","source":"../../../../../outputs/scientific_workbench_traditional_acid_base_titration_vr_r1_7_20260908/handoff/scientific_workbench_traditional_acid_base_titration_vr_r1_7/evidence/initial_scene/after_end_scale_scene_overview.png","section":"Figure 1 current-delivery scenes","claim":"Titration r1.7 endpoint scene overview","applies_to":["scene-titration"],"status":"verified"},{"id":"prov-oven-r2","source":"../../../../../outputs/scientific_workbench_task12_oven_unload_dual_glassware_vr_r2_20260904/handoff/scientific_workbench_task12_oven_unload_dual_glassware_vr_r2/evidence/initial_scene/open_oven_station.png","section":"Figure 1 current-delivery scenes","claim":"OVEN r2 open-door station with dual glassware","applies_to":["scene-oven"],"status":"verified"}],"limitations":"PptxGenJS uses editable native panels, text, and segmented connectors; rounded SVG connector geometry may differ from the canonical SVG."}</a:t>
+              <a:t>{"spec":"lab2sim-hero.figure-spec.json","mode":"inspired","canonical":"SVG","provenance":[{"id":"prov-reference-decisions","source":"fig1-reference-audit.md","section":"Reference-led decisions","claim":"Inspired editorial hierarchy and output-gallery allocation","applies_to":["rule-headers","result-region"],"status":"verified"},{"id":"prov-pipeline","source":"../../../../../docs/design/agent-driven-asset-generation-pipeline.md","section":"Five-stage pipeline","claim":"Evidence retrieval, spec freeze, generation, and ConvertAsset admission","applies_to":["stage-retrieve","stage-spec","stage-build","stage-admit"],"status":"verified"},{"id":"prov-oven-spec","source":"../../../../../docs/design/asset-specs/ika-oven-125.md","section":"Frozen manufacturer fields","claim":"OVEN 125 identity, door articulation, and shelf count","applies_to":["spec-body"],"status":"verified"},{"id":"prov-input-photo","source":"../../../../../external_artifacts/asset_evidence/ika-oven-125/image1.png","section":"Multimodal image request","claim":"Manufacturer photograph of IKA OVEN 125","applies_to":["input-catalog-photo"],"status":"user-provided"},{"id":"prov-search-evidence","source":"../../../../../external_artifacts/asset_evidence/ika-oven-125/image2.png","section":"Search step manufacturer evidence","claim":"Open-door catalog photograph supporting the door articulation and shelf-count fields","applies_to":["search-evidence-image"],"status":"user-provided"},{"id":"prov-build-usd","source":"../../../../../outputs/lab2sim_fig3_retake_20260917/oven_r2/hero_open_threequarter.png","section":"Build step articulated USD","claim":"Camera-only retake of the admitted OVEN r2 USD scene, matched to the catalog viewpoint","applies_to":["build-usd-image"],"status":"verified"},{"id":"prov-fehling-r10","source":"../../../../../outputs/lab2sim_fig1_retake_20260917/fehling_r10/t30_hero_tabletop.png","section":"Figure 1 current-delivery scenes","claim":"Camera-only render of the Fehling r10 retained t30 scene state","applies_to":["scene-fehling"],"status":"verified"},{"id":"prov-powder-r4","source":"../../../../../outputs/task09_powder_bottle_r4_20260911/video/close_0960.png","section":"Figure 1 current-delivery scenes","claim":"Powder r4 observed-state replay with the HUD removed by a documented crop","applies_to":["scene-powder"],"status":"verified"},{"id":"prov-titration-r17","source":"../../../../../outputs/scientific_workbench_traditional_acid_base_titration_vr_r1_7_20260908/handoff/scientific_workbench_traditional_acid_base_titration_vr_r1_7/evidence/initial_scene/after_end_scale_scene_overview.png","section":"Figure 1 current-delivery scenes","claim":"Titration r1.7 endpoint scene overview","applies_to":["scene-titration"],"status":"verified"},{"id":"prov-oven-r2","source":"../../../../../outputs/scientific_workbench_task12_oven_unload_dual_glassware_vr_r2_20260904/handoff/scientific_workbench_task12_oven_unload_dual_glassware_vr_r2/evidence/initial_scene/open_oven_station.png","section":"Figure 1 current-delivery scenes","claim":"OVEN r2 open-door station with dual glassware","applies_to":["scene-oven"],"status":"verified"}],"limitations":"PptxGenJS uses editable native panels, text, and segmented connectors; rounded SVG connector geometry may differ from the canonical SVG."}</a:t>
             </a:r>
             <a:endParaRPr lang="en-US" dirty="0"/>
           </a:p>
@@ -883,8 +883,8 @@
         </p:nvSpPr>
         <p:spPr>
           <a:xfrm>
-            <a:off x="2476500" y="3048000"/>
-            <a:ext cx="142875" cy="0"/>
+            <a:off x="2743200" y="4000500"/>
+            <a:ext cx="209550" cy="0"/>
           </a:xfrm>
           <a:prstGeom prst="line">
             <a:avLst/>
@@ -902,13 +902,13 @@
       </p:sp>
       <p:sp>
         <p:nvSpPr>
-          <p:cNvPr id="3" name="retrieve-to-spec-segment-1"/>
-          <p:cNvSpPr/>
-          <p:nvPr/>
-        </p:nvSpPr>
-        <p:spPr>
-          <a:xfrm>
-            <a:off x="4095750" y="3048000"/>
+          <p:cNvPr id="3" name="admit-to-results-segment-1"/>
+          <p:cNvSpPr/>
+          <p:nvPr/>
+        </p:nvSpPr>
+        <p:spPr>
+          <a:xfrm>
+            <a:off x="11106150" y="4000500"/>
             <a:ext cx="190500" cy="0"/>
           </a:xfrm>
           <a:prstGeom prst="line">
@@ -927,89 +927,14 @@
       </p:sp>
       <p:sp>
         <p:nvSpPr>
-          <p:cNvPr id="4" name="spec-to-build-segment-1"/>
-          <p:cNvSpPr/>
-          <p:nvPr/>
-        </p:nvSpPr>
-        <p:spPr>
-          <a:xfrm>
-            <a:off x="6096000" y="3048000"/>
-            <a:ext cx="190500" cy="0"/>
-          </a:xfrm>
-          <a:prstGeom prst="line">
-            <a:avLst/>
-          </a:prstGeom>
-          <a:noFill/>
-          <a:ln w="38100">
-            <a:solidFill>
-              <a:srgbClr val="3F4855"/>
-            </a:solidFill>
-            <a:prstDash val="solid"/>
-            <a:headEnd type="none"/>
-            <a:tailEnd type="triangle"/>
-          </a:ln>
-        </p:spPr>
-      </p:sp>
-      <p:sp>
-        <p:nvSpPr>
-          <p:cNvPr id="5" name="build-to-admit-segment-1"/>
-          <p:cNvSpPr/>
-          <p:nvPr/>
-        </p:nvSpPr>
-        <p:spPr>
-          <a:xfrm>
-            <a:off x="7381875" y="3048000"/>
-            <a:ext cx="190500" cy="0"/>
-          </a:xfrm>
-          <a:prstGeom prst="line">
-            <a:avLst/>
-          </a:prstGeom>
-          <a:noFill/>
-          <a:ln w="38100">
-            <a:solidFill>
-              <a:srgbClr val="3F4855"/>
-            </a:solidFill>
-            <a:prstDash val="solid"/>
-            <a:headEnd type="none"/>
-            <a:tailEnd type="triangle"/>
-          </a:ln>
-        </p:spPr>
-      </p:sp>
-      <p:sp>
-        <p:nvSpPr>
-          <p:cNvPr id="6" name="admit-to-results-segment-1"/>
-          <p:cNvSpPr/>
-          <p:nvPr/>
-        </p:nvSpPr>
-        <p:spPr>
-          <a:xfrm>
-            <a:off x="8953500" y="3048000"/>
-            <a:ext cx="190500" cy="0"/>
-          </a:xfrm>
-          <a:prstGeom prst="line">
-            <a:avLst/>
-          </a:prstGeom>
-          <a:noFill/>
-          <a:ln w="38100">
-            <a:solidFill>
-              <a:srgbClr val="3F4855"/>
-            </a:solidFill>
-            <a:prstDash val="solid"/>
-            <a:headEnd type="none"/>
-            <a:tailEnd type="triangle"/>
-          </a:ln>
-        </p:spPr>
-      </p:sp>
-      <p:sp>
-        <p:nvSpPr>
-          <p:cNvPr id="7" name="rule-headers"/>
-          <p:cNvSpPr/>
-          <p:nvPr/>
-        </p:nvSpPr>
-        <p:spPr>
-          <a:xfrm>
-            <a:off x="238125" y="800100"/>
-            <a:ext cx="18573750" cy="28575"/>
+          <p:cNvPr id="4" name="rule-headers"/>
+          <p:cNvSpPr/>
+          <p:nvPr/>
+        </p:nvSpPr>
+        <p:spPr>
+          <a:xfrm>
+            <a:off x="304800" y="952500"/>
+            <a:ext cx="18440400" cy="19050"/>
           </a:xfrm>
           <a:prstGeom prst="roundRect">
             <a:avLst/>
@@ -1017,7 +942,7 @@
           <a:solidFill>
             <a:srgbClr val="C5CFDA"/>
           </a:solidFill>
-          <a:ln w="28575">
+          <a:ln w="19050">
             <a:solidFill>
               <a:srgbClr val="C5CFDA"/>
             </a:solidFill>
@@ -1027,14 +952,14 @@
       </p:sp>
       <p:sp>
         <p:nvSpPr>
-          <p:cNvPr id="8" name="rule-headers-title"/>
-          <p:cNvSpPr/>
-          <p:nvPr/>
-        </p:nvSpPr>
-        <p:spPr>
-          <a:xfrm>
-            <a:off x="409575" y="876300"/>
-            <a:ext cx="18230850" cy="356235"/>
+          <p:cNvPr id="5" name="rule-headers-title"/>
+          <p:cNvSpPr/>
+          <p:nvPr/>
+        </p:nvSpPr>
+        <p:spPr>
+          <a:xfrm>
+            <a:off x="476250" y="1028700"/>
+            <a:ext cx="18097500" cy="356235"/>
           </a:xfrm>
           <a:prstGeom prst="rect">
             <a:avLst/>
@@ -1057,22 +982,22 @@
       </p:sp>
       <p:sp>
         <p:nvSpPr>
-          <p:cNvPr id="9" name="input-evidence"/>
-          <p:cNvSpPr/>
-          <p:nvPr/>
-        </p:nvSpPr>
-        <p:spPr>
-          <a:xfrm>
-            <a:off x="238125" y="1619250"/>
-            <a:ext cx="2238375" cy="2476500"/>
+          <p:cNvPr id="6" name="agent-band"/>
+          <p:cNvSpPr/>
+          <p:nvPr/>
+        </p:nvSpPr>
+        <p:spPr>
+          <a:xfrm>
+            <a:off x="3009900" y="1333500"/>
+            <a:ext cx="8039100" cy="5143500"/>
           </a:xfrm>
           <a:prstGeom prst="roundRect">
             <a:avLst/>
           </a:prstGeom>
           <a:solidFill>
-            <a:srgbClr val="FFFFFF"/>
-          </a:solidFill>
-          <a:ln w="28575">
+            <a:srgbClr val="F5F7FA"/>
+          </a:solidFill>
+          <a:ln w="19050">
             <a:solidFill>
               <a:srgbClr val="C5CFDA"/>
             </a:solidFill>
@@ -1082,14 +1007,14 @@
       </p:sp>
       <p:sp>
         <p:nvSpPr>
-          <p:cNvPr id="10" name="input-evidence-title"/>
-          <p:cNvSpPr/>
-          <p:nvPr/>
-        </p:nvSpPr>
-        <p:spPr>
-          <a:xfrm>
-            <a:off x="409575" y="1695450"/>
-            <a:ext cx="1895475" cy="356235"/>
+          <p:cNvPr id="7" name="agent-band-title"/>
+          <p:cNvSpPr/>
+          <p:nvPr/>
+        </p:nvSpPr>
+        <p:spPr>
+          <a:xfrm>
+            <a:off x="3181350" y="1409700"/>
+            <a:ext cx="7696200" cy="356235"/>
           </a:xfrm>
           <a:prstGeom prst="rect">
             <a:avLst/>
@@ -1112,14 +1037,14 @@
       </p:sp>
       <p:sp>
         <p:nvSpPr>
-          <p:cNvPr id="11" name="stage-retrieve"/>
-          <p:cNvSpPr/>
-          <p:nvPr/>
-        </p:nvSpPr>
-        <p:spPr>
-          <a:xfrm>
-            <a:off x="2619375" y="1619250"/>
-            <a:ext cx="1476375" cy="2476500"/>
+          <p:cNvPr id="8" name="result-region"/>
+          <p:cNvSpPr/>
+          <p:nvPr/>
+        </p:nvSpPr>
+        <p:spPr>
+          <a:xfrm>
+            <a:off x="11334750" y="1143000"/>
+            <a:ext cx="7410450" cy="5524500"/>
           </a:xfrm>
           <a:prstGeom prst="roundRect">
             <a:avLst/>
@@ -1127,7 +1052,282 @@
           <a:solidFill>
             <a:srgbClr val="FFFFFF"/>
           </a:solidFill>
-          <a:ln w="28575">
+          <a:ln w="19050">
+            <a:solidFill>
+              <a:srgbClr val="FFFFFF"/>
+            </a:solidFill>
+            <a:prstDash val="solid"/>
+          </a:ln>
+        </p:spPr>
+      </p:sp>
+      <p:sp>
+        <p:nvSpPr>
+          <p:cNvPr id="9" name="result-region-title"/>
+          <p:cNvSpPr/>
+          <p:nvPr/>
+        </p:nvSpPr>
+        <p:spPr>
+          <a:xfrm>
+            <a:off x="11506200" y="1219200"/>
+            <a:ext cx="7067550" cy="356235"/>
+          </a:xfrm>
+          <a:prstGeom prst="rect">
+            <a:avLst/>
+          </a:prstGeom>
+          <a:noFill/>
+          <a:ln/>
+        </p:spPr>
+        <p:txBody>
+          <a:bodyPr wrap="square" lIns="0" tIns="0" rIns="0" bIns="0" rtlCol="0" anchor="ctr">
+            <a:normAutofit/>
+          </a:bodyPr>
+          <a:lstStyle/>
+          <a:p>
+            <a:pPr indent="0" marL="0">
+              <a:buNone/>
+            </a:pPr>
+            <a:endParaRPr lang="en-US" sz="1650" dirty="0"/>
+          </a:p>
+        </p:txBody>
+      </p:sp>
+      <p:sp>
+        <p:nvSpPr>
+          <p:cNvPr id="10" name="stage-retrieve"/>
+          <p:cNvSpPr/>
+          <p:nvPr/>
+        </p:nvSpPr>
+        <p:spPr>
+          <a:xfrm>
+            <a:off x="3929063" y="1828800"/>
+            <a:ext cx="381000" cy="381000"/>
+          </a:xfrm>
+          <a:prstGeom prst="roundRect">
+            <a:avLst/>
+          </a:prstGeom>
+          <a:solidFill>
+            <a:srgbClr val="0E7C6B"/>
+          </a:solidFill>
+          <a:ln w="19050">
+            <a:solidFill>
+              <a:srgbClr val="0E7C6B"/>
+            </a:solidFill>
+            <a:prstDash val="solid"/>
+          </a:ln>
+        </p:spPr>
+      </p:sp>
+      <p:sp>
+        <p:nvSpPr>
+          <p:cNvPr id="11" name="stage-retrieve-title"/>
+          <p:cNvSpPr/>
+          <p:nvPr/>
+        </p:nvSpPr>
+        <p:spPr>
+          <a:xfrm>
+            <a:off x="4100513" y="1905000"/>
+            <a:ext cx="38100" cy="194310"/>
+          </a:xfrm>
+          <a:prstGeom prst="rect">
+            <a:avLst/>
+          </a:prstGeom>
+          <a:noFill/>
+          <a:ln/>
+        </p:spPr>
+        <p:txBody>
+          <a:bodyPr wrap="square" lIns="0" tIns="0" rIns="0" bIns="0" rtlCol="0" anchor="ctr">
+            <a:normAutofit/>
+          </a:bodyPr>
+          <a:lstStyle/>
+          <a:p>
+            <a:pPr indent="0" marL="0">
+              <a:buNone/>
+            </a:pPr>
+            <a:endParaRPr lang="en-US" sz="900" dirty="0"/>
+          </a:p>
+        </p:txBody>
+      </p:sp>
+      <p:sp>
+        <p:nvSpPr>
+          <p:cNvPr id="12" name="stage-spec"/>
+          <p:cNvSpPr/>
+          <p:nvPr/>
+        </p:nvSpPr>
+        <p:spPr>
+          <a:xfrm>
+            <a:off x="5910263" y="1828800"/>
+            <a:ext cx="381000" cy="381000"/>
+          </a:xfrm>
+          <a:prstGeom prst="roundRect">
+            <a:avLst/>
+          </a:prstGeom>
+          <a:solidFill>
+            <a:srgbClr val="0E7C6B"/>
+          </a:solidFill>
+          <a:ln w="19050">
+            <a:solidFill>
+              <a:srgbClr val="0E7C6B"/>
+            </a:solidFill>
+            <a:prstDash val="solid"/>
+          </a:ln>
+        </p:spPr>
+      </p:sp>
+      <p:sp>
+        <p:nvSpPr>
+          <p:cNvPr id="13" name="stage-spec-title"/>
+          <p:cNvSpPr/>
+          <p:nvPr/>
+        </p:nvSpPr>
+        <p:spPr>
+          <a:xfrm>
+            <a:off x="6081713" y="1905000"/>
+            <a:ext cx="38100" cy="194310"/>
+          </a:xfrm>
+          <a:prstGeom prst="rect">
+            <a:avLst/>
+          </a:prstGeom>
+          <a:noFill/>
+          <a:ln/>
+        </p:spPr>
+        <p:txBody>
+          <a:bodyPr wrap="square" lIns="0" tIns="0" rIns="0" bIns="0" rtlCol="0" anchor="ctr">
+            <a:normAutofit/>
+          </a:bodyPr>
+          <a:lstStyle/>
+          <a:p>
+            <a:pPr indent="0" marL="0">
+              <a:buNone/>
+            </a:pPr>
+            <a:endParaRPr lang="en-US" sz="900" dirty="0"/>
+          </a:p>
+        </p:txBody>
+      </p:sp>
+      <p:sp>
+        <p:nvSpPr>
+          <p:cNvPr id="14" name="stage-build"/>
+          <p:cNvSpPr/>
+          <p:nvPr/>
+        </p:nvSpPr>
+        <p:spPr>
+          <a:xfrm>
+            <a:off x="7815263" y="1828800"/>
+            <a:ext cx="381000" cy="381000"/>
+          </a:xfrm>
+          <a:prstGeom prst="roundRect">
+            <a:avLst/>
+          </a:prstGeom>
+          <a:solidFill>
+            <a:srgbClr val="0E7C6B"/>
+          </a:solidFill>
+          <a:ln w="19050">
+            <a:solidFill>
+              <a:srgbClr val="0E7C6B"/>
+            </a:solidFill>
+            <a:prstDash val="solid"/>
+          </a:ln>
+        </p:spPr>
+      </p:sp>
+      <p:sp>
+        <p:nvSpPr>
+          <p:cNvPr id="15" name="stage-build-title"/>
+          <p:cNvSpPr/>
+          <p:nvPr/>
+        </p:nvSpPr>
+        <p:spPr>
+          <a:xfrm>
+            <a:off x="7986713" y="1905000"/>
+            <a:ext cx="38100" cy="194310"/>
+          </a:xfrm>
+          <a:prstGeom prst="rect">
+            <a:avLst/>
+          </a:prstGeom>
+          <a:noFill/>
+          <a:ln/>
+        </p:spPr>
+        <p:txBody>
+          <a:bodyPr wrap="square" lIns="0" tIns="0" rIns="0" bIns="0" rtlCol="0" anchor="ctr">
+            <a:normAutofit/>
+          </a:bodyPr>
+          <a:lstStyle/>
+          <a:p>
+            <a:pPr indent="0" marL="0">
+              <a:buNone/>
+            </a:pPr>
+            <a:endParaRPr lang="en-US" sz="900" dirty="0"/>
+          </a:p>
+        </p:txBody>
+      </p:sp>
+      <p:sp>
+        <p:nvSpPr>
+          <p:cNvPr id="16" name="stage-admit"/>
+          <p:cNvSpPr/>
+          <p:nvPr/>
+        </p:nvSpPr>
+        <p:spPr>
+          <a:xfrm>
+            <a:off x="9729788" y="1828800"/>
+            <a:ext cx="381000" cy="381000"/>
+          </a:xfrm>
+          <a:prstGeom prst="roundRect">
+            <a:avLst/>
+          </a:prstGeom>
+          <a:solidFill>
+            <a:srgbClr val="0E7C6B"/>
+          </a:solidFill>
+          <a:ln w="19050">
+            <a:solidFill>
+              <a:srgbClr val="0E7C6B"/>
+            </a:solidFill>
+            <a:prstDash val="solid"/>
+          </a:ln>
+        </p:spPr>
+      </p:sp>
+      <p:sp>
+        <p:nvSpPr>
+          <p:cNvPr id="17" name="stage-admit-title"/>
+          <p:cNvSpPr/>
+          <p:nvPr/>
+        </p:nvSpPr>
+        <p:spPr>
+          <a:xfrm>
+            <a:off x="9901238" y="1905000"/>
+            <a:ext cx="38100" cy="194310"/>
+          </a:xfrm>
+          <a:prstGeom prst="rect">
+            <a:avLst/>
+          </a:prstGeom>
+          <a:noFill/>
+          <a:ln/>
+        </p:spPr>
+        <p:txBody>
+          <a:bodyPr wrap="square" lIns="0" tIns="0" rIns="0" bIns="0" rtlCol="0" anchor="ctr">
+            <a:normAutofit/>
+          </a:bodyPr>
+          <a:lstStyle/>
+          <a:p>
+            <a:pPr indent="0" marL="0">
+              <a:buNone/>
+            </a:pPr>
+            <a:endParaRPr lang="en-US" sz="900" dirty="0"/>
+          </a:p>
+        </p:txBody>
+      </p:sp>
+      <p:sp>
+        <p:nvSpPr>
+          <p:cNvPr id="18" name="search-evidence-card"/>
+          <p:cNvSpPr/>
+          <p:nvPr/>
+        </p:nvSpPr>
+        <p:spPr>
+          <a:xfrm>
+            <a:off x="3309938" y="3190875"/>
+            <a:ext cx="1619250" cy="1619250"/>
+          </a:xfrm>
+          <a:prstGeom prst="roundRect">
+            <a:avLst/>
+          </a:prstGeom>
+          <a:solidFill>
+            <a:srgbClr val="FFFFFF"/>
+          </a:solidFill>
+          <a:ln w="19050">
             <a:solidFill>
               <a:srgbClr val="C5CFDA"/>
             </a:solidFill>
@@ -1137,14 +1337,14 @@
       </p:sp>
       <p:sp>
         <p:nvSpPr>
-          <p:cNvPr id="12" name="stage-retrieve-title"/>
-          <p:cNvSpPr/>
-          <p:nvPr/>
-        </p:nvSpPr>
-        <p:spPr>
-          <a:xfrm>
-            <a:off x="2790825" y="1695450"/>
-            <a:ext cx="1133475" cy="647700"/>
+          <p:cNvPr id="19" name="search-evidence-card-title"/>
+          <p:cNvSpPr/>
+          <p:nvPr/>
+        </p:nvSpPr>
+        <p:spPr>
+          <a:xfrm>
+            <a:off x="3481388" y="3267075"/>
+            <a:ext cx="1276350" cy="356235"/>
           </a:xfrm>
           <a:prstGeom prst="rect">
             <a:avLst/>
@@ -1161,20 +1361,20 @@
             <a:pPr indent="0" marL="0">
               <a:buNone/>
             </a:pPr>
-            <a:endParaRPr lang="en-US" sz="3000" dirty="0"/>
-          </a:p>
-        </p:txBody>
-      </p:sp>
-      <p:sp>
-        <p:nvSpPr>
-          <p:cNvPr id="13" name="stage-spec"/>
-          <p:cNvSpPr/>
-          <p:nvPr/>
-        </p:nvSpPr>
-        <p:spPr>
-          <a:xfrm>
-            <a:off x="4286250" y="1619250"/>
-            <a:ext cx="1809750" cy="2476500"/>
+            <a:endParaRPr lang="en-US" sz="1650" dirty="0"/>
+          </a:p>
+        </p:txBody>
+      </p:sp>
+      <p:sp>
+        <p:nvSpPr>
+          <p:cNvPr id="20" name="spec-card"/>
+          <p:cNvSpPr/>
+          <p:nvPr/>
+        </p:nvSpPr>
+        <p:spPr>
+          <a:xfrm>
+            <a:off x="5210175" y="3238500"/>
+            <a:ext cx="1781175" cy="1524000"/>
           </a:xfrm>
           <a:prstGeom prst="roundRect">
             <a:avLst/>
@@ -1182,7 +1382,7 @@
           <a:solidFill>
             <a:srgbClr val="FFF8EE"/>
           </a:solidFill>
-          <a:ln w="38100">
+          <a:ln w="28575">
             <a:solidFill>
               <a:srgbClr val="C96A0A"/>
             </a:solidFill>
@@ -1192,14 +1392,14 @@
       </p:sp>
       <p:sp>
         <p:nvSpPr>
-          <p:cNvPr id="14" name="stage-spec-title"/>
-          <p:cNvSpPr/>
-          <p:nvPr/>
-        </p:nvSpPr>
-        <p:spPr>
-          <a:xfrm>
-            <a:off x="4457700" y="1695450"/>
-            <a:ext cx="1466850" cy="647700"/>
+          <p:cNvPr id="21" name="spec-card-title"/>
+          <p:cNvSpPr/>
+          <p:nvPr/>
+        </p:nvSpPr>
+        <p:spPr>
+          <a:xfrm>
+            <a:off x="5381625" y="3314700"/>
+            <a:ext cx="1438275" cy="356235"/>
           </a:xfrm>
           <a:prstGeom prst="rect">
             <a:avLst/>
@@ -1216,20 +1416,20 @@
             <a:pPr indent="0" marL="0">
               <a:buNone/>
             </a:pPr>
-            <a:endParaRPr lang="en-US" sz="3000" dirty="0"/>
-          </a:p>
-        </p:txBody>
-      </p:sp>
-      <p:sp>
-        <p:nvSpPr>
-          <p:cNvPr id="15" name="stage-build"/>
-          <p:cNvSpPr/>
-          <p:nvPr/>
-        </p:nvSpPr>
-        <p:spPr>
-          <a:xfrm>
-            <a:off x="6286500" y="1619250"/>
-            <a:ext cx="1095375" cy="2476500"/>
+            <a:endParaRPr lang="en-US" sz="1650" dirty="0"/>
+          </a:p>
+        </p:txBody>
+      </p:sp>
+      <p:sp>
+        <p:nvSpPr>
+          <p:cNvPr id="22" name="build-usd-frame"/>
+          <p:cNvSpPr/>
+          <p:nvPr/>
+        </p:nvSpPr>
+        <p:spPr>
+          <a:xfrm>
+            <a:off x="7224713" y="3319463"/>
+            <a:ext cx="1562100" cy="1362075"/>
           </a:xfrm>
           <a:prstGeom prst="roundRect">
             <a:avLst/>
@@ -1237,7 +1437,7 @@
           <a:solidFill>
             <a:srgbClr val="FFFFFF"/>
           </a:solidFill>
-          <a:ln w="28575">
+          <a:ln w="19050">
             <a:solidFill>
               <a:srgbClr val="C5CFDA"/>
             </a:solidFill>
@@ -1247,14 +1447,14 @@
       </p:sp>
       <p:sp>
         <p:nvSpPr>
-          <p:cNvPr id="16" name="stage-build-title"/>
-          <p:cNvSpPr/>
-          <p:nvPr/>
-        </p:nvSpPr>
-        <p:spPr>
-          <a:xfrm>
-            <a:off x="6457950" y="1695450"/>
-            <a:ext cx="752475" cy="647700"/>
+          <p:cNvPr id="23" name="build-usd-frame-title"/>
+          <p:cNvSpPr/>
+          <p:nvPr/>
+        </p:nvSpPr>
+        <p:spPr>
+          <a:xfrm>
+            <a:off x="7396162" y="3395663"/>
+            <a:ext cx="1219200" cy="356235"/>
           </a:xfrm>
           <a:prstGeom prst="rect">
             <a:avLst/>
@@ -1271,75 +1471,20 @@
             <a:pPr indent="0" marL="0">
               <a:buNone/>
             </a:pPr>
-            <a:endParaRPr lang="en-US" sz="3000" dirty="0"/>
-          </a:p>
-        </p:txBody>
-      </p:sp>
-      <p:sp>
-        <p:nvSpPr>
-          <p:cNvPr id="17" name="stage-admit"/>
-          <p:cNvSpPr/>
-          <p:nvPr/>
-        </p:nvSpPr>
-        <p:spPr>
-          <a:xfrm>
-            <a:off x="7572375" y="1619250"/>
-            <a:ext cx="1381125" cy="2476500"/>
-          </a:xfrm>
-          <a:prstGeom prst="roundRect">
-            <a:avLst/>
-          </a:prstGeom>
-          <a:solidFill>
-            <a:srgbClr val="FFFFFF"/>
-          </a:solidFill>
-          <a:ln w="28575">
-            <a:solidFill>
-              <a:srgbClr val="C5CFDA"/>
-            </a:solidFill>
-            <a:prstDash val="solid"/>
-          </a:ln>
-        </p:spPr>
-      </p:sp>
-      <p:sp>
-        <p:nvSpPr>
-          <p:cNvPr id="18" name="stage-admit-title"/>
-          <p:cNvSpPr/>
-          <p:nvPr/>
-        </p:nvSpPr>
-        <p:spPr>
-          <a:xfrm>
-            <a:off x="7743825" y="1695450"/>
-            <a:ext cx="1038225" cy="647700"/>
-          </a:xfrm>
-          <a:prstGeom prst="rect">
-            <a:avLst/>
-          </a:prstGeom>
-          <a:noFill/>
-          <a:ln/>
-        </p:spPr>
-        <p:txBody>
-          <a:bodyPr wrap="square" lIns="0" tIns="0" rIns="0" bIns="0" rtlCol="0" anchor="ctr">
-            <a:normAutofit/>
-          </a:bodyPr>
-          <a:lstStyle/>
-          <a:p>
-            <a:pPr indent="0" marL="0">
-              <a:buNone/>
-            </a:pPr>
-            <a:endParaRPr lang="en-US" sz="3000" dirty="0"/>
-          </a:p>
-        </p:txBody>
-      </p:sp>
-      <p:sp>
-        <p:nvSpPr>
-          <p:cNvPr id="19" name="admit-pass-badge"/>
-          <p:cNvSpPr/>
-          <p:nvPr/>
-        </p:nvSpPr>
-        <p:spPr>
-          <a:xfrm>
-            <a:off x="7734300" y="3429000"/>
-            <a:ext cx="1047750" cy="342900"/>
+            <a:endParaRPr lang="en-US" sz="1650" dirty="0"/>
+          </a:p>
+        </p:txBody>
+      </p:sp>
+      <p:sp>
+        <p:nvSpPr>
+          <p:cNvPr id="24" name="admit-pass-badge"/>
+          <p:cNvSpPr/>
+          <p:nvPr/>
+        </p:nvSpPr>
+        <p:spPr>
+          <a:xfrm>
+            <a:off x="9348788" y="3790950"/>
+            <a:ext cx="1143000" cy="419100"/>
           </a:xfrm>
           <a:prstGeom prst="roundRect">
             <a:avLst/>
@@ -1357,14 +1502,14 @@
       </p:sp>
       <p:sp>
         <p:nvSpPr>
-          <p:cNvPr id="20" name="admit-pass-badge-title"/>
-          <p:cNvSpPr/>
-          <p:nvPr/>
-        </p:nvSpPr>
-        <p:spPr>
-          <a:xfrm>
-            <a:off x="7905750" y="3505200"/>
-            <a:ext cx="704850" cy="356235"/>
+          <p:cNvPr id="25" name="admit-pass-badge-title"/>
+          <p:cNvSpPr/>
+          <p:nvPr/>
+        </p:nvSpPr>
+        <p:spPr>
+          <a:xfrm>
+            <a:off x="9520238" y="3867150"/>
+            <a:ext cx="800100" cy="356235"/>
           </a:xfrm>
           <a:prstGeom prst="rect">
             <a:avLst/>
@@ -1387,14 +1532,14 @@
       </p:sp>
       <p:sp>
         <p:nvSpPr>
-          <p:cNvPr id="21" name="result-region"/>
-          <p:cNvSpPr/>
-          <p:nvPr/>
-        </p:nvSpPr>
-        <p:spPr>
-          <a:xfrm>
-            <a:off x="9172575" y="990600"/>
-            <a:ext cx="9658350" cy="3200400"/>
+          <p:cNvPr id="26" name="request-photo-frame"/>
+          <p:cNvSpPr/>
+          <p:nvPr/>
+        </p:nvSpPr>
+        <p:spPr>
+          <a:xfrm>
+            <a:off x="304800" y="3162300"/>
+            <a:ext cx="2381250" cy="2381250"/>
           </a:xfrm>
           <a:prstGeom prst="roundRect">
             <a:avLst/>
@@ -1402,62 +1547,7 @@
           <a:solidFill>
             <a:srgbClr val="FFFFFF"/>
           </a:solidFill>
-          <a:ln w="28575">
-            <a:solidFill>
-              <a:srgbClr val="FFFFFF"/>
-            </a:solidFill>
-            <a:prstDash val="solid"/>
-          </a:ln>
-        </p:spPr>
-      </p:sp>
-      <p:sp>
-        <p:nvSpPr>
-          <p:cNvPr id="22" name="result-region-title"/>
-          <p:cNvSpPr/>
-          <p:nvPr/>
-        </p:nvSpPr>
-        <p:spPr>
-          <a:xfrm>
-            <a:off x="9344025" y="1066800"/>
-            <a:ext cx="9315450" cy="356235"/>
-          </a:xfrm>
-          <a:prstGeom prst="rect">
-            <a:avLst/>
-          </a:prstGeom>
-          <a:noFill/>
-          <a:ln/>
-        </p:spPr>
-        <p:txBody>
-          <a:bodyPr wrap="square" lIns="0" tIns="0" rIns="0" bIns="0" rtlCol="0" anchor="ctr">
-            <a:normAutofit/>
-          </a:bodyPr>
-          <a:lstStyle/>
-          <a:p>
-            <a:pPr indent="0" marL="0">
-              <a:buNone/>
-            </a:pPr>
-            <a:endParaRPr lang="en-US" sz="1650" dirty="0"/>
-          </a:p>
-        </p:txBody>
-      </p:sp>
-      <p:sp>
-        <p:nvSpPr>
-          <p:cNvPr id="23" name="result-fehling"/>
-          <p:cNvSpPr/>
-          <p:nvPr/>
-        </p:nvSpPr>
-        <p:spPr>
-          <a:xfrm>
-            <a:off x="9191625" y="1619250"/>
-            <a:ext cx="2266950" cy="2476500"/>
-          </a:xfrm>
-          <a:prstGeom prst="roundRect">
-            <a:avLst/>
-          </a:prstGeom>
-          <a:solidFill>
-            <a:srgbClr val="FFFFFF"/>
-          </a:solidFill>
-          <a:ln w="28575">
+          <a:ln w="19050">
             <a:solidFill>
               <a:srgbClr val="C5CFDA"/>
             </a:solidFill>
@@ -1467,14 +1557,14 @@
       </p:sp>
       <p:sp>
         <p:nvSpPr>
-          <p:cNvPr id="24" name="result-fehling-title"/>
-          <p:cNvSpPr/>
-          <p:nvPr/>
-        </p:nvSpPr>
-        <p:spPr>
-          <a:xfrm>
-            <a:off x="9363075" y="1695450"/>
-            <a:ext cx="1924050" cy="356235"/>
+          <p:cNvPr id="27" name="request-photo-frame-title"/>
+          <p:cNvSpPr/>
+          <p:nvPr/>
+        </p:nvSpPr>
+        <p:spPr>
+          <a:xfrm>
+            <a:off x="476250" y="3238500"/>
+            <a:ext cx="2038350" cy="356235"/>
           </a:xfrm>
           <a:prstGeom prst="rect">
             <a:avLst/>
@@ -1497,14 +1587,14 @@
       </p:sp>
       <p:sp>
         <p:nvSpPr>
-          <p:cNvPr id="25" name="result-powder"/>
-          <p:cNvSpPr/>
-          <p:nvPr/>
-        </p:nvSpPr>
-        <p:spPr>
-          <a:xfrm>
-            <a:off x="11649075" y="1619250"/>
-            <a:ext cx="2266950" cy="2476500"/>
+          <p:cNvPr id="28" name="chip-text"/>
+          <p:cNvSpPr/>
+          <p:nvPr/>
+        </p:nvSpPr>
+        <p:spPr>
+          <a:xfrm>
+            <a:off x="304800" y="1333500"/>
+            <a:ext cx="2381250" cy="457200"/>
           </a:xfrm>
           <a:prstGeom prst="roundRect">
             <a:avLst/>
@@ -1512,7 +1602,7 @@
           <a:solidFill>
             <a:srgbClr val="FFFFFF"/>
           </a:solidFill>
-          <a:ln w="28575">
+          <a:ln w="19050">
             <a:solidFill>
               <a:srgbClr val="C5CFDA"/>
             </a:solidFill>
@@ -1522,14 +1612,14 @@
       </p:sp>
       <p:sp>
         <p:nvSpPr>
-          <p:cNvPr id="26" name="result-powder-title"/>
-          <p:cNvSpPr/>
-          <p:nvPr/>
-        </p:nvSpPr>
-        <p:spPr>
-          <a:xfrm>
-            <a:off x="11820525" y="1695450"/>
-            <a:ext cx="1924050" cy="356235"/>
+          <p:cNvPr id="29" name="chip-text-title"/>
+          <p:cNvSpPr/>
+          <p:nvPr/>
+        </p:nvSpPr>
+        <p:spPr>
+          <a:xfrm>
+            <a:off x="476250" y="1409700"/>
+            <a:ext cx="2038350" cy="356235"/>
           </a:xfrm>
           <a:prstGeom prst="rect">
             <a:avLst/>
@@ -1552,14 +1642,14 @@
       </p:sp>
       <p:sp>
         <p:nvSpPr>
-          <p:cNvPr id="27" name="result-titration"/>
-          <p:cNvSpPr/>
-          <p:nvPr/>
-        </p:nvSpPr>
-        <p:spPr>
-          <a:xfrm>
-            <a:off x="14106525" y="1619250"/>
-            <a:ext cx="2266950" cy="2476500"/>
+          <p:cNvPr id="30" name="chip-image"/>
+          <p:cNvSpPr/>
+          <p:nvPr/>
+        </p:nvSpPr>
+        <p:spPr>
+          <a:xfrm>
+            <a:off x="304800" y="1905000"/>
+            <a:ext cx="2381250" cy="457200"/>
           </a:xfrm>
           <a:prstGeom prst="roundRect">
             <a:avLst/>
@@ -1567,7 +1657,7 @@
           <a:solidFill>
             <a:srgbClr val="FFFFFF"/>
           </a:solidFill>
-          <a:ln w="28575">
+          <a:ln w="19050">
             <a:solidFill>
               <a:srgbClr val="C5CFDA"/>
             </a:solidFill>
@@ -1577,14 +1667,14 @@
       </p:sp>
       <p:sp>
         <p:nvSpPr>
-          <p:cNvPr id="28" name="result-titration-title"/>
-          <p:cNvSpPr/>
-          <p:nvPr/>
-        </p:nvSpPr>
-        <p:spPr>
-          <a:xfrm>
-            <a:off x="14277975" y="1695450"/>
-            <a:ext cx="1924050" cy="356235"/>
+          <p:cNvPr id="31" name="chip-image-title"/>
+          <p:cNvSpPr/>
+          <p:nvPr/>
+        </p:nvSpPr>
+        <p:spPr>
+          <a:xfrm>
+            <a:off x="476250" y="1981200"/>
+            <a:ext cx="2038350" cy="356235"/>
           </a:xfrm>
           <a:prstGeom prst="rect">
             <a:avLst/>
@@ -1607,14 +1697,14 @@
       </p:sp>
       <p:sp>
         <p:nvSpPr>
-          <p:cNvPr id="29" name="result-oven"/>
-          <p:cNvSpPr/>
-          <p:nvPr/>
-        </p:nvSpPr>
-        <p:spPr>
-          <a:xfrm>
-            <a:off x="16563975" y="1619250"/>
-            <a:ext cx="2266950" cy="2476500"/>
+          <p:cNvPr id="32" name="chip-video"/>
+          <p:cNvSpPr/>
+          <p:nvPr/>
+        </p:nvSpPr>
+        <p:spPr>
+          <a:xfrm>
+            <a:off x="304800" y="2476500"/>
+            <a:ext cx="2381250" cy="457200"/>
           </a:xfrm>
           <a:prstGeom prst="roundRect">
             <a:avLst/>
@@ -1622,7 +1712,7 @@
           <a:solidFill>
             <a:srgbClr val="FFFFFF"/>
           </a:solidFill>
-          <a:ln w="28575">
+          <a:ln w="19050">
             <a:solidFill>
               <a:srgbClr val="C5CFDA"/>
             </a:solidFill>
@@ -1632,14 +1722,234 @@
       </p:sp>
       <p:sp>
         <p:nvSpPr>
-          <p:cNvPr id="30" name="result-oven-title"/>
-          <p:cNvSpPr/>
-          <p:nvPr/>
-        </p:nvSpPr>
-        <p:spPr>
-          <a:xfrm>
-            <a:off x="16735425" y="1695450"/>
-            <a:ext cx="1924050" cy="356235"/>
+          <p:cNvPr id="33" name="chip-video-title"/>
+          <p:cNvSpPr/>
+          <p:nvPr/>
+        </p:nvSpPr>
+        <p:spPr>
+          <a:xfrm>
+            <a:off x="476250" y="2552700"/>
+            <a:ext cx="2038350" cy="356235"/>
+          </a:xfrm>
+          <a:prstGeom prst="rect">
+            <a:avLst/>
+          </a:prstGeom>
+          <a:noFill/>
+          <a:ln/>
+        </p:spPr>
+        <p:txBody>
+          <a:bodyPr wrap="square" lIns="0" tIns="0" rIns="0" bIns="0" rtlCol="0" anchor="ctr">
+            <a:normAutofit/>
+          </a:bodyPr>
+          <a:lstStyle/>
+          <a:p>
+            <a:pPr indent="0" marL="0">
+              <a:buNone/>
+            </a:pPr>
+            <a:endParaRPr lang="en-US" sz="1650" dirty="0"/>
+          </a:p>
+        </p:txBody>
+      </p:sp>
+      <p:sp>
+        <p:nvSpPr>
+          <p:cNvPr id="34" name="frame-fehling"/>
+          <p:cNvSpPr/>
+          <p:nvPr/>
+        </p:nvSpPr>
+        <p:spPr>
+          <a:xfrm>
+            <a:off x="11353800" y="1314450"/>
+            <a:ext cx="3609975" cy="2171700"/>
+          </a:xfrm>
+          <a:prstGeom prst="roundRect">
+            <a:avLst/>
+          </a:prstGeom>
+          <a:solidFill>
+            <a:srgbClr val="FFFFFF"/>
+          </a:solidFill>
+          <a:ln w="19050">
+            <a:solidFill>
+              <a:srgbClr val="C5CFDA"/>
+            </a:solidFill>
+            <a:prstDash val="solid"/>
+          </a:ln>
+        </p:spPr>
+      </p:sp>
+      <p:sp>
+        <p:nvSpPr>
+          <p:cNvPr id="35" name="frame-fehling-title"/>
+          <p:cNvSpPr/>
+          <p:nvPr/>
+        </p:nvSpPr>
+        <p:spPr>
+          <a:xfrm>
+            <a:off x="11525250" y="1390650"/>
+            <a:ext cx="3267075" cy="356235"/>
+          </a:xfrm>
+          <a:prstGeom prst="rect">
+            <a:avLst/>
+          </a:prstGeom>
+          <a:noFill/>
+          <a:ln/>
+        </p:spPr>
+        <p:txBody>
+          <a:bodyPr wrap="square" lIns="0" tIns="0" rIns="0" bIns="0" rtlCol="0" anchor="ctr">
+            <a:normAutofit/>
+          </a:bodyPr>
+          <a:lstStyle/>
+          <a:p>
+            <a:pPr indent="0" marL="0">
+              <a:buNone/>
+            </a:pPr>
+            <a:endParaRPr lang="en-US" sz="1650" dirty="0"/>
+          </a:p>
+        </p:txBody>
+      </p:sp>
+      <p:sp>
+        <p:nvSpPr>
+          <p:cNvPr id="36" name="frame-powder"/>
+          <p:cNvSpPr/>
+          <p:nvPr/>
+        </p:nvSpPr>
+        <p:spPr>
+          <a:xfrm>
+            <a:off x="15154275" y="1314450"/>
+            <a:ext cx="3609975" cy="2171700"/>
+          </a:xfrm>
+          <a:prstGeom prst="roundRect">
+            <a:avLst/>
+          </a:prstGeom>
+          <a:solidFill>
+            <a:srgbClr val="FFFFFF"/>
+          </a:solidFill>
+          <a:ln w="19050">
+            <a:solidFill>
+              <a:srgbClr val="C5CFDA"/>
+            </a:solidFill>
+            <a:prstDash val="solid"/>
+          </a:ln>
+        </p:spPr>
+      </p:sp>
+      <p:sp>
+        <p:nvSpPr>
+          <p:cNvPr id="37" name="frame-powder-title"/>
+          <p:cNvSpPr/>
+          <p:nvPr/>
+        </p:nvSpPr>
+        <p:spPr>
+          <a:xfrm>
+            <a:off x="15325725" y="1390650"/>
+            <a:ext cx="3267075" cy="356235"/>
+          </a:xfrm>
+          <a:prstGeom prst="rect">
+            <a:avLst/>
+          </a:prstGeom>
+          <a:noFill/>
+          <a:ln/>
+        </p:spPr>
+        <p:txBody>
+          <a:bodyPr wrap="square" lIns="0" tIns="0" rIns="0" bIns="0" rtlCol="0" anchor="ctr">
+            <a:normAutofit/>
+          </a:bodyPr>
+          <a:lstStyle/>
+          <a:p>
+            <a:pPr indent="0" marL="0">
+              <a:buNone/>
+            </a:pPr>
+            <a:endParaRPr lang="en-US" sz="1650" dirty="0"/>
+          </a:p>
+        </p:txBody>
+      </p:sp>
+      <p:sp>
+        <p:nvSpPr>
+          <p:cNvPr id="38" name="frame-titration"/>
+          <p:cNvSpPr/>
+          <p:nvPr/>
+        </p:nvSpPr>
+        <p:spPr>
+          <a:xfrm>
+            <a:off x="11353800" y="3962400"/>
+            <a:ext cx="3609975" cy="2171700"/>
+          </a:xfrm>
+          <a:prstGeom prst="roundRect">
+            <a:avLst/>
+          </a:prstGeom>
+          <a:solidFill>
+            <a:srgbClr val="FFFFFF"/>
+          </a:solidFill>
+          <a:ln w="19050">
+            <a:solidFill>
+              <a:srgbClr val="C5CFDA"/>
+            </a:solidFill>
+            <a:prstDash val="solid"/>
+          </a:ln>
+        </p:spPr>
+      </p:sp>
+      <p:sp>
+        <p:nvSpPr>
+          <p:cNvPr id="39" name="frame-titration-title"/>
+          <p:cNvSpPr/>
+          <p:nvPr/>
+        </p:nvSpPr>
+        <p:spPr>
+          <a:xfrm>
+            <a:off x="11525250" y="4038600"/>
+            <a:ext cx="3267075" cy="356235"/>
+          </a:xfrm>
+          <a:prstGeom prst="rect">
+            <a:avLst/>
+          </a:prstGeom>
+          <a:noFill/>
+          <a:ln/>
+        </p:spPr>
+        <p:txBody>
+          <a:bodyPr wrap="square" lIns="0" tIns="0" rIns="0" bIns="0" rtlCol="0" anchor="ctr">
+            <a:normAutofit/>
+          </a:bodyPr>
+          <a:lstStyle/>
+          <a:p>
+            <a:pPr indent="0" marL="0">
+              <a:buNone/>
+            </a:pPr>
+            <a:endParaRPr lang="en-US" sz="1650" dirty="0"/>
+          </a:p>
+        </p:txBody>
+      </p:sp>
+      <p:sp>
+        <p:nvSpPr>
+          <p:cNvPr id="40" name="frame-oven"/>
+          <p:cNvSpPr/>
+          <p:nvPr/>
+        </p:nvSpPr>
+        <p:spPr>
+          <a:xfrm>
+            <a:off x="15154275" y="3962400"/>
+            <a:ext cx="3609975" cy="2171700"/>
+          </a:xfrm>
+          <a:prstGeom prst="roundRect">
+            <a:avLst/>
+          </a:prstGeom>
+          <a:solidFill>
+            <a:srgbClr val="FFFFFF"/>
+          </a:solidFill>
+          <a:ln w="19050">
+            <a:solidFill>
+              <a:srgbClr val="C5CFDA"/>
+            </a:solidFill>
+            <a:prstDash val="solid"/>
+          </a:ln>
+        </p:spPr>
+      </p:sp>
+      <p:sp>
+        <p:nvSpPr>
+          <p:cNvPr id="41" name="frame-oven-title"/>
+          <p:cNvSpPr/>
+          <p:nvPr/>
+        </p:nvSpPr>
+        <p:spPr>
+          <a:xfrm>
+            <a:off x="15325725" y="4038600"/>
+            <a:ext cx="3267075" cy="356235"/>
           </a:xfrm>
           <a:prstGeom prst="rect">
             <a:avLst/>
@@ -1662,7 +1972,7 @@
       </p:sp>
       <p:pic>
         <p:nvPicPr>
-          <p:cNvPr id="31" name="input-text-icon" descr="Wet-lab protocol text symbol">    </p:cNvPr>
+          <p:cNvPr id="42" name="input-text-icon" descr="Wet-lab protocol text symbol">    </p:cNvPr>
           <p:cNvPicPr>
             <a:picLocks noChangeAspect="1"/>
           </p:cNvPicPr>
@@ -1682,7 +1992,7 @@
         </p:blipFill>
         <p:spPr>
           <a:xfrm>
-            <a:off x="409575" y="1714500"/>
+            <a:off x="495300" y="1409700"/>
             <a:ext cx="304800" cy="304800"/>
           </a:xfrm>
           <a:prstGeom prst="rect">
@@ -1692,7 +2002,7 @@
       </p:pic>
       <p:pic>
         <p:nvPicPr>
-          <p:cNvPr id="32" name="input-image-icon" descr="Catalog image request symbol">    </p:cNvPr>
+          <p:cNvPr id="43" name="input-image-icon" descr="Catalog image request symbol">    </p:cNvPr>
           <p:cNvPicPr>
             <a:picLocks noChangeAspect="1"/>
           </p:cNvPicPr>
@@ -1712,7 +2022,7 @@
         </p:blipFill>
         <p:spPr>
           <a:xfrm>
-            <a:off x="409575" y="2114550"/>
+            <a:off x="495300" y="1981200"/>
             <a:ext cx="304800" cy="304800"/>
           </a:xfrm>
           <a:prstGeom prst="rect">
@@ -1722,41 +2032,17 @@
       </p:pic>
       <p:pic>
         <p:nvPicPr>
-          <p:cNvPr id="33" name="input-catalog-photo" descr="IKA OVEN 125 manufacturer catalog image used as an image request">    </p:cNvPr>
+          <p:cNvPr id="44" name="input-video-icon" descr="Wet-lab demonstration video symbol">    </p:cNvPr>
           <p:cNvPicPr>
             <a:picLocks noChangeAspect="1"/>
           </p:cNvPicPr>
           <p:nvPr/>
         </p:nvPicPr>
         <p:blipFill>
-          <a:blip r:embed="rId5"/>
-          <a:stretch>
-            <a:fillRect/>
-          </a:stretch>
-        </p:blipFill>
-        <p:spPr>
-          <a:xfrm>
-            <a:off x="409575" y="2933700"/>
-            <a:ext cx="1895475" cy="1104900"/>
-          </a:xfrm>
-          <a:prstGeom prst="rect">
-            <a:avLst/>
-          </a:prstGeom>
-        </p:spPr>
-      </p:pic>
-      <p:pic>
-        <p:nvPicPr>
-          <p:cNvPr id="34" name="input-video-icon" descr="Wet-lab demonstration video symbol">    </p:cNvPr>
-          <p:cNvPicPr>
-            <a:picLocks noChangeAspect="1"/>
-          </p:cNvPicPr>
-          <p:nvPr/>
-        </p:nvPicPr>
-        <p:blipFill>
-          <a:blip r:embed="rId6">
+          <a:blip r:embed="rId5">
             <a:extLst>
               <a:ext uri="{96DAC541-7B7A-43D3-8B79-37D633B846F1}">
-                <asvg:svgBlip xmlns:asvg="http://schemas.microsoft.com/office/drawing/2016/SVG/main" r:embed="rId7"/>
+                <asvg:svgBlip xmlns:asvg="http://schemas.microsoft.com/office/drawing/2016/SVG/main" r:embed="rId6"/>
               </a:ext>
             </a:extLst>
           </a:blip>
@@ -1766,7 +2052,7 @@
         </p:blipFill>
         <p:spPr>
           <a:xfrm>
-            <a:off x="409575" y="2514600"/>
+            <a:off x="495300" y="2552700"/>
             <a:ext cx="304800" cy="304800"/>
           </a:xfrm>
           <a:prstGeom prst="rect">
@@ -1776,28 +2062,22 @@
       </p:pic>
       <p:pic>
         <p:nvPicPr>
-          <p:cNvPr id="35" name="retrieve-icon" descr="Manufacturer evidence retrieval symbol">    </p:cNvPr>
+          <p:cNvPr id="45" name="input-catalog-photo" descr="IKA OVEN 125 manufacturer catalog image used as an image request">    </p:cNvPr>
           <p:cNvPicPr>
             <a:picLocks noChangeAspect="1"/>
           </p:cNvPicPr>
           <p:nvPr/>
         </p:nvPicPr>
         <p:blipFill>
-          <a:blip r:embed="rId8">
-            <a:extLst>
-              <a:ext uri="{96DAC541-7B7A-43D3-8B79-37D633B846F1}">
-                <asvg:svgBlip xmlns:asvg="http://schemas.microsoft.com/office/drawing/2016/SVG/main" r:embed="rId9"/>
-              </a:ext>
-            </a:extLst>
-          </a:blip>
+          <a:blip r:embed="rId7"/>
           <a:stretch>
             <a:fillRect/>
           </a:stretch>
         </p:blipFill>
         <p:spPr>
           <a:xfrm>
-            <a:off x="3124200" y="2343150"/>
-            <a:ext cx="457200" cy="457200"/>
+            <a:off x="323850" y="3181350"/>
+            <a:ext cx="2343150" cy="2343150"/>
           </a:xfrm>
           <a:prstGeom prst="rect">
             <a:avLst/>
@@ -1806,28 +2086,22 @@
       </p:pic>
       <p:pic>
         <p:nvPicPr>
-          <p:cNvPr id="36" name="build-icon" descr="Blender-to-USD generation symbol">    </p:cNvPr>
+          <p:cNvPr id="46" name="search-evidence-image" descr="IKA OVEN 125 open-door manufacturer catalog photograph retrieved as evidence for the door hinge and shelf count">    </p:cNvPr>
           <p:cNvPicPr>
             <a:picLocks noChangeAspect="1"/>
           </p:cNvPicPr>
           <p:nvPr/>
         </p:nvPicPr>
         <p:blipFill>
-          <a:blip r:embed="rId10">
-            <a:extLst>
-              <a:ext uri="{96DAC541-7B7A-43D3-8B79-37D633B846F1}">
-                <asvg:svgBlip xmlns:asvg="http://schemas.microsoft.com/office/drawing/2016/SVG/main" r:embed="rId11"/>
-              </a:ext>
-            </a:extLst>
-          </a:blip>
+          <a:blip r:embed="rId8"/>
           <a:stretch>
             <a:fillRect/>
           </a:stretch>
         </p:blipFill>
         <p:spPr>
           <a:xfrm>
-            <a:off x="6600825" y="2343150"/>
-            <a:ext cx="457200" cy="457200"/>
+            <a:off x="3405188" y="3286125"/>
+            <a:ext cx="1428750" cy="1428750"/>
           </a:xfrm>
           <a:prstGeom prst="rect">
             <a:avLst/>
@@ -1836,7 +2110,79 @@
       </p:pic>
       <p:pic>
         <p:nvPicPr>
-          <p:cNvPr id="37" name="scene-fehling" descr="Fehling r10 current-delivery Isaac scene with bath and tube rack">    </p:cNvPr>
+          <p:cNvPr id="47" name="build-usd-image" descr="Articulated IKA OVEN 125 USD render with open door from the admitted OVEN r2 scene">    </p:cNvPr>
+          <p:cNvPicPr>
+            <a:picLocks noChangeAspect="1"/>
+          </p:cNvPicPr>
+          <p:nvPr/>
+        </p:nvPicPr>
+        <p:blipFill>
+          <a:blip r:embed="rId9"/>
+          <a:stretch>
+            <a:fillRect/>
+          </a:stretch>
+        </p:blipFill>
+        <p:spPr>
+          <a:xfrm>
+            <a:off x="7243763" y="3338513"/>
+            <a:ext cx="1524000" cy="1323975"/>
+          </a:xfrm>
+          <a:prstGeom prst="rect">
+            <a:avLst/>
+          </a:prstGeom>
+        </p:spPr>
+      </p:pic>
+      <p:pic>
+        <p:nvPicPr>
+          <p:cNvPr id="48" name="scene-fehling" descr="Fehling r10 current-delivery Isaac scene with bath and tube rack">    </p:cNvPr>
+          <p:cNvPicPr>
+            <a:picLocks noChangeAspect="1"/>
+          </p:cNvPicPr>
+          <p:nvPr/>
+        </p:nvPicPr>
+        <p:blipFill>
+          <a:blip r:embed="rId10"/>
+          <a:stretch>
+            <a:fillRect/>
+          </a:stretch>
+        </p:blipFill>
+        <p:spPr>
+          <a:xfrm>
+            <a:off x="11372850" y="1333500"/>
+            <a:ext cx="3571875" cy="2133600"/>
+          </a:xfrm>
+          <a:prstGeom prst="rect">
+            <a:avLst/>
+          </a:prstGeom>
+        </p:spPr>
+      </p:pic>
+      <p:pic>
+        <p:nvPicPr>
+          <p:cNvPr id="49" name="scene-powder" descr="Powder r4 current-delivery Isaac scene with scoop over bottle">    </p:cNvPr>
+          <p:cNvPicPr>
+            <a:picLocks noChangeAspect="1"/>
+          </p:cNvPicPr>
+          <p:nvPr/>
+        </p:nvPicPr>
+        <p:blipFill>
+          <a:blip r:embed="rId11"/>
+          <a:stretch>
+            <a:fillRect/>
+          </a:stretch>
+        </p:blipFill>
+        <p:spPr>
+          <a:xfrm>
+            <a:off x="15173325" y="1333500"/>
+            <a:ext cx="3571875" cy="2133600"/>
+          </a:xfrm>
+          <a:prstGeom prst="rect">
+            <a:avLst/>
+          </a:prstGeom>
+        </p:spPr>
+      </p:pic>
+      <p:pic>
+        <p:nvPicPr>
+          <p:cNvPr id="50" name="scene-titration" descr="Titration r1.7 current-delivery Isaac scene at endpoint">    </p:cNvPr>
           <p:cNvPicPr>
             <a:picLocks noChangeAspect="1"/>
           </p:cNvPicPr>
@@ -1850,8 +2196,8 @@
         </p:blipFill>
         <p:spPr>
           <a:xfrm>
-            <a:off x="9191625" y="1619250"/>
-            <a:ext cx="2266950" cy="1828800"/>
+            <a:off x="11372850" y="3981450"/>
+            <a:ext cx="3571875" cy="2133600"/>
           </a:xfrm>
           <a:prstGeom prst="rect">
             <a:avLst/>
@@ -1860,7 +2206,7 @@
       </p:pic>
       <p:pic>
         <p:nvPicPr>
-          <p:cNvPr id="38" name="scene-powder" descr="Powder r4 current-delivery Isaac scene with scoop over bottle">    </p:cNvPr>
+          <p:cNvPr id="51" name="scene-oven" descr="OVEN r2 current-delivery Isaac scene with open door and glassware">    </p:cNvPr>
           <p:cNvPicPr>
             <a:picLocks noChangeAspect="1"/>
           </p:cNvPicPr>
@@ -1874,72 +2220,99 @@
         </p:blipFill>
         <p:spPr>
           <a:xfrm>
-            <a:off x="11649075" y="1619250"/>
-            <a:ext cx="2266950" cy="1828800"/>
+            <a:off x="15173325" y="3981450"/>
+            <a:ext cx="3571875" cy="2133600"/>
           </a:xfrm>
           <a:prstGeom prst="rect">
             <a:avLst/>
           </a:prstGeom>
         </p:spPr>
       </p:pic>
-      <p:pic>
-        <p:nvPicPr>
-          <p:cNvPr id="39" name="scene-titration" descr="Titration r1.7 current-delivery Isaac scene at endpoint">    </p:cNvPr>
-          <p:cNvPicPr>
-            <a:picLocks noChangeAspect="1"/>
-          </p:cNvPicPr>
-          <p:nvPr/>
-        </p:nvPicPr>
-        <p:blipFill>
-          <a:blip r:embed="rId14"/>
-          <a:stretch>
-            <a:fillRect/>
-          </a:stretch>
-        </p:blipFill>
-        <p:spPr>
-          <a:xfrm>
-            <a:off x="14106525" y="1619250"/>
-            <a:ext cx="2266950" cy="1828800"/>
-          </a:xfrm>
-          <a:prstGeom prst="rect">
-            <a:avLst/>
-          </a:prstGeom>
-        </p:spPr>
-      </p:pic>
-      <p:pic>
-        <p:nvPicPr>
-          <p:cNvPr id="40" name="scene-oven" descr="OVEN r2 current-delivery Isaac scene with open door and glassware">    </p:cNvPr>
-          <p:cNvPicPr>
-            <a:picLocks noChangeAspect="1"/>
-          </p:cNvPicPr>
-          <p:nvPr/>
-        </p:nvPicPr>
-        <p:blipFill>
-          <a:blip r:embed="rId15"/>
-          <a:stretch>
-            <a:fillRect/>
-          </a:stretch>
-        </p:blipFill>
-        <p:spPr>
-          <a:xfrm>
-            <a:off x="16563975" y="1619250"/>
-            <a:ext cx="2266950" cy="1828800"/>
-          </a:xfrm>
-          <a:prstGeom prst="rect">
-            <a:avLst/>
-          </a:prstGeom>
-        </p:spPr>
-      </p:pic>
-      <p:sp>
-        <p:nvSpPr>
-          <p:cNvPr id="41" name="heading-input"/>
-          <p:cNvSpPr/>
-          <p:nvPr/>
-        </p:nvSpPr>
-        <p:spPr>
-          <a:xfrm>
-            <a:off x="238125" y="228600"/>
-            <a:ext cx="2238375" cy="457200"/>
+      <p:sp>
+        <p:nvSpPr>
+          <p:cNvPr id="52" name="retrieve-to-spec-segment-1"/>
+          <p:cNvSpPr/>
+          <p:nvPr/>
+        </p:nvSpPr>
+        <p:spPr>
+          <a:xfrm>
+            <a:off x="5057775" y="4000500"/>
+            <a:ext cx="114300" cy="0"/>
+          </a:xfrm>
+          <a:prstGeom prst="line">
+            <a:avLst/>
+          </a:prstGeom>
+          <a:noFill/>
+          <a:ln w="38100">
+            <a:solidFill>
+              <a:srgbClr val="3F4855"/>
+            </a:solidFill>
+            <a:prstDash val="solid"/>
+            <a:headEnd type="none"/>
+            <a:tailEnd type="triangle"/>
+          </a:ln>
+        </p:spPr>
+      </p:sp>
+      <p:sp>
+        <p:nvSpPr>
+          <p:cNvPr id="53" name="spec-to-build-segment-1"/>
+          <p:cNvSpPr/>
+          <p:nvPr/>
+        </p:nvSpPr>
+        <p:spPr>
+          <a:xfrm>
+            <a:off x="7029450" y="4000500"/>
+            <a:ext cx="114300" cy="0"/>
+          </a:xfrm>
+          <a:prstGeom prst="line">
+            <a:avLst/>
+          </a:prstGeom>
+          <a:noFill/>
+          <a:ln w="38100">
+            <a:solidFill>
+              <a:srgbClr val="3F4855"/>
+            </a:solidFill>
+            <a:prstDash val="solid"/>
+            <a:headEnd type="none"/>
+            <a:tailEnd type="triangle"/>
+          </a:ln>
+        </p:spPr>
+      </p:sp>
+      <p:sp>
+        <p:nvSpPr>
+          <p:cNvPr id="54" name="build-to-admit-segment-1"/>
+          <p:cNvSpPr/>
+          <p:nvPr/>
+        </p:nvSpPr>
+        <p:spPr>
+          <a:xfrm>
+            <a:off x="8867775" y="4000500"/>
+            <a:ext cx="114300" cy="0"/>
+          </a:xfrm>
+          <a:prstGeom prst="line">
+            <a:avLst/>
+          </a:prstGeom>
+          <a:noFill/>
+          <a:ln w="38100">
+            <a:solidFill>
+              <a:srgbClr val="3F4855"/>
+            </a:solidFill>
+            <a:prstDash val="solid"/>
+            <a:headEnd type="none"/>
+            <a:tailEnd type="triangle"/>
+          </a:ln>
+        </p:spPr>
+      </p:sp>
+      <p:sp>
+        <p:nvSpPr>
+          <p:cNvPr id="55" name="heading-request"/>
+          <p:cNvSpPr/>
+          <p:nvPr/>
+        </p:nvSpPr>
+        <p:spPr>
+          <a:xfrm>
+            <a:off x="304800" y="342900"/>
+            <a:ext cx="2381250" cy="457200"/>
           </a:xfrm>
           <a:prstGeom prst="rect">
             <a:avLst/>
@@ -1957,7 +2330,7 @@
               <a:buNone/>
             </a:pPr>
             <a:r>
-              <a:rPr lang="en-US" sz="3450" b="1" dirty="0">
+              <a:rPr lang="en-US" sz="3300" b="1" dirty="0">
                 <a:solidFill>
                   <a:srgbClr val="172033"/>
                 </a:solidFill>
@@ -1965,22 +2338,22 @@
                 <a:ea typeface="DejaVu Sans" pitchFamily="34" charset="-122"/>
                 <a:cs typeface="DejaVu Sans" pitchFamily="34" charset="-120"/>
               </a:rPr>
-              <a:t>Input</a:t>
+              <a:t>Request</a:t>
             </a:r>
-            <a:endParaRPr lang="en-US" sz="3450" dirty="0"/>
-          </a:p>
-        </p:txBody>
-      </p:sp>
-      <p:sp>
-        <p:nvSpPr>
-          <p:cNvPr id="42" name="heading-agent"/>
-          <p:cNvSpPr/>
-          <p:nvPr/>
-        </p:nvSpPr>
-        <p:spPr>
-          <a:xfrm>
-            <a:off x="2619375" y="228600"/>
-            <a:ext cx="5857875" cy="457200"/>
+            <a:endParaRPr lang="en-US" sz="3300" dirty="0"/>
+          </a:p>
+        </p:txBody>
+      </p:sp>
+      <p:sp>
+        <p:nvSpPr>
+          <p:cNvPr id="56" name="heading-agent"/>
+          <p:cNvSpPr/>
+          <p:nvPr/>
+        </p:nvSpPr>
+        <p:spPr>
+          <a:xfrm>
+            <a:off x="3009900" y="342900"/>
+            <a:ext cx="4762500" cy="457200"/>
           </a:xfrm>
           <a:prstGeom prst="rect">
             <a:avLst/>
@@ -1998,7 +2371,7 @@
               <a:buNone/>
             </a:pPr>
             <a:r>
-              <a:rPr lang="en-US" sz="3450" b="1" dirty="0">
+              <a:rPr lang="en-US" sz="3300" b="1" dirty="0">
                 <a:solidFill>
                   <a:srgbClr val="172033"/>
                 </a:solidFill>
@@ -2008,20 +2381,20 @@
               </a:rPr>
               <a:t>Lab2Sim agent</a:t>
             </a:r>
-            <a:endParaRPr lang="en-US" sz="3450" dirty="0"/>
-          </a:p>
-        </p:txBody>
-      </p:sp>
-      <p:sp>
-        <p:nvSpPr>
-          <p:cNvPr id="43" name="heading-results"/>
-          <p:cNvSpPr/>
-          <p:nvPr/>
-        </p:nvSpPr>
-        <p:spPr>
-          <a:xfrm>
-            <a:off x="9191625" y="228600"/>
-            <a:ext cx="9620250" cy="457200"/>
+            <a:endParaRPr lang="en-US" sz="3300" dirty="0"/>
+          </a:p>
+        </p:txBody>
+      </p:sp>
+      <p:sp>
+        <p:nvSpPr>
+          <p:cNvPr id="57" name="heading-results"/>
+          <p:cNvSpPr/>
+          <p:nvPr/>
+        </p:nvSpPr>
+        <p:spPr>
+          <a:xfrm>
+            <a:off x="11372850" y="342900"/>
+            <a:ext cx="7372350" cy="457200"/>
           </a:xfrm>
           <a:prstGeom prst="rect">
             <a:avLst/>
@@ -2039,7 +2412,7 @@
               <a:buNone/>
             </a:pPr>
             <a:r>
-              <a:rPr lang="en-US" sz="3450" b="1" dirty="0">
+              <a:rPr lang="en-US" sz="3300" b="1" dirty="0">
                 <a:solidFill>
                   <a:srgbClr val="172033"/>
                 </a:solidFill>
@@ -2049,20 +2422,20 @@
               </a:rPr>
               <a:t>Robot-ready Isaac scenes</a:t>
             </a:r>
-            <a:endParaRPr lang="en-US" sz="3450" dirty="0"/>
-          </a:p>
-        </p:txBody>
-      </p:sp>
-      <p:sp>
-        <p:nvSpPr>
-          <p:cNvPr id="44" name="stage-title-search"/>
-          <p:cNvSpPr/>
-          <p:nvPr/>
-        </p:nvSpPr>
-        <p:spPr>
-          <a:xfrm>
-            <a:off x="2619375" y="1733550"/>
-            <a:ext cx="1476375" cy="419100"/>
+            <a:endParaRPr lang="en-US" sz="3300" dirty="0"/>
+          </a:p>
+        </p:txBody>
+      </p:sp>
+      <p:sp>
+        <p:nvSpPr>
+          <p:cNvPr id="58" name="dot-1"/>
+          <p:cNvSpPr/>
+          <p:nvPr/>
+        </p:nvSpPr>
+        <p:spPr>
+          <a:xfrm>
+            <a:off x="3929063" y="1828800"/>
+            <a:ext cx="381000" cy="381000"/>
           </a:xfrm>
           <a:prstGeom prst="rect">
             <a:avLst/>
@@ -2080,7 +2453,171 @@
               <a:buNone/>
             </a:pPr>
             <a:r>
-              <a:rPr lang="en-US" sz="2700" b="1" dirty="0">
+              <a:rPr lang="en-US" sz="2100" b="1" dirty="0">
+                <a:solidFill>
+                  <a:srgbClr val="FFFFFF"/>
+                </a:solidFill>
+                <a:latin typeface="DejaVu Sans" pitchFamily="34" charset="0"/>
+                <a:ea typeface="DejaVu Sans" pitchFamily="34" charset="-122"/>
+                <a:cs typeface="DejaVu Sans" pitchFamily="34" charset="-120"/>
+              </a:rPr>
+              <a:t>1</a:t>
+            </a:r>
+            <a:endParaRPr lang="en-US" sz="2100" dirty="0"/>
+          </a:p>
+        </p:txBody>
+      </p:sp>
+      <p:sp>
+        <p:nvSpPr>
+          <p:cNvPr id="59" name="dot-2"/>
+          <p:cNvSpPr/>
+          <p:nvPr/>
+        </p:nvSpPr>
+        <p:spPr>
+          <a:xfrm>
+            <a:off x="5910263" y="1828800"/>
+            <a:ext cx="381000" cy="381000"/>
+          </a:xfrm>
+          <a:prstGeom prst="rect">
+            <a:avLst/>
+          </a:prstGeom>
+          <a:noFill/>
+          <a:ln/>
+        </p:spPr>
+        <p:txBody>
+          <a:bodyPr wrap="square" lIns="0" tIns="0" rIns="0" bIns="0" rtlCol="0" anchor="ctr">
+            <a:normAutofit/>
+          </a:bodyPr>
+          <a:lstStyle/>
+          <a:p>
+            <a:pPr algn="ctr" indent="0" marL="0">
+              <a:buNone/>
+            </a:pPr>
+            <a:r>
+              <a:rPr lang="en-US" sz="2100" b="1" dirty="0">
+                <a:solidFill>
+                  <a:srgbClr val="FFFFFF"/>
+                </a:solidFill>
+                <a:latin typeface="DejaVu Sans" pitchFamily="34" charset="0"/>
+                <a:ea typeface="DejaVu Sans" pitchFamily="34" charset="-122"/>
+                <a:cs typeface="DejaVu Sans" pitchFamily="34" charset="-120"/>
+              </a:rPr>
+              <a:t>2</a:t>
+            </a:r>
+            <a:endParaRPr lang="en-US" sz="2100" dirty="0"/>
+          </a:p>
+        </p:txBody>
+      </p:sp>
+      <p:sp>
+        <p:nvSpPr>
+          <p:cNvPr id="60" name="dot-3"/>
+          <p:cNvSpPr/>
+          <p:nvPr/>
+        </p:nvSpPr>
+        <p:spPr>
+          <a:xfrm>
+            <a:off x="7815263" y="1828800"/>
+            <a:ext cx="381000" cy="381000"/>
+          </a:xfrm>
+          <a:prstGeom prst="rect">
+            <a:avLst/>
+          </a:prstGeom>
+          <a:noFill/>
+          <a:ln/>
+        </p:spPr>
+        <p:txBody>
+          <a:bodyPr wrap="square" lIns="0" tIns="0" rIns="0" bIns="0" rtlCol="0" anchor="ctr">
+            <a:normAutofit/>
+          </a:bodyPr>
+          <a:lstStyle/>
+          <a:p>
+            <a:pPr algn="ctr" indent="0" marL="0">
+              <a:buNone/>
+            </a:pPr>
+            <a:r>
+              <a:rPr lang="en-US" sz="2100" b="1" dirty="0">
+                <a:solidFill>
+                  <a:srgbClr val="FFFFFF"/>
+                </a:solidFill>
+                <a:latin typeface="DejaVu Sans" pitchFamily="34" charset="0"/>
+                <a:ea typeface="DejaVu Sans" pitchFamily="34" charset="-122"/>
+                <a:cs typeface="DejaVu Sans" pitchFamily="34" charset="-120"/>
+              </a:rPr>
+              <a:t>3</a:t>
+            </a:r>
+            <a:endParaRPr lang="en-US" sz="2100" dirty="0"/>
+          </a:p>
+        </p:txBody>
+      </p:sp>
+      <p:sp>
+        <p:nvSpPr>
+          <p:cNvPr id="61" name="dot-4"/>
+          <p:cNvSpPr/>
+          <p:nvPr/>
+        </p:nvSpPr>
+        <p:spPr>
+          <a:xfrm>
+            <a:off x="9729788" y="1828800"/>
+            <a:ext cx="381000" cy="381000"/>
+          </a:xfrm>
+          <a:prstGeom prst="rect">
+            <a:avLst/>
+          </a:prstGeom>
+          <a:noFill/>
+          <a:ln/>
+        </p:spPr>
+        <p:txBody>
+          <a:bodyPr wrap="square" lIns="0" tIns="0" rIns="0" bIns="0" rtlCol="0" anchor="ctr">
+            <a:normAutofit/>
+          </a:bodyPr>
+          <a:lstStyle/>
+          <a:p>
+            <a:pPr algn="ctr" indent="0" marL="0">
+              <a:buNone/>
+            </a:pPr>
+            <a:r>
+              <a:rPr lang="en-US" sz="2100" b="1" dirty="0">
+                <a:solidFill>
+                  <a:srgbClr val="FFFFFF"/>
+                </a:solidFill>
+                <a:latin typeface="DejaVu Sans" pitchFamily="34" charset="0"/>
+                <a:ea typeface="DejaVu Sans" pitchFamily="34" charset="-122"/>
+                <a:cs typeface="DejaVu Sans" pitchFamily="34" charset="-120"/>
+              </a:rPr>
+              <a:t>4</a:t>
+            </a:r>
+            <a:endParaRPr lang="en-US" sz="2100" dirty="0"/>
+          </a:p>
+        </p:txBody>
+      </p:sp>
+      <p:sp>
+        <p:nvSpPr>
+          <p:cNvPr id="62" name="stage-title-search"/>
+          <p:cNvSpPr/>
+          <p:nvPr/>
+        </p:nvSpPr>
+        <p:spPr>
+          <a:xfrm>
+            <a:off x="3219450" y="2324100"/>
+            <a:ext cx="1800225" cy="381000"/>
+          </a:xfrm>
+          <a:prstGeom prst="rect">
+            <a:avLst/>
+          </a:prstGeom>
+          <a:noFill/>
+          <a:ln/>
+        </p:spPr>
+        <p:txBody>
+          <a:bodyPr wrap="square" lIns="0" tIns="0" rIns="0" bIns="0" rtlCol="0" anchor="ctr">
+            <a:normAutofit/>
+          </a:bodyPr>
+          <a:lstStyle/>
+          <a:p>
+            <a:pPr algn="ctr" indent="0" marL="0">
+              <a:buNone/>
+            </a:pPr>
+            <a:r>
+              <a:rPr lang="en-US" sz="2550" b="1" dirty="0">
                 <a:solidFill>
                   <a:srgbClr val="172033"/>
                 </a:solidFill>
@@ -2090,20 +2627,20 @@
               </a:rPr>
               <a:t>Search</a:t>
             </a:r>
-            <a:endParaRPr lang="en-US" sz="2700" dirty="0"/>
-          </a:p>
-        </p:txBody>
-      </p:sp>
-      <p:sp>
-        <p:nvSpPr>
-          <p:cNvPr id="45" name="stage-title-spec"/>
-          <p:cNvSpPr/>
-          <p:nvPr/>
-        </p:nvSpPr>
-        <p:spPr>
-          <a:xfrm>
-            <a:off x="4286250" y="1733550"/>
-            <a:ext cx="1809750" cy="419100"/>
+            <a:endParaRPr lang="en-US" sz="2550" dirty="0"/>
+          </a:p>
+        </p:txBody>
+      </p:sp>
+      <p:sp>
+        <p:nvSpPr>
+          <p:cNvPr id="63" name="stage-title-spec"/>
+          <p:cNvSpPr/>
+          <p:nvPr/>
+        </p:nvSpPr>
+        <p:spPr>
+          <a:xfrm>
+            <a:off x="5210175" y="2324100"/>
+            <a:ext cx="1781175" cy="381000"/>
           </a:xfrm>
           <a:prstGeom prst="rect">
             <a:avLst/>
@@ -2121,7 +2658,7 @@
               <a:buNone/>
             </a:pPr>
             <a:r>
-              <a:rPr lang="en-US" sz="2700" b="1" dirty="0">
+              <a:rPr lang="en-US" sz="2550" b="1" dirty="0">
                 <a:solidFill>
                   <a:srgbClr val="172033"/>
                 </a:solidFill>
@@ -2131,20 +2668,20 @@
               </a:rPr>
               <a:t>Spec</a:t>
             </a:r>
-            <a:endParaRPr lang="en-US" sz="2700" dirty="0"/>
-          </a:p>
-        </p:txBody>
-      </p:sp>
-      <p:sp>
-        <p:nvSpPr>
-          <p:cNvPr id="46" name="stage-title-build"/>
-          <p:cNvSpPr/>
-          <p:nvPr/>
-        </p:nvSpPr>
-        <p:spPr>
-          <a:xfrm>
-            <a:off x="6286500" y="1733550"/>
-            <a:ext cx="1095375" cy="419100"/>
+            <a:endParaRPr lang="en-US" sz="2550" dirty="0"/>
+          </a:p>
+        </p:txBody>
+      </p:sp>
+      <p:sp>
+        <p:nvSpPr>
+          <p:cNvPr id="64" name="stage-title-build"/>
+          <p:cNvSpPr/>
+          <p:nvPr/>
+        </p:nvSpPr>
+        <p:spPr>
+          <a:xfrm>
+            <a:off x="7181850" y="2324100"/>
+            <a:ext cx="1647825" cy="381000"/>
           </a:xfrm>
           <a:prstGeom prst="rect">
             <a:avLst/>
@@ -2162,7 +2699,7 @@
               <a:buNone/>
             </a:pPr>
             <a:r>
-              <a:rPr lang="en-US" sz="2700" b="1" dirty="0">
+              <a:rPr lang="en-US" sz="2550" b="1" dirty="0">
                 <a:solidFill>
                   <a:srgbClr val="172033"/>
                 </a:solidFill>
@@ -2172,20 +2709,20 @@
               </a:rPr>
               <a:t>Build</a:t>
             </a:r>
-            <a:endParaRPr lang="en-US" sz="2700" dirty="0"/>
-          </a:p>
-        </p:txBody>
-      </p:sp>
-      <p:sp>
-        <p:nvSpPr>
-          <p:cNvPr id="47" name="stage-title-admit"/>
-          <p:cNvSpPr/>
-          <p:nvPr/>
-        </p:nvSpPr>
-        <p:spPr>
-          <a:xfrm>
-            <a:off x="7572375" y="1733550"/>
-            <a:ext cx="1381125" cy="419100"/>
+            <a:endParaRPr lang="en-US" sz="2550" dirty="0"/>
+          </a:p>
+        </p:txBody>
+      </p:sp>
+      <p:sp>
+        <p:nvSpPr>
+          <p:cNvPr id="65" name="stage-title-admit"/>
+          <p:cNvSpPr/>
+          <p:nvPr/>
+        </p:nvSpPr>
+        <p:spPr>
+          <a:xfrm>
+            <a:off x="9020175" y="2324100"/>
+            <a:ext cx="1800225" cy="381000"/>
           </a:xfrm>
           <a:prstGeom prst="rect">
             <a:avLst/>
@@ -2203,7 +2740,7 @@
               <a:buNone/>
             </a:pPr>
             <a:r>
-              <a:rPr lang="en-US" sz="2700" b="1" dirty="0">
+              <a:rPr lang="en-US" sz="2550" b="1" dirty="0">
                 <a:solidFill>
                   <a:srgbClr val="172033"/>
                 </a:solidFill>
@@ -2213,20 +2750,20 @@
               </a:rPr>
               <a:t>Admit</a:t>
             </a:r>
-            <a:endParaRPr lang="en-US" sz="2700" dirty="0"/>
-          </a:p>
-        </p:txBody>
-      </p:sp>
-      <p:sp>
-        <p:nvSpPr>
-          <p:cNvPr id="48" name="input-modalities"/>
-          <p:cNvSpPr/>
-          <p:nvPr/>
-        </p:nvSpPr>
-        <p:spPr>
-          <a:xfrm>
-            <a:off x="828675" y="1695450"/>
-            <a:ext cx="1476375" cy="342900"/>
+            <a:endParaRPr lang="en-US" sz="2550" dirty="0"/>
+          </a:p>
+        </p:txBody>
+      </p:sp>
+      <p:sp>
+        <p:nvSpPr>
+          <p:cNvPr id="66" name="input-modalities"/>
+          <p:cNvSpPr/>
+          <p:nvPr/>
+        </p:nvSpPr>
+        <p:spPr>
+          <a:xfrm>
+            <a:off x="952500" y="1333500"/>
+            <a:ext cx="1619250" cy="457200"/>
           </a:xfrm>
           <a:prstGeom prst="rect">
             <a:avLst/>
@@ -2244,7 +2781,7 @@
               <a:buNone/>
             </a:pPr>
             <a:r>
-              <a:rPr lang="en-US" sz="2250" dirty="0">
+              <a:rPr lang="en-US" sz="2100" dirty="0">
                 <a:solidFill>
                   <a:srgbClr val="172033"/>
                 </a:solidFill>
@@ -2254,20 +2791,20 @@
               </a:rPr>
               <a:t>Text</a:t>
             </a:r>
-            <a:endParaRPr lang="en-US" sz="2250" dirty="0"/>
-          </a:p>
-        </p:txBody>
-      </p:sp>
-      <p:sp>
-        <p:nvSpPr>
-          <p:cNvPr id="49" name="input-image-label"/>
-          <p:cNvSpPr/>
-          <p:nvPr/>
-        </p:nvSpPr>
-        <p:spPr>
-          <a:xfrm>
-            <a:off x="828675" y="2095500"/>
-            <a:ext cx="1476375" cy="342900"/>
+            <a:endParaRPr lang="en-US" sz="2100" dirty="0"/>
+          </a:p>
+        </p:txBody>
+      </p:sp>
+      <p:sp>
+        <p:nvSpPr>
+          <p:cNvPr id="67" name="input-image-label"/>
+          <p:cNvSpPr/>
+          <p:nvPr/>
+        </p:nvSpPr>
+        <p:spPr>
+          <a:xfrm>
+            <a:off x="952500" y="1905000"/>
+            <a:ext cx="1619250" cy="457200"/>
           </a:xfrm>
           <a:prstGeom prst="rect">
             <a:avLst/>
@@ -2285,7 +2822,7 @@
               <a:buNone/>
             </a:pPr>
             <a:r>
-              <a:rPr lang="en-US" sz="2250" dirty="0">
+              <a:rPr lang="en-US" sz="2100" dirty="0">
                 <a:solidFill>
                   <a:srgbClr val="172033"/>
                 </a:solidFill>
@@ -2295,20 +2832,20 @@
               </a:rPr>
               <a:t>Image</a:t>
             </a:r>
-            <a:endParaRPr lang="en-US" sz="2250" dirty="0"/>
-          </a:p>
-        </p:txBody>
-      </p:sp>
-      <p:sp>
-        <p:nvSpPr>
-          <p:cNvPr id="50" name="input-video-label"/>
-          <p:cNvSpPr/>
-          <p:nvPr/>
-        </p:nvSpPr>
-        <p:spPr>
-          <a:xfrm>
-            <a:off x="828675" y="2495550"/>
-            <a:ext cx="1476375" cy="342900"/>
+            <a:endParaRPr lang="en-US" sz="2100" dirty="0"/>
+          </a:p>
+        </p:txBody>
+      </p:sp>
+      <p:sp>
+        <p:nvSpPr>
+          <p:cNvPr id="68" name="input-video-label"/>
+          <p:cNvSpPr/>
+          <p:nvPr/>
+        </p:nvSpPr>
+        <p:spPr>
+          <a:xfrm>
+            <a:off x="952500" y="2476500"/>
+            <a:ext cx="1619250" cy="457200"/>
           </a:xfrm>
           <a:prstGeom prst="rect">
             <a:avLst/>
@@ -2326,7 +2863,7 @@
               <a:buNone/>
             </a:pPr>
             <a:r>
-              <a:rPr lang="en-US" sz="2250" dirty="0">
+              <a:rPr lang="en-US" sz="2100" dirty="0">
                 <a:solidFill>
                   <a:srgbClr val="172033"/>
                 </a:solidFill>
@@ -2336,20 +2873,20 @@
               </a:rPr>
               <a:t>Video</a:t>
             </a:r>
-            <a:endParaRPr lang="en-US" sz="2250" dirty="0"/>
-          </a:p>
-        </p:txBody>
-      </p:sp>
-      <p:sp>
-        <p:nvSpPr>
-          <p:cNvPr id="51" name="retrieve-body"/>
-          <p:cNvSpPr/>
-          <p:nvPr/>
-        </p:nvSpPr>
-        <p:spPr>
-          <a:xfrm>
-            <a:off x="2667000" y="2914650"/>
-            <a:ext cx="1381125" cy="666750"/>
+            <a:endParaRPr lang="en-US" sz="2100" dirty="0"/>
+          </a:p>
+        </p:txBody>
+      </p:sp>
+      <p:sp>
+        <p:nvSpPr>
+          <p:cNvPr id="69" name="spec-body"/>
+          <p:cNvSpPr/>
+          <p:nvPr/>
+        </p:nvSpPr>
+        <p:spPr>
+          <a:xfrm>
+            <a:off x="5305425" y="3238500"/>
+            <a:ext cx="1590675" cy="1524000"/>
           </a:xfrm>
           <a:prstGeom prst="rect">
             <a:avLst/>
@@ -2367,65 +2904,7 @@
               <a:buNone/>
             </a:pPr>
             <a:r>
-              <a:rPr lang="en-US" sz="2550" dirty="0">
-                <a:solidFill>
-                  <a:srgbClr val="3F4855"/>
-                </a:solidFill>
-                <a:latin typeface="DejaVu Sans" pitchFamily="34" charset="0"/>
-                <a:ea typeface="DejaVu Sans" pitchFamily="34" charset="-122"/>
-                <a:cs typeface="DejaVu Sans" pitchFamily="34" charset="-120"/>
-              </a:rPr>
-              <a:t>Web</a:t>
-            </a:r>
-            <a:endParaRPr lang="en-US" sz="2550" dirty="0"/>
-          </a:p>
-          <a:p>
-            <a:pPr algn="ctr" indent="0" marL="0">
-              <a:buNone/>
-            </a:pPr>
-            <a:r>
-              <a:rPr lang="en-US" sz="2550" dirty="0">
-                <a:solidFill>
-                  <a:srgbClr val="3F4855"/>
-                </a:solidFill>
-                <a:latin typeface="DejaVu Sans" pitchFamily="34" charset="0"/>
-                <a:ea typeface="DejaVu Sans" pitchFamily="34" charset="-122"/>
-                <a:cs typeface="DejaVu Sans" pitchFamily="34" charset="-120"/>
-              </a:rPr>
-              <a:t>docs</a:t>
-            </a:r>
-            <a:endParaRPr lang="en-US" sz="2550" dirty="0"/>
-          </a:p>
-        </p:txBody>
-      </p:sp>
-      <p:sp>
-        <p:nvSpPr>
-          <p:cNvPr id="52" name="spec-body"/>
-          <p:cNvSpPr/>
-          <p:nvPr/>
-        </p:nvSpPr>
-        <p:spPr>
-          <a:xfrm>
-            <a:off x="4333875" y="2343150"/>
-            <a:ext cx="1714500" cy="1428750"/>
-          </a:xfrm>
-          <a:prstGeom prst="rect">
-            <a:avLst/>
-          </a:prstGeom>
-          <a:noFill/>
-          <a:ln/>
-        </p:spPr>
-        <p:txBody>
-          <a:bodyPr wrap="square" lIns="0" tIns="0" rIns="0" bIns="0" rtlCol="0" anchor="ctr">
-            <a:normAutofit/>
-          </a:bodyPr>
-          <a:lstStyle/>
-          <a:p>
-            <a:pPr algn="l" indent="0" marL="0">
-              <a:buNone/>
-            </a:pPr>
-            <a:r>
-              <a:rPr lang="en-US" sz="2250" dirty="0">
+              <a:rPr lang="en-US" sz="2100" dirty="0">
                 <a:solidFill>
                   <a:srgbClr val="172033"/>
                 </a:solidFill>
@@ -2435,14 +2914,14 @@
               </a:rPr>
               <a:t>OVEN 125</a:t>
             </a:r>
-            <a:endParaRPr lang="en-US" sz="2250" dirty="0"/>
-          </a:p>
-          <a:p>
-            <a:pPr algn="l" indent="0" marL="0">
+            <a:endParaRPr lang="en-US" sz="2100" dirty="0"/>
+          </a:p>
+          <a:p>
+            <a:pPr algn="ctr" indent="0" marL="0">
               <a:buNone/>
             </a:pPr>
             <a:r>
-              <a:rPr lang="en-US" sz="2250" dirty="0">
+              <a:rPr lang="en-US" sz="2100" dirty="0">
                 <a:solidFill>
                   <a:srgbClr val="172033"/>
                 </a:solidFill>
@@ -2452,14 +2931,14 @@
               </a:rPr>
               <a:t>DOOR 180°</a:t>
             </a:r>
-            <a:endParaRPr lang="en-US" sz="2250" dirty="0"/>
-          </a:p>
-          <a:p>
-            <a:pPr algn="l" indent="0" marL="0">
+            <a:endParaRPr lang="en-US" sz="2100" dirty="0"/>
+          </a:p>
+          <a:p>
+            <a:pPr algn="ctr" indent="0" marL="0">
               <a:buNone/>
             </a:pPr>
             <a:r>
-              <a:rPr lang="en-US" sz="2250" dirty="0">
+              <a:rPr lang="en-US" sz="2100" dirty="0">
                 <a:solidFill>
                   <a:srgbClr val="172033"/>
                 </a:solidFill>
@@ -2469,20 +2948,20 @@
               </a:rPr>
               <a:t>SHELF ×6</a:t>
             </a:r>
-            <a:endParaRPr lang="en-US" sz="2250" dirty="0"/>
-          </a:p>
-        </p:txBody>
-      </p:sp>
-      <p:sp>
-        <p:nvSpPr>
-          <p:cNvPr id="53" name="build-body"/>
-          <p:cNvSpPr/>
-          <p:nvPr/>
-        </p:nvSpPr>
-        <p:spPr>
-          <a:xfrm>
-            <a:off x="6334125" y="2914650"/>
-            <a:ext cx="1000125" cy="552450"/>
+            <a:endParaRPr lang="en-US" sz="2100" dirty="0"/>
+          </a:p>
+        </p:txBody>
+      </p:sp>
+      <p:sp>
+        <p:nvSpPr>
+          <p:cNvPr id="70" name="admit-status"/>
+          <p:cNvSpPr/>
+          <p:nvPr/>
+        </p:nvSpPr>
+        <p:spPr>
+          <a:xfrm>
+            <a:off x="9348788" y="3790950"/>
+            <a:ext cx="1143000" cy="419100"/>
           </a:xfrm>
           <a:prstGeom prst="rect">
             <a:avLst/>
@@ -2500,7 +2979,123 @@
               <a:buNone/>
             </a:pPr>
             <a:r>
-              <a:rPr lang="en-US" sz="2550" dirty="0">
+              <a:rPr lang="en-US" sz="2100" b="1" dirty="0">
+                <a:solidFill>
+                  <a:srgbClr val="0E7C6B"/>
+                </a:solidFill>
+                <a:latin typeface="DejaVu Sans" pitchFamily="34" charset="0"/>
+                <a:ea typeface="DejaVu Sans" pitchFamily="34" charset="-122"/>
+                <a:cs typeface="DejaVu Sans" pitchFamily="34" charset="-120"/>
+              </a:rPr>
+              <a:t>PASS</a:t>
+            </a:r>
+            <a:endParaRPr lang="en-US" sz="2100" dirty="0"/>
+          </a:p>
+        </p:txBody>
+      </p:sp>
+      <p:sp>
+        <p:nvSpPr>
+          <p:cNvPr id="71" name="caption-search"/>
+          <p:cNvSpPr/>
+          <p:nvPr/>
+        </p:nvSpPr>
+        <p:spPr>
+          <a:xfrm>
+            <a:off x="3219450" y="5219700"/>
+            <a:ext cx="1800225" cy="685800"/>
+          </a:xfrm>
+          <a:prstGeom prst="rect">
+            <a:avLst/>
+          </a:prstGeom>
+          <a:noFill/>
+          <a:ln/>
+        </p:spPr>
+        <p:txBody>
+          <a:bodyPr wrap="square" lIns="0" tIns="0" rIns="0" bIns="0" rtlCol="0" anchor="ctr">
+            <a:normAutofit/>
+          </a:bodyPr>
+          <a:lstStyle/>
+          <a:p>
+            <a:pPr algn="ctr" indent="0" marL="0">
+              <a:buNone/>
+            </a:pPr>
+            <a:r>
+              <a:rPr lang="en-US" sz="2100" dirty="0">
+                <a:solidFill>
+                  <a:srgbClr val="3F4855"/>
+                </a:solidFill>
+                <a:latin typeface="DejaVu Sans" pitchFamily="34" charset="0"/>
+                <a:ea typeface="DejaVu Sans" pitchFamily="34" charset="-122"/>
+                <a:cs typeface="DejaVu Sans" pitchFamily="34" charset="-120"/>
+              </a:rPr>
+              <a:t>manufacturer</a:t>
+            </a:r>
+            <a:endParaRPr lang="en-US" sz="2100" dirty="0"/>
+          </a:p>
+          <a:p>
+            <a:pPr algn="ctr" indent="0" marL="0">
+              <a:buNone/>
+            </a:pPr>
+            <a:r>
+              <a:rPr lang="en-US" sz="2100" dirty="0">
+                <a:solidFill>
+                  <a:srgbClr val="3F4855"/>
+                </a:solidFill>
+                <a:latin typeface="DejaVu Sans" pitchFamily="34" charset="0"/>
+                <a:ea typeface="DejaVu Sans" pitchFamily="34" charset="-122"/>
+                <a:cs typeface="DejaVu Sans" pitchFamily="34" charset="-120"/>
+              </a:rPr>
+              <a:t>evidence</a:t>
+            </a:r>
+            <a:endParaRPr lang="en-US" sz="2100" dirty="0"/>
+          </a:p>
+        </p:txBody>
+      </p:sp>
+      <p:sp>
+        <p:nvSpPr>
+          <p:cNvPr id="72" name="caption-build"/>
+          <p:cNvSpPr/>
+          <p:nvPr/>
+        </p:nvSpPr>
+        <p:spPr>
+          <a:xfrm>
+            <a:off x="7181850" y="5219700"/>
+            <a:ext cx="1647825" cy="685800"/>
+          </a:xfrm>
+          <a:prstGeom prst="rect">
+            <a:avLst/>
+          </a:prstGeom>
+          <a:noFill/>
+          <a:ln/>
+        </p:spPr>
+        <p:txBody>
+          <a:bodyPr wrap="square" lIns="0" tIns="0" rIns="0" bIns="0" rtlCol="0" anchor="ctr">
+            <a:normAutofit/>
+          </a:bodyPr>
+          <a:lstStyle/>
+          <a:p>
+            <a:pPr algn="ctr" indent="0" marL="0">
+              <a:buNone/>
+            </a:pPr>
+            <a:r>
+              <a:rPr lang="en-US" sz="2100" dirty="0">
+                <a:solidFill>
+                  <a:srgbClr val="3F4855"/>
+                </a:solidFill>
+                <a:latin typeface="DejaVu Sans" pitchFamily="34" charset="0"/>
+                <a:ea typeface="DejaVu Sans" pitchFamily="34" charset="-122"/>
+                <a:cs typeface="DejaVu Sans" pitchFamily="34" charset="-120"/>
+              </a:rPr>
+              <a:t>articulated</a:t>
+            </a:r>
+            <a:endParaRPr lang="en-US" sz="2100" dirty="0"/>
+          </a:p>
+          <a:p>
+            <a:pPr algn="ctr" indent="0" marL="0">
+              <a:buNone/>
+            </a:pPr>
+            <a:r>
+              <a:rPr lang="en-US" sz="2100" dirty="0">
                 <a:solidFill>
                   <a:srgbClr val="3F4855"/>
                 </a:solidFill>
@@ -2510,20 +3105,20 @@
               </a:rPr>
               <a:t>USD</a:t>
             </a:r>
-            <a:endParaRPr lang="en-US" sz="2550" dirty="0"/>
-          </a:p>
-        </p:txBody>
-      </p:sp>
-      <p:sp>
-        <p:nvSpPr>
-          <p:cNvPr id="54" name="admit-body"/>
-          <p:cNvSpPr/>
-          <p:nvPr/>
-        </p:nvSpPr>
-        <p:spPr>
-          <a:xfrm>
-            <a:off x="7600950" y="2286000"/>
-            <a:ext cx="1323975" cy="1047750"/>
+            <a:endParaRPr lang="en-US" sz="2100" dirty="0"/>
+          </a:p>
+        </p:txBody>
+      </p:sp>
+      <p:sp>
+        <p:nvSpPr>
+          <p:cNvPr id="73" name="caption-admit"/>
+          <p:cNvSpPr/>
+          <p:nvPr/>
+        </p:nvSpPr>
+        <p:spPr>
+          <a:xfrm>
+            <a:off x="9020175" y="5219700"/>
+            <a:ext cx="1800225" cy="685800"/>
           </a:xfrm>
           <a:prstGeom prst="rect">
             <a:avLst/>
@@ -2541,7 +3136,7 @@
               <a:buNone/>
             </a:pPr>
             <a:r>
-              <a:rPr lang="en-US" sz="2550" dirty="0">
+              <a:rPr lang="en-US" sz="2100" dirty="0">
                 <a:solidFill>
                   <a:srgbClr val="3F4855"/>
                 </a:solidFill>
@@ -2549,16 +3144,16 @@
                 <a:ea typeface="DejaVu Sans" pitchFamily="34" charset="-122"/>
                 <a:cs typeface="DejaVu Sans" pitchFamily="34" charset="-120"/>
               </a:rPr>
-              <a:t>Convert</a:t>
+              <a:t>ConvertAsset</a:t>
             </a:r>
-            <a:endParaRPr lang="en-US" sz="2550" dirty="0"/>
+            <a:endParaRPr lang="en-US" sz="2100" dirty="0"/>
           </a:p>
           <a:p>
             <a:pPr algn="ctr" indent="0" marL="0">
               <a:buNone/>
             </a:pPr>
             <a:r>
-              <a:rPr lang="en-US" sz="2550" dirty="0">
+              <a:rPr lang="en-US" sz="2100" dirty="0">
                 <a:solidFill>
                   <a:srgbClr val="3F4855"/>
                 </a:solidFill>
@@ -2566,98 +3161,40 @@
                 <a:ea typeface="DejaVu Sans" pitchFamily="34" charset="-122"/>
                 <a:cs typeface="DejaVu Sans" pitchFamily="34" charset="-120"/>
               </a:rPr>
-              <a:t>Asset</a:t>
+              <a:t>· PhysX</a:t>
             </a:r>
-            <a:endParaRPr lang="en-US" sz="2550" dirty="0"/>
-          </a:p>
+            <a:endParaRPr lang="en-US" sz="2100" dirty="0"/>
+          </a:p>
+        </p:txBody>
+      </p:sp>
+      <p:sp>
+        <p:nvSpPr>
+          <p:cNvPr id="74" name="label-fehling"/>
+          <p:cNvSpPr/>
+          <p:nvPr/>
+        </p:nvSpPr>
+        <p:spPr>
+          <a:xfrm>
+            <a:off x="11372850" y="3543300"/>
+            <a:ext cx="3571875" cy="342900"/>
+          </a:xfrm>
+          <a:prstGeom prst="rect">
+            <a:avLst/>
+          </a:prstGeom>
+          <a:noFill/>
+          <a:ln/>
+        </p:spPr>
+        <p:txBody>
+          <a:bodyPr wrap="square" lIns="0" tIns="0" rIns="0" bIns="0" rtlCol="0" anchor="ctr">
+            <a:normAutofit/>
+          </a:bodyPr>
+          <a:lstStyle/>
           <a:p>
             <a:pPr algn="ctr" indent="0" marL="0">
               <a:buNone/>
             </a:pPr>
             <a:r>
-              <a:rPr lang="en-US" sz="2550" dirty="0">
-                <a:solidFill>
-                  <a:srgbClr val="3F4855"/>
-                </a:solidFill>
-                <a:latin typeface="DejaVu Sans" pitchFamily="34" charset="0"/>
-                <a:ea typeface="DejaVu Sans" pitchFamily="34" charset="-122"/>
-                <a:cs typeface="DejaVu Sans" pitchFamily="34" charset="-120"/>
-              </a:rPr>
-              <a:t>PhysX</a:t>
-            </a:r>
-            <a:endParaRPr lang="en-US" sz="2550" dirty="0"/>
-          </a:p>
-        </p:txBody>
-      </p:sp>
-      <p:sp>
-        <p:nvSpPr>
-          <p:cNvPr id="55" name="admit-status"/>
-          <p:cNvSpPr/>
-          <p:nvPr/>
-        </p:nvSpPr>
-        <p:spPr>
-          <a:xfrm>
-            <a:off x="7734300" y="3429000"/>
-            <a:ext cx="1047750" cy="342900"/>
-          </a:xfrm>
-          <a:prstGeom prst="rect">
-            <a:avLst/>
-          </a:prstGeom>
-          <a:noFill/>
-          <a:ln/>
-        </p:spPr>
-        <p:txBody>
-          <a:bodyPr wrap="square" lIns="0" tIns="0" rIns="0" bIns="0" rtlCol="0" anchor="ctr">
-            <a:normAutofit/>
-          </a:bodyPr>
-          <a:lstStyle/>
-          <a:p>
-            <a:pPr algn="ctr" indent="0" marL="0">
-              <a:buNone/>
-            </a:pPr>
-            <a:r>
-              <a:rPr lang="en-US" sz="2250" b="1" dirty="0">
-                <a:solidFill>
-                  <a:srgbClr val="0E7C6B"/>
-                </a:solidFill>
-                <a:latin typeface="DejaVu Sans" pitchFamily="34" charset="0"/>
-                <a:ea typeface="DejaVu Sans" pitchFamily="34" charset="-122"/>
-                <a:cs typeface="DejaVu Sans" pitchFamily="34" charset="-120"/>
-              </a:rPr>
-              <a:t>PASS</a:t>
-            </a:r>
-            <a:endParaRPr lang="en-US" sz="2250" dirty="0"/>
-          </a:p>
-        </p:txBody>
-      </p:sp>
-      <p:sp>
-        <p:nvSpPr>
-          <p:cNvPr id="56" name="label-fehling"/>
-          <p:cNvSpPr/>
-          <p:nvPr/>
-        </p:nvSpPr>
-        <p:spPr>
-          <a:xfrm>
-            <a:off x="9305925" y="3524250"/>
-            <a:ext cx="2038350" cy="419100"/>
-          </a:xfrm>
-          <a:prstGeom prst="rect">
-            <a:avLst/>
-          </a:prstGeom>
-          <a:noFill/>
-          <a:ln/>
-        </p:spPr>
-        <p:txBody>
-          <a:bodyPr wrap="square" lIns="0" tIns="0" rIns="0" bIns="0" rtlCol="0" anchor="ctr">
-            <a:normAutofit/>
-          </a:bodyPr>
-          <a:lstStyle/>
-          <a:p>
-            <a:pPr algn="ctr" indent="0" marL="0">
-              <a:buNone/>
-            </a:pPr>
-            <a:r>
-              <a:rPr lang="en-US" sz="2700" dirty="0">
+              <a:rPr lang="en-US" sz="2400" dirty="0">
                 <a:solidFill>
                   <a:srgbClr val="172033"/>
                 </a:solidFill>
@@ -2667,20 +3204,20 @@
               </a:rPr>
               <a:t>Fehling</a:t>
             </a:r>
-            <a:endParaRPr lang="en-US" sz="2700" dirty="0"/>
-          </a:p>
-        </p:txBody>
-      </p:sp>
-      <p:sp>
-        <p:nvSpPr>
-          <p:cNvPr id="57" name="label-powder"/>
-          <p:cNvSpPr/>
-          <p:nvPr/>
-        </p:nvSpPr>
-        <p:spPr>
-          <a:xfrm>
-            <a:off x="11763375" y="3524250"/>
-            <a:ext cx="2038350" cy="419100"/>
+            <a:endParaRPr lang="en-US" sz="2400" dirty="0"/>
+          </a:p>
+        </p:txBody>
+      </p:sp>
+      <p:sp>
+        <p:nvSpPr>
+          <p:cNvPr id="75" name="label-powder"/>
+          <p:cNvSpPr/>
+          <p:nvPr/>
+        </p:nvSpPr>
+        <p:spPr>
+          <a:xfrm>
+            <a:off x="15173325" y="3543300"/>
+            <a:ext cx="3571875" cy="342900"/>
           </a:xfrm>
           <a:prstGeom prst="rect">
             <a:avLst/>
@@ -2698,7 +3235,7 @@
               <a:buNone/>
             </a:pPr>
             <a:r>
-              <a:rPr lang="en-US" sz="2700" dirty="0">
+              <a:rPr lang="en-US" sz="2400" dirty="0">
                 <a:solidFill>
                   <a:srgbClr val="172033"/>
                 </a:solidFill>
@@ -2708,20 +3245,20 @@
               </a:rPr>
               <a:t>Powder</a:t>
             </a:r>
-            <a:endParaRPr lang="en-US" sz="2700" dirty="0"/>
-          </a:p>
-        </p:txBody>
-      </p:sp>
-      <p:sp>
-        <p:nvSpPr>
-          <p:cNvPr id="58" name="label-titration"/>
-          <p:cNvSpPr/>
-          <p:nvPr/>
-        </p:nvSpPr>
-        <p:spPr>
-          <a:xfrm>
-            <a:off x="14220825" y="3524250"/>
-            <a:ext cx="2038350" cy="419100"/>
+            <a:endParaRPr lang="en-US" sz="2400" dirty="0"/>
+          </a:p>
+        </p:txBody>
+      </p:sp>
+      <p:sp>
+        <p:nvSpPr>
+          <p:cNvPr id="76" name="label-titration"/>
+          <p:cNvSpPr/>
+          <p:nvPr/>
+        </p:nvSpPr>
+        <p:spPr>
+          <a:xfrm>
+            <a:off x="11372850" y="6191250"/>
+            <a:ext cx="3571875" cy="342900"/>
           </a:xfrm>
           <a:prstGeom prst="rect">
             <a:avLst/>
@@ -2739,7 +3276,7 @@
               <a:buNone/>
             </a:pPr>
             <a:r>
-              <a:rPr lang="en-US" sz="2700" dirty="0">
+              <a:rPr lang="en-US" sz="2400" dirty="0">
                 <a:solidFill>
                   <a:srgbClr val="172033"/>
                 </a:solidFill>
@@ -2749,20 +3286,20 @@
               </a:rPr>
               <a:t>Titration</a:t>
             </a:r>
-            <a:endParaRPr lang="en-US" sz="2700" dirty="0"/>
-          </a:p>
-        </p:txBody>
-      </p:sp>
-      <p:sp>
-        <p:nvSpPr>
-          <p:cNvPr id="59" name="label-oven"/>
-          <p:cNvSpPr/>
-          <p:nvPr/>
-        </p:nvSpPr>
-        <p:spPr>
-          <a:xfrm>
-            <a:off x="16678275" y="3524250"/>
-            <a:ext cx="2038350" cy="419100"/>
+            <a:endParaRPr lang="en-US" sz="2400" dirty="0"/>
+          </a:p>
+        </p:txBody>
+      </p:sp>
+      <p:sp>
+        <p:nvSpPr>
+          <p:cNvPr id="77" name="label-oven"/>
+          <p:cNvSpPr/>
+          <p:nvPr/>
+        </p:nvSpPr>
+        <p:spPr>
+          <a:xfrm>
+            <a:off x="15173325" y="6191250"/>
+            <a:ext cx="3571875" cy="342900"/>
           </a:xfrm>
           <a:prstGeom prst="rect">
             <a:avLst/>
@@ -2780,7 +3317,7 @@
               <a:buNone/>
             </a:pPr>
             <a:r>
-              <a:rPr lang="en-US" sz="2700" dirty="0">
+              <a:rPr lang="en-US" sz="2400" dirty="0">
                 <a:solidFill>
                   <a:srgbClr val="172033"/>
                 </a:solidFill>
@@ -2790,7 +3327,65 @@
               </a:rPr>
               <a:t>OVEN 125</a:t>
             </a:r>
-            <a:endParaRPr lang="en-US" sz="2700" dirty="0"/>
+            <a:endParaRPr lang="en-US" sz="2400" dirty="0"/>
+          </a:p>
+        </p:txBody>
+      </p:sp>
+      <p:sp>
+        <p:nvSpPr>
+          <p:cNvPr id="78" name="caption-spec"/>
+          <p:cNvSpPr/>
+          <p:nvPr/>
+        </p:nvSpPr>
+        <p:spPr>
+          <a:xfrm>
+            <a:off x="5210175" y="5219700"/>
+            <a:ext cx="1781175" cy="685800"/>
+          </a:xfrm>
+          <a:prstGeom prst="rect">
+            <a:avLst/>
+          </a:prstGeom>
+          <a:noFill/>
+          <a:ln/>
+        </p:spPr>
+        <p:txBody>
+          <a:bodyPr wrap="square" lIns="0" tIns="0" rIns="0" bIns="0" rtlCol="0" anchor="ctr">
+            <a:normAutofit/>
+          </a:bodyPr>
+          <a:lstStyle/>
+          <a:p>
+            <a:pPr algn="ctr" indent="0" marL="0">
+              <a:buNone/>
+            </a:pPr>
+            <a:r>
+              <a:rPr lang="en-US" sz="2100" dirty="0">
+                <a:solidFill>
+                  <a:srgbClr val="3F4855"/>
+                </a:solidFill>
+                <a:latin typeface="DejaVu Sans" pitchFamily="34" charset="0"/>
+                <a:ea typeface="DejaVu Sans" pitchFamily="34" charset="-122"/>
+                <a:cs typeface="DejaVu Sans" pitchFamily="34" charset="-120"/>
+              </a:rPr>
+              <a:t>asset</a:t>
+            </a:r>
+            <a:endParaRPr lang="en-US" sz="2100" dirty="0"/>
+          </a:p>
+          <a:p>
+            <a:pPr algn="ctr" indent="0" marL="0">
+              <a:buNone/>
+            </a:pPr>
+            <a:r>
+              <a:rPr lang="en-US" sz="2100" dirty="0">
+                <a:solidFill>
+                  <a:srgbClr val="3F4855"/>
+                </a:solidFill>
+                <a:latin typeface="DejaVu Sans" pitchFamily="34" charset="0"/>
+                <a:ea typeface="DejaVu Sans" pitchFamily="34" charset="-122"/>
+                <a:cs typeface="DejaVu Sans" pitchFamily="34" charset="-120"/>
+              </a:rPr>
+              <a:t>spec</a:t>
+            </a:r>
+            <a:endParaRPr lang="en-US" sz="2100" dirty="0"/>
           </a:p>
         </p:txBody>
       </p:sp>
